--- a/courses/ai-native/sessions/s03.pptx
+++ b/courses/ai-native/sessions/s03.pptx
@@ -17582,7 +17582,7 @@
         <p:spPr>
           <a:xfrm>
             <a:off x="365760" y="960120"/>
-            <a:ext cx="8412480" cy="2514600"/>
+            <a:ext cx="8412480" cy="2360168"/>
           </a:xfrm>
         </p:spPr>
         <p:txBody>
@@ -17796,7 +17796,7 @@
         </p:nvSpPr>
         <p:spPr>
           <a:xfrm>
-            <a:off x="365760" y="3949030"/>
+            <a:off x="365760" y="3718144"/>
             <a:ext cx="8412480" cy="274320"/>
           </a:xfrm>
           <a:prstGeom prst="rect">
@@ -17840,8 +17840,8 @@
         </p:blipFill>
         <p:spPr>
           <a:xfrm>
-            <a:off x="2938849" y="4223350"/>
-            <a:ext cx="3266302" cy="2153123"/>
+            <a:off x="2801938" y="3992464"/>
+            <a:ext cx="3540125" cy="2333625"/>
           </a:xfrm>
           <a:prstGeom prst="rect">
             <a:avLst/>

--- a/courses/ai-native/sessions/s03.pptx
+++ b/courses/ai-native/sessions/s03.pptx
@@ -5116,7 +5116,7 @@
           </p:nvPr>
         </p:nvGraphicFramePr>
         <p:xfrm>
-          <a:off x="587566" y="2690574"/>
+          <a:off x="587566" y="2624628"/>
           <a:ext cx="7955280" cy="3873500"/>
         </p:xfrm>
         <a:graphic>
@@ -6260,7 +6260,7 @@
         </p:nvSpPr>
         <p:spPr>
           <a:xfrm>
-            <a:off x="365760" y="2392124"/>
+            <a:off x="365760" y="2326178"/>
             <a:ext cx="8412480" cy="222250"/>
           </a:xfrm>
           <a:prstGeom prst="rect">
@@ -7200,8 +7200,8 @@
         </p:nvSpPr>
         <p:spPr>
           <a:xfrm>
-            <a:off x="365760" y="2604998"/>
-            <a:ext cx="8412480" cy="3001149"/>
+            <a:off x="365760" y="2731998"/>
+            <a:ext cx="8412480" cy="2638960"/>
           </a:xfrm>
           <a:prstGeom prst="rect">
             <a:avLst/>
@@ -7588,7 +7588,7 @@
           </p:nvPr>
         </p:nvGraphicFramePr>
         <p:xfrm>
-          <a:off x="412306" y="3309801"/>
+          <a:off x="412306" y="2898948"/>
           <a:ext cx="8305800" cy="3873500"/>
         </p:xfrm>
         <a:graphic>
@@ -8831,7 +8831,7 @@
         <p:spPr>
           <a:xfrm>
             <a:off x="365760" y="960120"/>
-            <a:ext cx="8412480" cy="1949631"/>
+            <a:ext cx="8412480" cy="1587442"/>
           </a:xfrm>
           <a:prstGeom prst="rect">
             <a:avLst/>
@@ -9078,7 +9078,7 @@
         </p:nvSpPr>
         <p:spPr>
           <a:xfrm>
-            <a:off x="365760" y="3011351"/>
+            <a:off x="365760" y="2600498"/>
             <a:ext cx="8412480" cy="222250"/>
           </a:xfrm>
           <a:prstGeom prst="rect">
@@ -9294,7 +9294,7 @@
           </p:nvPr>
         </p:nvGraphicFramePr>
         <p:xfrm>
-          <a:off x="412306" y="3309801"/>
+          <a:off x="412306" y="2898948"/>
           <a:ext cx="8305800" cy="3873500"/>
         </p:xfrm>
         <a:graphic>
@@ -9865,7 +9865,7 @@
         <p:spPr>
           <a:xfrm>
             <a:off x="365760" y="960120"/>
-            <a:ext cx="8412480" cy="1949631"/>
+            <a:ext cx="8412480" cy="1587442"/>
           </a:xfrm>
           <a:prstGeom prst="rect">
             <a:avLst/>
@@ -10062,7 +10062,7 @@
         </p:nvSpPr>
         <p:spPr>
           <a:xfrm>
-            <a:off x="365760" y="3011351"/>
+            <a:off x="365760" y="2600498"/>
             <a:ext cx="8412480" cy="222250"/>
           </a:xfrm>
           <a:prstGeom prst="rect">
@@ -10111,7 +10111,7 @@
         </p:nvSpPr>
         <p:spPr>
           <a:xfrm>
-            <a:off x="365760" y="4275401"/>
+            <a:off x="365760" y="3991548"/>
             <a:ext cx="8412480" cy="781278"/>
           </a:xfrm>
           <a:prstGeom prst="rect">
@@ -10350,7 +10350,7 @@
           </p:nvPr>
         </p:nvGraphicFramePr>
         <p:xfrm>
-          <a:off x="964756" y="3566839"/>
+          <a:off x="964756" y="3061046"/>
           <a:ext cx="7200900" cy="3873500"/>
         </p:xfrm>
         <a:graphic>
@@ -11257,7 +11257,7 @@
         <p:spPr>
           <a:xfrm>
             <a:off x="365760" y="960120"/>
-            <a:ext cx="8412480" cy="2206669"/>
+            <a:ext cx="8412480" cy="1739328"/>
           </a:xfrm>
           <a:prstGeom prst="rect">
             <a:avLst/>
@@ -11474,7 +11474,7 @@
         </p:nvSpPr>
         <p:spPr>
           <a:xfrm>
-            <a:off x="365760" y="3268389"/>
+            <a:off x="365760" y="2762596"/>
             <a:ext cx="8412480" cy="222250"/>
           </a:xfrm>
           <a:prstGeom prst="rect">
@@ -11690,7 +11690,7 @@
           </p:nvPr>
         </p:nvGraphicFramePr>
         <p:xfrm>
-          <a:off x="447866" y="3508421"/>
+          <a:off x="447866" y="3335366"/>
           <a:ext cx="8234680" cy="3873500"/>
         </p:xfrm>
         <a:graphic>
@@ -12429,7 +12429,7 @@
         <p:spPr>
           <a:xfrm>
             <a:off x="365760" y="960120"/>
-            <a:ext cx="8412480" cy="2148251"/>
+            <a:ext cx="8412480" cy="1996365"/>
           </a:xfrm>
           <a:prstGeom prst="rect">
             <a:avLst/>
@@ -12666,7 +12666,7 @@
         </p:nvSpPr>
         <p:spPr>
           <a:xfrm>
-            <a:off x="365760" y="3209971"/>
+            <a:off x="365760" y="3036916"/>
             <a:ext cx="8412480" cy="222250"/>
           </a:xfrm>
           <a:prstGeom prst="rect">
@@ -13149,8 +13149,8 @@
         </p:nvSpPr>
         <p:spPr>
           <a:xfrm>
-            <a:off x="365760" y="2935198"/>
-            <a:ext cx="8412480" cy="2603909"/>
+            <a:off x="365760" y="3062198"/>
+            <a:ext cx="8412480" cy="2136568"/>
           </a:xfrm>
           <a:prstGeom prst="rect">
             <a:avLst/>
@@ -13705,8 +13705,8 @@
         </p:nvSpPr>
         <p:spPr>
           <a:xfrm>
-            <a:off x="365760" y="3617878"/>
-            <a:ext cx="8412480" cy="274320"/>
+            <a:off x="365760" y="2947970"/>
+            <a:ext cx="8412480" cy="201168"/>
           </a:xfrm>
           <a:prstGeom prst="rect">
             <a:avLst/>
@@ -13749,8 +13749,8 @@
         </p:blipFill>
         <p:spPr>
           <a:xfrm>
-            <a:off x="2247809" y="3892198"/>
-            <a:ext cx="4648382" cy="2484276"/>
+            <a:off x="2082800" y="3185714"/>
+            <a:ext cx="4978400" cy="2660650"/>
           </a:xfrm>
           <a:prstGeom prst="rect">
             <a:avLst/>
@@ -13938,7 +13938,7 @@
           </p:nvPr>
         </p:nvGraphicFramePr>
         <p:xfrm>
-          <a:off x="1063816" y="2141448"/>
+          <a:off x="1063816" y="2112010"/>
           <a:ext cx="7002780" cy="3873500"/>
         </p:xfrm>
         <a:graphic>
@@ -14811,7 +14811,7 @@
         </p:nvSpPr>
         <p:spPr>
           <a:xfrm>
-            <a:off x="365760" y="1842998"/>
+            <a:off x="365760" y="1813560"/>
             <a:ext cx="8412480" cy="222250"/>
           </a:xfrm>
           <a:prstGeom prst="rect">
@@ -14860,7 +14860,7 @@
         </p:nvSpPr>
         <p:spPr>
           <a:xfrm>
-            <a:off x="365760" y="3395048"/>
+            <a:off x="365760" y="3492610"/>
             <a:ext cx="8412480" cy="781278"/>
           </a:xfrm>
           <a:prstGeom prst="rect">
@@ -15708,7 +15708,7 @@
           </p:nvPr>
         </p:nvGraphicFramePr>
         <p:xfrm>
-          <a:off x="755206" y="2141448"/>
+          <a:off x="755206" y="2112010"/>
           <a:ext cx="7620000" cy="3873500"/>
         </p:xfrm>
         <a:graphic>
@@ -17333,7 +17333,7 @@
         </p:nvSpPr>
         <p:spPr>
           <a:xfrm>
-            <a:off x="365760" y="1842998"/>
+            <a:off x="365760" y="1813560"/>
             <a:ext cx="8412480" cy="222250"/>
           </a:xfrm>
           <a:prstGeom prst="rect">
@@ -17582,7 +17582,7 @@
         <p:spPr>
           <a:xfrm>
             <a:off x="365760" y="960120"/>
-            <a:ext cx="8412480" cy="2360168"/>
+            <a:ext cx="8412480" cy="2225040"/>
           </a:xfrm>
         </p:spPr>
         <p:txBody>
@@ -17796,8 +17796,8 @@
         </p:nvSpPr>
         <p:spPr>
           <a:xfrm>
-            <a:off x="365760" y="3718144"/>
-            <a:ext cx="8412480" cy="274320"/>
+            <a:off x="365760" y="3486912"/>
+            <a:ext cx="8412480" cy="201168"/>
           </a:xfrm>
           <a:prstGeom prst="rect">
             <a:avLst/>
@@ -17840,7 +17840,7 @@
         </p:blipFill>
         <p:spPr>
           <a:xfrm>
-            <a:off x="2801938" y="3992464"/>
+            <a:off x="2801938" y="3724656"/>
             <a:ext cx="3540125" cy="2333625"/>
           </a:xfrm>
           <a:prstGeom prst="rect">
@@ -18029,7 +18029,7 @@
           </p:nvPr>
         </p:nvGraphicFramePr>
         <p:xfrm>
-          <a:off x="2095056" y="2655523"/>
+          <a:off x="2095056" y="2660650"/>
           <a:ext cx="4940300" cy="3873500"/>
         </p:xfrm>
         <a:graphic>
@@ -18989,7 +18989,7 @@
         </p:nvSpPr>
         <p:spPr>
           <a:xfrm>
-            <a:off x="365760" y="2357073"/>
+            <a:off x="365760" y="2362200"/>
             <a:ext cx="8412480" cy="222250"/>
           </a:xfrm>
           <a:prstGeom prst="rect">
@@ -19915,7 +19915,7 @@
           </p:nvPr>
         </p:nvGraphicFramePr>
         <p:xfrm>
-          <a:off x="714566" y="3823877"/>
+          <a:off x="714566" y="3335366"/>
           <a:ext cx="7701280" cy="3873500"/>
         </p:xfrm>
         <a:graphic>
@@ -20669,7 +20669,7 @@
         <p:spPr>
           <a:xfrm>
             <a:off x="365760" y="960120"/>
-            <a:ext cx="8412480" cy="2463707"/>
+            <a:ext cx="8412480" cy="1996365"/>
           </a:xfrm>
           <a:prstGeom prst="rect">
             <a:avLst/>
@@ -20946,7 +20946,7 @@
         </p:nvSpPr>
         <p:spPr>
           <a:xfrm>
-            <a:off x="365760" y="3525427"/>
+            <a:off x="365760" y="3036916"/>
             <a:ext cx="8412480" cy="222250"/>
           </a:xfrm>
           <a:prstGeom prst="rect">
@@ -20995,7 +20995,7 @@
         </p:nvSpPr>
         <p:spPr>
           <a:xfrm>
-            <a:off x="365760" y="4789477"/>
+            <a:off x="365760" y="4427966"/>
             <a:ext cx="8412480" cy="781278"/>
           </a:xfrm>
           <a:prstGeom prst="rect">
@@ -21763,7 +21763,7 @@
           </p:nvPr>
         </p:nvGraphicFramePr>
         <p:xfrm>
-          <a:off x="1928686" y="2141448"/>
+          <a:off x="1928686" y="2112010"/>
           <a:ext cx="5273040" cy="3873500"/>
         </p:xfrm>
         <a:graphic>
@@ -22636,7 +22636,7 @@
         </p:nvSpPr>
         <p:spPr>
           <a:xfrm>
-            <a:off x="365760" y="1842998"/>
+            <a:off x="365760" y="1813560"/>
             <a:ext cx="8412480" cy="222250"/>
           </a:xfrm>
           <a:prstGeom prst="rect">
@@ -22685,8 +22685,8 @@
         </p:nvSpPr>
         <p:spPr>
           <a:xfrm>
-            <a:off x="365760" y="3395048"/>
-            <a:ext cx="8412480" cy="1295353"/>
+            <a:off x="365760" y="3492610"/>
+            <a:ext cx="8412480" cy="933164"/>
           </a:xfrm>
           <a:prstGeom prst="rect">
             <a:avLst/>
@@ -22944,7 +22944,7 @@
           </p:nvPr>
         </p:nvGraphicFramePr>
         <p:xfrm>
-          <a:off x="412306" y="2141448"/>
+          <a:off x="412306" y="2112010"/>
           <a:ext cx="8305800" cy="3873500"/>
         </p:xfrm>
         <a:graphic>
@@ -24056,7 +24056,7 @@
         </p:nvSpPr>
         <p:spPr>
           <a:xfrm>
-            <a:off x="365760" y="1842998"/>
+            <a:off x="365760" y="1813560"/>
             <a:ext cx="8412480" cy="222250"/>
           </a:xfrm>
           <a:prstGeom prst="rect">
@@ -24105,7 +24105,7 @@
         </p:nvSpPr>
         <p:spPr>
           <a:xfrm>
-            <a:off x="365760" y="3395048"/>
+            <a:off x="365760" y="3492610"/>
             <a:ext cx="8412480" cy="1435556"/>
           </a:xfrm>
           <a:prstGeom prst="rect">
@@ -26341,7 +26341,7 @@
           </p:nvPr>
         </p:nvGraphicFramePr>
         <p:xfrm>
-          <a:off x="412306" y="2141448"/>
+          <a:off x="412306" y="2112010"/>
           <a:ext cx="8305800" cy="3873500"/>
         </p:xfrm>
         <a:graphic>
@@ -27224,7 +27224,7 @@
         </p:nvSpPr>
         <p:spPr>
           <a:xfrm>
-            <a:off x="365760" y="1842998"/>
+            <a:off x="365760" y="1813560"/>
             <a:ext cx="8412480" cy="222250"/>
           </a:xfrm>
           <a:prstGeom prst="rect">
@@ -27273,8 +27273,8 @@
         </p:nvSpPr>
         <p:spPr>
           <a:xfrm>
-            <a:off x="365760" y="3395048"/>
-            <a:ext cx="8412480" cy="1552391"/>
+            <a:off x="365760" y="3492610"/>
+            <a:ext cx="8412480" cy="933164"/>
           </a:xfrm>
           <a:prstGeom prst="rect">
             <a:avLst/>
@@ -27542,7 +27542,7 @@
           </p:nvPr>
         </p:nvGraphicFramePr>
         <p:xfrm>
-          <a:off x="1117156" y="1884410"/>
+          <a:off x="1117156" y="1837690"/>
           <a:ext cx="6896100" cy="3873500"/>
         </p:xfrm>
         <a:graphic>
@@ -28420,7 +28420,7 @@
         </p:nvSpPr>
         <p:spPr>
           <a:xfrm>
-            <a:off x="365760" y="1585960"/>
+            <a:off x="365760" y="1539240"/>
             <a:ext cx="8412480" cy="222250"/>
           </a:xfrm>
           <a:prstGeom prst="rect">
@@ -28636,7 +28636,7 @@
           </p:nvPr>
         </p:nvGraphicFramePr>
         <p:xfrm>
-          <a:off x="412306" y="3566839"/>
+          <a:off x="412306" y="3061046"/>
           <a:ext cx="8305800" cy="3873500"/>
         </p:xfrm>
         <a:graphic>
@@ -29375,7 +29375,7 @@
         <p:spPr>
           <a:xfrm>
             <a:off x="365760" y="960120"/>
-            <a:ext cx="8412480" cy="2206669"/>
+            <a:ext cx="8412480" cy="1739328"/>
           </a:xfrm>
           <a:prstGeom prst="rect">
             <a:avLst/>
@@ -29592,7 +29592,7 @@
         </p:nvSpPr>
         <p:spPr>
           <a:xfrm>
-            <a:off x="365760" y="3268389"/>
+            <a:off x="365760" y="2762596"/>
             <a:ext cx="8412480" cy="222250"/>
           </a:xfrm>
           <a:prstGeom prst="rect">
@@ -29808,7 +29808,7 @@
           </p:nvPr>
         </p:nvGraphicFramePr>
         <p:xfrm>
-          <a:off x="1900746" y="2141448"/>
+          <a:off x="1900746" y="2112010"/>
           <a:ext cx="5328920" cy="3873500"/>
         </p:xfrm>
         <a:graphic>
@@ -30543,7 +30543,7 @@
         </p:nvSpPr>
         <p:spPr>
           <a:xfrm>
-            <a:off x="365760" y="1842998"/>
+            <a:off x="365760" y="1813560"/>
             <a:ext cx="8412480" cy="222250"/>
           </a:xfrm>
           <a:prstGeom prst="rect">
@@ -30592,7 +30592,7 @@
         </p:nvSpPr>
         <p:spPr>
           <a:xfrm>
-            <a:off x="365760" y="3107048"/>
+            <a:off x="365760" y="3204610"/>
             <a:ext cx="8412480" cy="1575758"/>
           </a:xfrm>
           <a:prstGeom prst="rect">
@@ -30917,7 +30917,7 @@
           </p:nvPr>
         </p:nvGraphicFramePr>
         <p:xfrm>
-          <a:off x="412306" y="2141448"/>
+          <a:off x="412306" y="2112010"/>
           <a:ext cx="8305800" cy="3873500"/>
         </p:xfrm>
         <a:graphic>
@@ -31810,7 +31810,7 @@
         </p:nvSpPr>
         <p:spPr>
           <a:xfrm>
-            <a:off x="365760" y="1842998"/>
+            <a:off x="365760" y="1813560"/>
             <a:ext cx="8412480" cy="222250"/>
           </a:xfrm>
           <a:prstGeom prst="rect">
@@ -31859,7 +31859,7 @@
         </p:nvSpPr>
         <p:spPr>
           <a:xfrm>
-            <a:off x="365760" y="3395048"/>
+            <a:off x="365760" y="3492610"/>
             <a:ext cx="8412480" cy="2346871"/>
           </a:xfrm>
           <a:prstGeom prst="rect">
@@ -32224,7 +32224,7 @@
           </p:nvPr>
         </p:nvGraphicFramePr>
         <p:xfrm>
-          <a:off x="672656" y="2141448"/>
+          <a:off x="672656" y="2112010"/>
           <a:ext cx="7785100" cy="3873500"/>
         </p:xfrm>
         <a:graphic>
@@ -34232,7 +34232,7 @@
         </p:nvSpPr>
         <p:spPr>
           <a:xfrm>
-            <a:off x="365760" y="1842998"/>
+            <a:off x="365760" y="1813560"/>
             <a:ext cx="8412480" cy="222250"/>
           </a:xfrm>
           <a:prstGeom prst="rect">
@@ -34281,7 +34281,7 @@
         </p:nvSpPr>
         <p:spPr>
           <a:xfrm>
-            <a:off x="365760" y="4547048"/>
+            <a:off x="365760" y="4644610"/>
             <a:ext cx="8412480" cy="781278"/>
           </a:xfrm>
           <a:prstGeom prst="rect">
@@ -35055,7 +35055,7 @@
           </p:nvPr>
         </p:nvGraphicFramePr>
         <p:xfrm>
-          <a:off x="1230185" y="2141448"/>
+          <a:off x="1230185" y="2112010"/>
           <a:ext cx="6670040" cy="3873500"/>
         </p:xfrm>
         <a:graphic>
@@ -36768,7 +36768,7 @@
         </p:nvSpPr>
         <p:spPr>
           <a:xfrm>
-            <a:off x="365760" y="1842998"/>
+            <a:off x="365760" y="1813560"/>
             <a:ext cx="8412480" cy="222250"/>
           </a:xfrm>
           <a:prstGeom prst="rect">
@@ -36817,7 +36817,7 @@
         </p:nvSpPr>
         <p:spPr>
           <a:xfrm>
-            <a:off x="365760" y="4835048"/>
+            <a:off x="365760" y="4932610"/>
             <a:ext cx="8412480" cy="781278"/>
           </a:xfrm>
           <a:prstGeom prst="rect">
@@ -37064,7 +37064,7 @@
           </p:nvPr>
         </p:nvGraphicFramePr>
         <p:xfrm>
-          <a:off x="412306" y="1884410"/>
+          <a:off x="412306" y="1837690"/>
           <a:ext cx="8305800" cy="3873500"/>
         </p:xfrm>
         <a:graphic>
@@ -38293,7 +38293,7 @@
         </p:nvSpPr>
         <p:spPr>
           <a:xfrm>
-            <a:off x="365760" y="1585960"/>
+            <a:off x="365760" y="1539240"/>
             <a:ext cx="8412480" cy="222250"/>
           </a:xfrm>
           <a:prstGeom prst="rect">
@@ -38509,7 +38509,7 @@
           </p:nvPr>
         </p:nvGraphicFramePr>
         <p:xfrm>
-          <a:off x="868236" y="4080914"/>
+          <a:off x="868236" y="3335366"/>
           <a:ext cx="7393940" cy="3873500"/>
         </p:xfrm>
         <a:graphic>
@@ -40159,7 +40159,7 @@
         <p:spPr>
           <a:xfrm>
             <a:off x="365760" y="960120"/>
-            <a:ext cx="8412480" cy="2720744"/>
+            <a:ext cx="8412480" cy="1996365"/>
           </a:xfrm>
           <a:prstGeom prst="rect">
             <a:avLst/>
@@ -40376,7 +40376,7 @@
         </p:nvSpPr>
         <p:spPr>
           <a:xfrm>
-            <a:off x="365760" y="3782464"/>
+            <a:off x="365760" y="3036916"/>
             <a:ext cx="8412480" cy="222250"/>
           </a:xfrm>
           <a:prstGeom prst="rect">
@@ -43622,8 +43622,8 @@
         </p:nvSpPr>
         <p:spPr>
           <a:xfrm>
-            <a:off x="365760" y="3586286"/>
-            <a:ext cx="8412480" cy="274320"/>
+            <a:off x="365760" y="2511552"/>
+            <a:ext cx="8412480" cy="201168"/>
           </a:xfrm>
           <a:prstGeom prst="rect">
             <a:avLst/>
@@ -43666,7 +43666,7 @@
         </p:blipFill>
         <p:spPr>
           <a:xfrm>
-            <a:off x="1460500" y="3860606"/>
+            <a:off x="1460500" y="2749296"/>
             <a:ext cx="6223000" cy="1801813"/>
           </a:xfrm>
           <a:prstGeom prst="rect">
@@ -44150,7 +44150,7 @@
         </p:nvSpPr>
         <p:spPr>
           <a:xfrm>
-            <a:off x="365760" y="3265398"/>
+            <a:off x="365760" y="3392398"/>
             <a:ext cx="8412480" cy="2603909"/>
           </a:xfrm>
           <a:prstGeom prst="rect">
@@ -44515,7 +44515,7 @@
           </p:nvPr>
         </p:nvGraphicFramePr>
         <p:xfrm>
-          <a:off x="993966" y="2141448"/>
+          <a:off x="993966" y="2112010"/>
           <a:ext cx="7142480" cy="3873500"/>
         </p:xfrm>
         <a:graphic>
@@ -46228,7 +46228,7 @@
         </p:nvSpPr>
         <p:spPr>
           <a:xfrm>
-            <a:off x="365760" y="1842998"/>
+            <a:off x="365760" y="1813560"/>
             <a:ext cx="8412480" cy="222250"/>
           </a:xfrm>
           <a:prstGeom prst="rect">
@@ -46444,7 +46444,7 @@
           </p:nvPr>
         </p:nvGraphicFramePr>
         <p:xfrm>
-          <a:off x="852995" y="2690574"/>
+          <a:off x="852995" y="2624628"/>
           <a:ext cx="7424420" cy="3873500"/>
         </p:xfrm>
         <a:graphic>
@@ -47568,7 +47568,7 @@
         </p:nvSpPr>
         <p:spPr>
           <a:xfrm>
-            <a:off x="365760" y="2392124"/>
+            <a:off x="365760" y="2326178"/>
             <a:ext cx="8412480" cy="222250"/>
           </a:xfrm>
           <a:prstGeom prst="rect">
@@ -47617,7 +47617,7 @@
         </p:nvSpPr>
         <p:spPr>
           <a:xfrm>
-            <a:off x="365760" y="4232174"/>
+            <a:off x="365760" y="4293228"/>
             <a:ext cx="8412480" cy="781278"/>
           </a:xfrm>
           <a:prstGeom prst="rect">
@@ -47856,7 +47856,7 @@
           </p:nvPr>
         </p:nvGraphicFramePr>
         <p:xfrm>
-          <a:off x="1494346" y="3039846"/>
+          <a:off x="1494346" y="3173984"/>
           <a:ext cx="6141720" cy="3873500"/>
         </p:xfrm>
         <a:graphic>
@@ -48490,7 +48490,7 @@
         </p:nvSpPr>
         <p:spPr>
           <a:xfrm>
-            <a:off x="365760" y="2741396"/>
+            <a:off x="365760" y="2875534"/>
             <a:ext cx="8412480" cy="222250"/>
           </a:xfrm>
           <a:prstGeom prst="rect">
@@ -48539,8 +48539,8 @@
         </p:nvSpPr>
         <p:spPr>
           <a:xfrm>
-            <a:off x="365760" y="1842998"/>
-            <a:ext cx="8412480" cy="274320"/>
+            <a:off x="365760" y="1886712"/>
+            <a:ext cx="8412480" cy="201168"/>
           </a:xfrm>
           <a:prstGeom prst="rect">
             <a:avLst/>
@@ -48590,7 +48590,7 @@
         </p:blipFill>
         <p:spPr>
           <a:xfrm>
-            <a:off x="1453706" y="2117318"/>
+            <a:off x="1453706" y="2124456"/>
             <a:ext cx="6223000" cy="412750"/>
           </a:xfrm>
           <a:prstGeom prst="rect">

--- a/courses/ai-native/sessions/s03.pptx
+++ b/courses/ai-native/sessions/s03.pptx
@@ -1192,7 +1192,7 @@
             <a:pPr lvl="0"/>
             <a:r>
               <a:rPr lang="ko-KR" sz="1200"/>
-              <a:t>자동화는 "04. 수용 기준과 검증 가능한 작업 단위"에서 실제 테스트 코드로 다룬다.</a:t>
+              <a:t>자동화는 "세션 04. 수용 기준과 검증 가능한 작업 단위"에서 실제 테스트 코드로 다룬다.</a:t>
             </a:r>
           </a:p>
         </p:txBody>
@@ -1253,7 +1253,7 @@
             <a:pPr lvl="0"/>
             <a:r>
               <a:rPr lang="ko-KR" sz="1200"/>
-              <a:t>"02. 작업 특성에 따른 AI 활용 방식"은 "어떤 방식으로 맡길까?"를 다뤘다. 이 세션은 "무엇을 만들게 할까?"를 다룬다. "무엇으로 받아들일까?"(수용 기준)는 "04. 수용 기준과 검증 가능한 작업 단위"가 맡는다.</a:t>
+              <a:t>"세션 02. 작업 특성에 따른 AI 활용 방식"은 "어떤 방식으로 맡길까?"를 다뤘다. 이 세션은 "무엇을 만들게 할까?"를 다룬다. "무엇으로 받아들일까?"(수용 기준)는 "세션 04. 수용 기준과 검증 가능한 작업 단위"가 맡는다.</a:t>
             </a:r>
           </a:p>
           <a:p>
@@ -1396,7 +1396,7 @@
             <a:pPr lvl="0"/>
             <a:r>
               <a:rPr lang="ko-KR" sz="1200"/>
-              <a:t>아키텍처를 맥락으로 주는 법(의존 규칙)은 "05. 도메인·설계 지식과 맥락 구성"에서 다룬다.</a:t>
+              <a:t>아키텍처를 맥락으로 주는 법(의존 규칙)은 "세션 05. 도메인·설계 지식과 맥락 구성"에서 다룬다.</a:t>
             </a:r>
           </a:p>
         </p:txBody>
@@ -1457,7 +1457,7 @@
             <a:pPr lvl="0"/>
             <a:r>
               <a:rPr lang="ko-KR" sz="1200"/>
-              <a:t>업무 규칙의 예를 수용 기준으로 정리해 작업 명세서에 더하는 일은 "04. 수용 기준과 검증 가능한 작업 단위"에서 한다.</a:t>
+              <a:t>업무 규칙의 예를 수용 기준으로 정리해 작업 명세서에 더하는 일은 "세션 04. 수용 기준과 검증 가능한 작업 단위"에서 한다.</a:t>
             </a:r>
           </a:p>
         </p:txBody>
@@ -1525,7 +1525,7 @@
             <a:pPr lvl="0"/>
             <a:r>
               <a:rPr lang="ko-KR" sz="1200"/>
-              <a:t>미정 하나는 이번 릴리스에 숨기지 않고 남긴 질문이다. "10. 실패 대응·재시도·복구"에서 다시 다룬다.</a:t>
+              <a:t>미정 하나는 이번 릴리스에 숨기지 않고 남긴 질문이다. "세션 10. 실패 대응·재시도·복구"에서 다시 다룬다.</a:t>
             </a:r>
           </a:p>
         </p:txBody>
@@ -1593,7 +1593,7 @@
             <a:pPr lvl="0"/>
             <a:r>
               <a:rPr lang="ko-KR" sz="1200"/>
-              <a:t>메모리 뱅크(맥락 파일)를 만드는 법은 "05. 도메인·설계 지식과 맥락 구성"에서 다룬다.</a:t>
+              <a:t>메모리 뱅크(맥락 파일)를 만드는 법은 "세션 05. 도메인·설계 지식과 맥락 구성"에서 다룬다.</a:t>
             </a:r>
           </a:p>
         </p:txBody>
@@ -1912,7 +1912,7 @@
             <a:pPr lvl="0"/>
             <a:r>
               <a:rPr lang="ko-KR" sz="1200"/>
-              <a:t>따랐는지 확인하는 센서는 "09. 검증 하네스·결과 점검·피드백"에서 다룬다.</a:t>
+              <a:t>따랐는지 확인하는 센서는 "세션 09. 검증 하네스·결과 점검·피드백"에서 다룬다.</a:t>
             </a:r>
           </a:p>
         </p:txBody>
@@ -2170,7 +2170,7 @@
             <a:pPr lvl="0"/>
             <a:r>
               <a:rPr lang="ko-KR" sz="1200"/>
-              <a:t>수용 기준은 "04. 수용 기준과 검증 가능한 작업 단위", 맥락 파일은 "05. 도메인·설계 지식과 맥락 구성", 센서는 "09. 검증 하네스·결과 점검·피드백"에서 다룬다.</a:t>
+              <a:t>수용 기준은 "세션 04. 수용 기준과 검증 가능한 작업 단위", 맥락 파일은 "세션 05. 도메인·설계 지식과 맥락 구성", 센서는 "세션 09. 검증 하네스·결과 점검·피드백"에서 다룬다.</a:t>
             </a:r>
           </a:p>
         </p:txBody>
@@ -2299,7 +2299,7 @@
             <a:pPr lvl="0"/>
             <a:r>
               <a:rPr lang="ko-KR" sz="1200"/>
-              <a:t>두 축의 정리는 원전의 분류가 아니다(guides/sw-engineering-principles.md 7절). 작업 계획은 스토리가 한 번에 끝나지 않을 만큼 클 때 더한다("04. 수용 기준과 검증 가능한 작업 단위").</a:t>
+              <a:t>두 축의 정리는 원전의 분류가 아니다(guides/sw-engineering-principles.md 7절). 작업 계획은 스토리가 한 번에 끝나지 않을 만큼 클 때 더한다("세션 04. 수용 기준과 검증 가능한 작업 단위").</a:t>
             </a:r>
           </a:p>
         </p:txBody>
@@ -2360,7 +2360,7 @@
             <a:pPr lvl="0"/>
             <a:r>
               <a:rPr lang="ko-KR" sz="1200"/>
-              <a:t>맥락이 한계 효용이 줄어드는 유한한 자원이라는 점은 "01. AI 협업의 특성과 사람의 판단 책임"의 「맥락의 한계」에서 다뤘다.</a:t>
+              <a:t>맥락이 한계 효용이 줄어드는 유한한 자원이라는 점은 "세션 01. AI 협업의 특성과 사람의 판단 책임"의 「맥락의 한계」에서 다뤘다.</a:t>
             </a:r>
           </a:p>
         </p:txBody>
@@ -2421,7 +2421,7 @@
             <a:pPr lvl="0"/>
             <a:r>
               <a:rPr lang="ko-KR" sz="1200"/>
-              <a:t>맥락 파일과 의존 규칙은 "05. 도메인·설계 지식과 맥락 구성"에서 만든다.</a:t>
+              <a:t>맥락 파일과 의존 규칙은 "세션 05. 도메인·설계 지식과 맥락 구성"에서 만든다.</a:t>
             </a:r>
           </a:p>
         </p:txBody>
@@ -2618,7 +2618,7 @@
             <a:pPr lvl="0"/>
             <a:r>
               <a:rPr lang="ko-KR" sz="1200"/>
-              <a:t>업무 규칙을 저장소에 남기는 방법(맥락 파일·용어집)은 "05. 도메인·설계 지식과 맥락 구성"에서 다룬다.</a:t>
+              <a:t>업무 규칙을 저장소에 남기는 방법(맥락 파일·용어집)은 "세션 05. 도메인·설계 지식과 맥락 구성"에서 다룬다.</a:t>
             </a:r>
           </a:p>
         </p:txBody>
@@ -2686,7 +2686,7 @@
             <a:pPr lvl="0"/>
             <a:r>
               <a:rPr lang="ko-KR" sz="1200"/>
-              <a:t>용어집은 요구 산출물이라 요구사항 정의서에 둔다. 도메인 모델(개념·관계·상태 기계)은 분석 산출물이다. 도메인 모델과 아키텍처를 맥락으로 만드는 법은 "05. 도메인·설계 지식과 맥락 구성"에서 다룬다.</a:t>
+              <a:t>용어집은 요구 산출물이라 요구사항 정의서에 둔다. 도메인 모델(개념·관계·상태 기계)은 분석 산출물이다. 도메인 모델과 아키텍처를 맥락으로 만드는 법은 "세션 05. 도메인·설계 지식과 맥락 구성"에서 다룬다.</a:t>
             </a:r>
           </a:p>
         </p:txBody>
@@ -3270,7 +3270,7 @@
             <a:pPr lvl="0"/>
             <a:r>
               <a:rPr lang="ko-KR" sz="1200"/>
-              <a:t>시나리오에서 이 답은 업무 담당자와 30분 회의로 정했다. "01. AI 협업의 특성과 사람의 판단 책임"의 첫 시도는 이 질문을 묻지 않고 에이전트가 답을 골랐다.</a:t>
+              <a:t>시나리오에서 이 답은 업무 담당자와 30분 회의로 정했다. "세션 01. AI 협업의 특성과 사람의 판단 책임"의 첫 시도는 이 질문을 묻지 않고 에이전트가 답을 골랐다.</a:t>
             </a:r>
           </a:p>
         </p:txBody>
@@ -25495,7 +25495,7 @@
                 <a:latin typeface="맑은 고딕"/>
                 <a:ea typeface="맑은 고딕"/>
               </a:rPr>
-              <a:t> "01. AI 협업의 특성과 사람의 판단 책임"에서 보았듯이 요청 한 줄로 맡기면 LLM이 빈칸을 추측한다. 명세를 먼저 쓰면 사람이 정할 것을 먼저 정한다.</a:t>
+              <a:t> "세션 01. AI 협업의 특성과 사람의 판단 책임"에서 보았듯이 요청 한 줄로 맡기면 LLM이 빈칸을 추측한다. 명세를 먼저 쓰면 사람이 정할 것을 먼저 정한다.</a:t>
             </a:r>
           </a:p>
           <a:p>

--- a/courses/ai-native/sessions/s03.pptx
+++ b/courses/ai-native/sessions/s03.pptx
@@ -852,7 +852,7 @@
             <a:pPr lvl="0"/>
             <a:r>
               <a:rPr lang="ko-KR" sz="1200"/>
-              <a:t>시연과 실습은 주문한다를 한 스토리로 다룬다. 나누는 기준을 보이기 위한 예다.</a:t>
+              <a:t>시연과 실습은 "주문한다"를 한 스토리로 다룬다. 나누는 기준을 보이기 위한 예다.</a:t>
             </a:r>
           </a:p>
         </p:txBody>
@@ -3080,7 +3080,7 @@
             <a:pPr lvl="0"/>
             <a:r>
               <a:rPr lang="ko-KR" sz="1200"/>
-              <a:t>예의 요구는 주문한다를 Kiro 형식으로 옮긴 교육용 예다. Kiro가 만든 결과가 아니다.</a:t>
+              <a:t>예의 요구는 "주문한다"를 Kiro 형식으로 옮긴 교육용 예다. Kiro가 만든 결과가 아니다.</a:t>
             </a:r>
           </a:p>
         </p:txBody>
@@ -10092,7 +10092,7 @@
                 <a:latin typeface="맑은 고딕"/>
                 <a:ea typeface="맑은 고딕"/>
               </a:rPr>
-              <a:t>주문한다를 나누는 두 방법</a:t>
+              <a:t>"주문한다"를 나누는 두 방법</a:t>
             </a:r>
           </a:p>
         </p:txBody>
@@ -11853,7 +11853,7 @@
                           <a:ea typeface="맑은 고딕" panose="020B0503020000020004" pitchFamily="34" charset="-127"/>
                           <a:cs typeface="맑은 고딕"/>
                         </a:rPr>
-                        <a:t>주문한다에서</a:t>
+                        <a:t>"주문한다"에서</a:t>
                       </a:r>
                     </a:p>
                   </a:txBody>
@@ -13728,7 +13728,7 @@
                 <a:latin typeface="맑은 고딕"/>
                 <a:ea typeface="맑은 고딕"/>
               </a:rPr>
-              <a:t>주문한다의 Example Mapping</a:t>
+              <a:t>"주문한다"의 Example Mapping</a:t>
             </a:r>
           </a:p>
         </p:txBody>
@@ -19518,7 +19518,7 @@
                 <a:latin typeface="맑은 고딕"/>
                 <a:ea typeface="맑은 고딕"/>
               </a:rPr>
-              <a:t> 주문한다</a:t>
+              <a:t> "주문한다"</a:t>
             </a:r>
           </a:p>
         </p:txBody>
@@ -34128,7 +34128,7 @@
                 <a:latin typeface="맑은 고딕"/>
                 <a:ea typeface="맑은 고딕"/>
               </a:rPr>
-              <a:t>주문한다는 도메인·기술 복잡성이 </a:t>
+              <a:t>"주문한다"는 도메인·기술 복잡성이 </a:t>
             </a:r>
             <a:r>
               <a:rPr sz="1800" b="1">
@@ -34262,7 +34262,7 @@
                 <a:latin typeface="맑은 고딕"/>
                 <a:ea typeface="맑은 고딕"/>
               </a:rPr>
-              <a:t>주문한다에 넣는 산출물</a:t>
+              <a:t>"주문한다"에 넣는 산출물</a:t>
             </a:r>
           </a:p>
         </p:txBody>
@@ -38673,7 +38673,7 @@
                           <a:ea typeface="맑은 고딕" panose="020B0503020000020004" pitchFamily="34" charset="-127"/>
                           <a:cs typeface="맑은 고딕"/>
                         </a:rPr>
-                        <a:t>주문한다(예)</a:t>
+                        <a:t>"주문한다"(예)</a:t>
                       </a:r>
                     </a:p>
                   </a:txBody>
@@ -43583,7 +43583,7 @@
                 <a:latin typeface="맑은 고딕"/>
                 <a:ea typeface="맑은 고딕"/>
               </a:rPr>
-              <a:t> 명세의 뜻과 실현 구조로 에이전트에게 준다. 주문한다는 둘 다 가볍게 넣는다</a:t>
+              <a:t> 명세의 뜻과 실현 구조로 에이전트에게 준다. "주문한다"는 둘 다 가볍게 넣는다</a:t>
             </a:r>
             <a:r>
               <a:rPr sz="1200" b="0">
@@ -43622,7 +43622,7 @@
         </p:nvSpPr>
         <p:spPr>
           <a:xfrm>
-            <a:off x="365760" y="2511552"/>
+            <a:off x="365760" y="2785872"/>
             <a:ext cx="8412480" cy="201168"/>
           </a:xfrm>
           <a:prstGeom prst="rect">
@@ -43666,7 +43666,7 @@
         </p:blipFill>
         <p:spPr>
           <a:xfrm>
-            <a:off x="1460500" y="2749296"/>
+            <a:off x="1460500" y="3023616"/>
             <a:ext cx="6223000" cy="1801813"/>
           </a:xfrm>
           <a:prstGeom prst="rect">
@@ -44131,7 +44131,7 @@
                 <a:latin typeface="맑은 고딕"/>
                 <a:ea typeface="맑은 고딕"/>
               </a:rPr>
-              <a:t>의 목록이다. 주문한다를 이 형식으로 쓰면 다음과 같다.</a:t>
+              <a:t>의 목록이다. "주문한다"를 이 형식으로 쓰면 다음과 같다.</a:t>
             </a:r>
           </a:p>
         </p:txBody>
@@ -45700,7 +45700,7 @@
                           <a:ea typeface="맑은 고딕" panose="020B0503020000020004" pitchFamily="34" charset="-127"/>
                           <a:cs typeface="맑은 고딕"/>
                         </a:rPr>
-                        <a:t>주문한다의 작업 명세서</a:t>
+                        <a:t>"주문한다"의 작업 명세서</a:t>
                       </a:r>
                     </a:p>
                   </a:txBody>

--- a/courses/ai-native/sessions/s03.pptx
+++ b/courses/ai-native/sessions/s03.pptx
@@ -17840,8 +17840,8 @@
         </p:blipFill>
         <p:spPr>
           <a:xfrm>
-            <a:off x="2801938" y="3724656"/>
-            <a:ext cx="3540125" cy="2333625"/>
+            <a:off x="2804418" y="3724656"/>
+            <a:ext cx="3535164" cy="2330355"/>
           </a:xfrm>
           <a:prstGeom prst="rect">
             <a:avLst/>
@@ -41900,7 +41900,7 @@
                 <a:latin typeface="맑은 고딕"/>
                 <a:ea typeface="맑은 고딕"/>
               </a:rPr>
-              <a:t> 미정 항목이 있는 명세 형식을 주자 LLM은 모르는 것을 질문으로 남겼다</a:t>
+              <a:t> 미정 항목이 있는 형식을 주자 모르는 것을 질문으로 남겼다</a:t>
             </a:r>
           </a:p>
           <a:p>
@@ -43666,8 +43666,8 @@
         </p:blipFill>
         <p:spPr>
           <a:xfrm>
-            <a:off x="1460500" y="3023616"/>
-            <a:ext cx="6223000" cy="1801813"/>
+            <a:off x="1038200" y="3023616"/>
+            <a:ext cx="7067600" cy="2046359"/>
           </a:xfrm>
           <a:prstGeom prst="rect">
             <a:avLst/>
@@ -47856,7 +47856,7 @@
           </p:nvPr>
         </p:nvGraphicFramePr>
         <p:xfrm>
-          <a:off x="1494346" y="3173984"/>
+          <a:off x="1494346" y="3268222"/>
           <a:ext cx="6141720" cy="3873500"/>
         </p:xfrm>
         <a:graphic>
@@ -48490,7 +48490,7 @@
         </p:nvSpPr>
         <p:spPr>
           <a:xfrm>
-            <a:off x="365760" y="2875534"/>
+            <a:off x="365760" y="2969772"/>
             <a:ext cx="8412480" cy="222250"/>
           </a:xfrm>
           <a:prstGeom prst="rect">
@@ -48590,8 +48590,8 @@
         </p:blipFill>
         <p:spPr>
           <a:xfrm>
-            <a:off x="1453706" y="2124456"/>
-            <a:ext cx="6223000" cy="412750"/>
+            <a:off x="743299" y="2124456"/>
+            <a:ext cx="7643813" cy="506988"/>
           </a:xfrm>
           <a:prstGeom prst="rect">
             <a:avLst/>

--- a/courses/ai-native/sessions/s03.pptx
+++ b/courses/ai-native/sessions/s03.pptx
@@ -6116,7 +6116,7 @@
                 <a:latin typeface="맑은 고딕"/>
                 <a:ea typeface="맑은 고딕"/>
               </a:rPr>
-              <a:t>"도메인 전문가가 관심을 두는 </a:t>
+              <a:t>도메인 이벤트는 도메인 전문가가 관심을 두는 </a:t>
             </a:r>
             <a:r>
               <a:rPr sz="1800" b="1">
@@ -6126,7 +6126,7 @@
                 <a:latin typeface="맑은 고딕"/>
                 <a:ea typeface="맑은 고딕"/>
               </a:rPr>
-              <a:t>무언가가 일어났다</a:t>
+              <a:t>무언가가 일어난 것</a:t>
             </a:r>
             <a:r>
               <a:rPr sz="1800" b="0">
@@ -6136,7 +6136,7 @@
                 <a:latin typeface="맑은 고딕"/>
                 <a:ea typeface="맑은 고딕"/>
               </a:rPr>
-              <a:t>"</a:t>
+              <a:t>이다</a:t>
             </a:r>
             <a:r>
               <a:rPr sz="1000" b="0">
@@ -6156,27 +6156,7 @@
                 <a:latin typeface="맑은 고딕"/>
                 <a:ea typeface="맑은 고딕"/>
               </a:rPr>
-              <a:t>"Something happened that domain experts care about."</a:t>
-            </a:r>
-            <a:r>
-              <a:rPr sz="1000" b="0">
-                <a:solidFill>
-                  <a:srgbClr val="000000"/>
-                </a:solidFill>
-                <a:latin typeface="맑은 고딕"/>
-                <a:ea typeface="맑은 고딕"/>
-              </a:rPr>
-              <a:t>, </a:t>
-            </a:r>
-            <a:r>
-              <a:rPr sz="1000" b="0">
-                <a:solidFill>
-                  <a:srgbClr val="000000"/>
-                </a:solidFill>
-                <a:latin typeface="맑은 고딕"/>
-                <a:ea typeface="맑은 고딕"/>
-              </a:rPr>
-              <a:t>[Evans 2015]</a:t>
+              <a:t>"Something happened that domain experts care about.", [Evans 2015]</a:t>
             </a:r>
           </a:p>
         </p:txBody>
@@ -6563,7 +6543,7 @@
                 <a:latin typeface="맑은 고딕"/>
                 <a:ea typeface="맑은 고딕"/>
               </a:rPr>
-              <a:t>"유저 스토리에는 결정적인 세 가지 면이 있다. 이를 </a:t>
+              <a:t>유저 스토리에는 결정적인 세 가지 면이 있고 이를 </a:t>
             </a:r>
             <a:r>
               <a:rPr sz="1800" b="1">
@@ -6573,7 +6553,7 @@
                 <a:latin typeface="맑은 고딕"/>
                 <a:ea typeface="맑은 고딕"/>
               </a:rPr>
-              <a:t>카드, 대화, 확인</a:t>
+              <a:t>카드·대화·확인</a:t>
             </a:r>
             <a:r>
               <a:rPr sz="1800" b="0">
@@ -6583,7 +6563,7 @@
                 <a:latin typeface="맑은 고딕"/>
                 <a:ea typeface="맑은 고딕"/>
               </a:rPr>
-              <a:t>이라 부를 수 있다"</a:t>
+              <a:t>이라 부를 수 있다</a:t>
             </a:r>
             <a:r>
               <a:rPr sz="1000" b="0">
@@ -6603,27 +6583,7 @@
                 <a:latin typeface="맑은 고딕"/>
                 <a:ea typeface="맑은 고딕"/>
               </a:rPr>
-              <a:t>"User stories have three critical aspects. We can call these Card, Conversation, and Confirmation."</a:t>
-            </a:r>
-            <a:r>
-              <a:rPr sz="1000" b="0">
-                <a:solidFill>
-                  <a:srgbClr val="000000"/>
-                </a:solidFill>
-                <a:latin typeface="맑은 고딕"/>
-                <a:ea typeface="맑은 고딕"/>
-              </a:rPr>
-              <a:t>, </a:t>
-            </a:r>
-            <a:r>
-              <a:rPr sz="1000" b="0">
-                <a:solidFill>
-                  <a:srgbClr val="000000"/>
-                </a:solidFill>
-                <a:latin typeface="맑은 고딕"/>
-                <a:ea typeface="맑은 고딕"/>
-              </a:rPr>
-              <a:t>[Jeffries 2001]</a:t>
+              <a:t>"User stories have three critical aspects. We can call these Card, Conversation, and Confirmation.", [Jeffries 2001]</a:t>
             </a:r>
           </a:p>
           <a:p>
@@ -21344,6 +21304,16 @@
               <a:buChar char=""/>
             </a:pPr>
             <a:r>
+              <a:rPr sz="1800" b="1">
+                <a:solidFill>
+                  <a:srgbClr val="000000"/>
+                </a:solidFill>
+                <a:latin typeface="맑은 고딕"/>
+                <a:ea typeface="맑은 고딕"/>
+              </a:rPr>
+              <a:t>명세 먼저</a:t>
+            </a:r>
+            <a:r>
               <a:rPr sz="1800" b="0">
                 <a:solidFill>
                   <a:srgbClr val="000000"/>
@@ -21351,27 +21321,7 @@
                 <a:latin typeface="맑은 고딕"/>
                 <a:ea typeface="맑은 고딕"/>
               </a:rPr>
-              <a:t>"</a:t>
-            </a:r>
-            <a:r>
-              <a:rPr sz="1800" b="1">
-                <a:solidFill>
-                  <a:srgbClr val="000000"/>
-                </a:solidFill>
-                <a:latin typeface="맑은 고딕"/>
-                <a:ea typeface="맑은 고딕"/>
-              </a:rPr>
-              <a:t>명세 먼저</a:t>
-            </a:r>
-            <a:r>
-              <a:rPr sz="1800" b="0">
-                <a:solidFill>
-                  <a:srgbClr val="000000"/>
-                </a:solidFill>
-                <a:latin typeface="맑은 고딕"/>
-                <a:ea typeface="맑은 고딕"/>
-              </a:rPr>
-              <a:t> — 잘 생각한 명세를 먼저 쓰고, 그 작업의 AI 지원 개발 흐름에 쓴다"</a:t>
+              <a:t> — 잘 생각한 명세를 먼저 쓰고 그 작업의 AI 지원 개발 흐름에서 쓴다</a:t>
             </a:r>
             <a:r>
               <a:rPr sz="1000" b="0">
@@ -21391,27 +21341,7 @@
                 <a:latin typeface="맑은 고딕"/>
                 <a:ea typeface="맑은 고딕"/>
               </a:rPr>
-              <a:t>"Spec-first: A well thought-out spec is written first, and then used in the AI-assisted development workflow for the task at hand."</a:t>
-            </a:r>
-            <a:r>
-              <a:rPr sz="1000" b="0">
-                <a:solidFill>
-                  <a:srgbClr val="000000"/>
-                </a:solidFill>
-                <a:latin typeface="맑은 고딕"/>
-                <a:ea typeface="맑은 고딕"/>
-              </a:rPr>
-              <a:t>, </a:t>
-            </a:r>
-            <a:r>
-              <a:rPr sz="1000" b="0">
-                <a:solidFill>
-                  <a:srgbClr val="000000"/>
-                </a:solidFill>
-                <a:latin typeface="맑은 고딕"/>
-                <a:ea typeface="맑은 고딕"/>
-              </a:rPr>
-              <a:t>[Böckeler 2025]</a:t>
+              <a:t>"Spec-first: A well thought-out spec is written first, and then used in the AI-assisted development workflow for the task at hand.", [Böckeler 2025]</a:t>
             </a:r>
           </a:p>
           <a:p>
@@ -21427,6 +21357,16 @@
               <a:buChar char=""/>
             </a:pPr>
             <a:r>
+              <a:rPr sz="1800" b="1">
+                <a:solidFill>
+                  <a:srgbClr val="000000"/>
+                </a:solidFill>
+                <a:latin typeface="맑은 고딕"/>
+                <a:ea typeface="맑은 고딕"/>
+              </a:rPr>
+              <a:t>명세 고정</a:t>
+            </a:r>
+            <a:r>
               <a:rPr sz="1800" b="0">
                 <a:solidFill>
                   <a:srgbClr val="000000"/>
@@ -21434,27 +21374,7 @@
                 <a:latin typeface="맑은 고딕"/>
                 <a:ea typeface="맑은 고딕"/>
               </a:rPr>
-              <a:t>"</a:t>
-            </a:r>
-            <a:r>
-              <a:rPr sz="1800" b="1">
-                <a:solidFill>
-                  <a:srgbClr val="000000"/>
-                </a:solidFill>
-                <a:latin typeface="맑은 고딕"/>
-                <a:ea typeface="맑은 고딕"/>
-              </a:rPr>
-              <a:t>명세 고정</a:t>
-            </a:r>
-            <a:r>
-              <a:rPr sz="1800" b="0">
-                <a:solidFill>
-                  <a:srgbClr val="000000"/>
-                </a:solidFill>
-                <a:latin typeface="맑은 고딕"/>
-                <a:ea typeface="맑은 고딕"/>
-              </a:rPr>
-              <a:t> — 작업이 끝난 뒤에도 명세를 남겨 그 기능의 발전과 유지보수에 계속 쓴다"</a:t>
+              <a:t> — 작업이 끝난 뒤에도 명세를 남겨 그 기능의 발전과 유지보수에 계속 쓴다</a:t>
             </a:r>
             <a:r>
               <a:rPr sz="1000" b="0">
@@ -21474,27 +21394,7 @@
                 <a:latin typeface="맑은 고딕"/>
                 <a:ea typeface="맑은 고딕"/>
               </a:rPr>
-              <a:t>"Spec-anchored: The spec is kept even after the task is complete, to continue using it for evolution and maintenance of the respective feature."</a:t>
-            </a:r>
-            <a:r>
-              <a:rPr sz="1000" b="0">
-                <a:solidFill>
-                  <a:srgbClr val="000000"/>
-                </a:solidFill>
-                <a:latin typeface="맑은 고딕"/>
-                <a:ea typeface="맑은 고딕"/>
-              </a:rPr>
-              <a:t>, </a:t>
-            </a:r>
-            <a:r>
-              <a:rPr sz="1000" b="0">
-                <a:solidFill>
-                  <a:srgbClr val="000000"/>
-                </a:solidFill>
-                <a:latin typeface="맑은 고딕"/>
-                <a:ea typeface="맑은 고딕"/>
-              </a:rPr>
-              <a:t>[Böckeler 2025]</a:t>
+              <a:t>"Spec-anchored: The spec is kept even after the task is complete, to continue using it for evolution and maintenance of the respective feature.", [Böckeler 2025]</a:t>
             </a:r>
           </a:p>
           <a:p>
@@ -21510,6 +21410,16 @@
               <a:buChar char=""/>
             </a:pPr>
             <a:r>
+              <a:rPr sz="1800" b="1">
+                <a:solidFill>
+                  <a:srgbClr val="000000"/>
+                </a:solidFill>
+                <a:latin typeface="맑은 고딕"/>
+                <a:ea typeface="맑은 고딕"/>
+              </a:rPr>
+              <a:t>명세가 원천</a:t>
+            </a:r>
+            <a:r>
               <a:rPr sz="1800" b="0">
                 <a:solidFill>
                   <a:srgbClr val="000000"/>
@@ -21517,27 +21427,7 @@
                 <a:latin typeface="맑은 고딕"/>
                 <a:ea typeface="맑은 고딕"/>
               </a:rPr>
-              <a:t>"</a:t>
-            </a:r>
-            <a:r>
-              <a:rPr sz="1800" b="1">
-                <a:solidFill>
-                  <a:srgbClr val="000000"/>
-                </a:solidFill>
-                <a:latin typeface="맑은 고딕"/>
-                <a:ea typeface="맑은 고딕"/>
-              </a:rPr>
-              <a:t>명세가 원천</a:t>
-            </a:r>
-            <a:r>
-              <a:rPr sz="1800" b="0">
-                <a:solidFill>
-                  <a:srgbClr val="000000"/>
-                </a:solidFill>
-                <a:latin typeface="맑은 고딕"/>
-                <a:ea typeface="맑은 고딕"/>
-              </a:rPr>
-              <a:t> — 명세가 시간이 지나도 주된 원천 파일이고, 사람은 명세만 고치며 코드는 건드리지 않는다"</a:t>
+              <a:t> — 명세가 시간이 지나도 주된 원천 파일이고 사람은 명세만 고치며 코드는 건드리지 않는다</a:t>
             </a:r>
             <a:r>
               <a:rPr sz="1000" b="0">
@@ -21557,27 +21447,7 @@
                 <a:latin typeface="맑은 고딕"/>
                 <a:ea typeface="맑은 고딕"/>
               </a:rPr>
-              <a:t>"Spec-as-source: The spec is the main source file over time, and only the spec is edited by the human, the human never touches the code."</a:t>
-            </a:r>
-            <a:r>
-              <a:rPr sz="1000" b="0">
-                <a:solidFill>
-                  <a:srgbClr val="000000"/>
-                </a:solidFill>
-                <a:latin typeface="맑은 고딕"/>
-                <a:ea typeface="맑은 고딕"/>
-              </a:rPr>
-              <a:t>, </a:t>
-            </a:r>
-            <a:r>
-              <a:rPr sz="1000" b="0">
-                <a:solidFill>
-                  <a:srgbClr val="000000"/>
-                </a:solidFill>
-                <a:latin typeface="맑은 고딕"/>
-                <a:ea typeface="맑은 고딕"/>
-              </a:rPr>
-              <a:t>[Böckeler 2025]</a:t>
+              <a:t>"Spec-as-source: The spec is the main source file over time, and only the spec is edited by the human, the human never touches the code.", [Böckeler 2025]</a:t>
             </a:r>
           </a:p>
         </p:txBody>
@@ -44151,7 +44021,7 @@
         <p:spPr>
           <a:xfrm>
             <a:off x="365760" y="3392398"/>
-            <a:ext cx="8412480" cy="2603909"/>
+            <a:ext cx="8412480" cy="2241719"/>
           </a:xfrm>
           <a:prstGeom prst="rect">
             <a:avLst/>
@@ -44183,7 +44053,7 @@
                 <a:latin typeface="맑은 고딕"/>
                 <a:ea typeface="맑은 고딕"/>
               </a:rPr>
-              <a:t>요구마다 "As a…" 형식의 </a:t>
+              <a:t>요구마다 </a:t>
             </a:r>
             <a:r>
               <a:rPr sz="1800" b="1">
@@ -44196,6 +44066,16 @@
               <a:t>유저 스토리</a:t>
             </a:r>
             <a:r>
+              <a:rPr sz="1400" b="0">
+                <a:solidFill>
+                  <a:srgbClr val="000000"/>
+                </a:solidFill>
+                <a:latin typeface="맑은 고딕"/>
+                <a:ea typeface="맑은 고딕"/>
+              </a:rPr>
+              <a:t>(As a…)</a:t>
+            </a:r>
+            <a:r>
               <a:rPr sz="1800" b="0">
                 <a:solidFill>
                   <a:srgbClr val="000000"/>
@@ -44203,7 +44083,7 @@
                 <a:latin typeface="맑은 고딕"/>
                 <a:ea typeface="맑은 고딕"/>
               </a:rPr>
-              <a:t>와 "GIVEN… WHEN… THEN…" 형식의 </a:t>
+              <a:t>와 </a:t>
             </a:r>
             <a:r>
               <a:rPr sz="1800" b="1">
@@ -44214,6 +44094,16 @@
                 <a:ea typeface="맑은 고딕"/>
               </a:rPr>
               <a:t>수용 기준</a:t>
+            </a:r>
+            <a:r>
+              <a:rPr sz="1400" b="0">
+                <a:solidFill>
+                  <a:srgbClr val="000000"/>
+                </a:solidFill>
+                <a:latin typeface="맑은 고딕"/>
+                <a:ea typeface="맑은 고딕"/>
+              </a:rPr>
+              <a:t>(GIVEN… WHEN… THEN…)</a:t>
             </a:r>
             <a:r>
               <a:rPr sz="1800" b="0">
@@ -47424,7 +47314,7 @@
                 <a:latin typeface="맑은 고딕"/>
                 <a:ea typeface="맑은 고딕"/>
               </a:rPr>
-              <a:t>"요구사항은 시스템이 따라야 할 </a:t>
+              <a:t>요구사항은 시스템이 따라야 할 </a:t>
             </a:r>
             <a:r>
               <a:rPr sz="1800" b="1">
@@ -47444,7 +47334,7 @@
                 <a:latin typeface="맑은 고딕"/>
                 <a:ea typeface="맑은 고딕"/>
               </a:rPr>
-              <a:t>이다"</a:t>
+              <a:t>이다</a:t>
             </a:r>
             <a:r>
               <a:rPr sz="1000" b="0">
@@ -47464,27 +47354,7 @@
                 <a:latin typeface="맑은 고딕"/>
                 <a:ea typeface="맑은 고딕"/>
               </a:rPr>
-              <a:t>"Requirements are capabilities and conditions to which the system … must conform"</a:t>
-            </a:r>
-            <a:r>
-              <a:rPr sz="1000" b="0">
-                <a:solidFill>
-                  <a:srgbClr val="000000"/>
-                </a:solidFill>
-                <a:latin typeface="맑은 고딕"/>
-                <a:ea typeface="맑은 고딕"/>
-              </a:rPr>
-              <a:t>, </a:t>
-            </a:r>
-            <a:r>
-              <a:rPr sz="1000" b="0">
-                <a:solidFill>
-                  <a:srgbClr val="000000"/>
-                </a:solidFill>
-                <a:latin typeface="맑은 고딕"/>
-                <a:ea typeface="맑은 고딕"/>
-              </a:rPr>
-              <a:t>[Larman 2004]</a:t>
+              <a:t>"Requirements are capabilities and conditions to which the system … must conform", [Larman 2004]</a:t>
             </a:r>
           </a:p>
         </p:txBody>

--- a/courses/ai-native/sessions/s03.pptx
+++ b/courses/ai-native/sessions/s03.pptx
@@ -6063,7 +6063,7 @@
                 <a:latin typeface="맑은 고딕"/>
                 <a:ea typeface="맑은 고딕"/>
               </a:rPr>
-              <a:t>이벤트</a:t>
+              <a:t>이벤트에서 출발한다</a:t>
             </a:r>
             <a:r>
               <a:rPr sz="1800" b="0">
@@ -6073,27 +6073,7 @@
                 <a:latin typeface="맑은 고딕"/>
                 <a:ea typeface="맑은 고딕"/>
               </a:rPr>
-              <a:t>에서 출발하고, 형식마다 </a:t>
-            </a:r>
-            <a:r>
-              <a:rPr sz="1800" b="1">
-                <a:solidFill>
-                  <a:srgbClr val="000000"/>
-                </a:solidFill>
-                <a:latin typeface="맑은 고딕"/>
-                <a:ea typeface="맑은 고딕"/>
-              </a:rPr>
-              <a:t>다른 관점을 보는 작업 단위</a:t>
-            </a:r>
-            <a:r>
-              <a:rPr sz="1800" b="0">
-                <a:solidFill>
-                  <a:srgbClr val="000000"/>
-                </a:solidFill>
-                <a:latin typeface="맑은 고딕"/>
-                <a:ea typeface="맑은 고딕"/>
-              </a:rPr>
-              <a:t>다.</a:t>
+              <a:t>. 형식마다 보는 관점과 다루는 작업의 크기가 다를 뿐이다.</a:t>
             </a:r>
           </a:p>
           <a:p>
@@ -6156,7 +6136,27 @@
                 <a:latin typeface="맑은 고딕"/>
                 <a:ea typeface="맑은 고딕"/>
               </a:rPr>
-              <a:t>"Something happened that domain experts care about.", [Evans 2015]</a:t>
+              <a:t>"Something happened that domain experts care about."</a:t>
+            </a:r>
+            <a:r>
+              <a:rPr sz="1000" b="0">
+                <a:solidFill>
+                  <a:srgbClr val="000000"/>
+                </a:solidFill>
+                <a:latin typeface="맑은 고딕"/>
+                <a:ea typeface="맑은 고딕"/>
+              </a:rPr>
+              <a:t>, </a:t>
+            </a:r>
+            <a:r>
+              <a:rPr sz="1000" b="0">
+                <a:solidFill>
+                  <a:srgbClr val="000000"/>
+                </a:solidFill>
+                <a:latin typeface="맑은 고딕"/>
+                <a:ea typeface="맑은 고딕"/>
+              </a:rPr>
+              <a:t>[Evans 2015]</a:t>
             </a:r>
           </a:p>
         </p:txBody>
@@ -6510,7 +6510,7 @@
                 <a:latin typeface="맑은 고딕"/>
                 <a:ea typeface="맑은 고딕"/>
               </a:rPr>
-              <a:t>유저 스토리는 AI가 처리하는 작업 단위</a:t>
+              <a:t>유저 스토리는 AI에게 맡기는 작업의 단위</a:t>
             </a:r>
             <a:r>
               <a:rPr sz="1800" b="0">
@@ -6520,7 +6520,7 @@
                 <a:latin typeface="맑은 고딕"/>
                 <a:ea typeface="맑은 고딕"/>
               </a:rPr>
-              <a:t>다. 한 번에 만들고 확인할 크기이기 때문이다.</a:t>
+              <a:t>가 된다. 한 번에 만들고 한 번에 확인할 수 있는 크기이기 때문이다.</a:t>
             </a:r>
           </a:p>
           <a:p>
@@ -6583,7 +6583,27 @@
                 <a:latin typeface="맑은 고딕"/>
                 <a:ea typeface="맑은 고딕"/>
               </a:rPr>
-              <a:t>"User stories have three critical aspects. We can call these Card, Conversation, and Confirmation.", [Jeffries 2001]</a:t>
+              <a:t>"User stories have three critical aspects. We can call these Card, Conversation, and Confirmation."</a:t>
+            </a:r>
+            <a:r>
+              <a:rPr sz="1000" b="0">
+                <a:solidFill>
+                  <a:srgbClr val="000000"/>
+                </a:solidFill>
+                <a:latin typeface="맑은 고딕"/>
+                <a:ea typeface="맑은 고딕"/>
+              </a:rPr>
+              <a:t>, </a:t>
+            </a:r>
+            <a:r>
+              <a:rPr sz="1000" b="0">
+                <a:solidFill>
+                  <a:srgbClr val="000000"/>
+                </a:solidFill>
+                <a:latin typeface="맑은 고딕"/>
+                <a:ea typeface="맑은 고딕"/>
+              </a:rPr>
+              <a:t>[Jeffries 2001]</a:t>
             </a:r>
           </a:p>
           <a:p>
@@ -7131,7 +7151,7 @@
                 <a:latin typeface="맑은 고딕"/>
                 <a:ea typeface="맑은 고딕"/>
               </a:rPr>
-              <a:t>누가, 무엇을, 왜</a:t>
+              <a:t>누가 무엇을 왜</a:t>
             </a:r>
             <a:r>
               <a:rPr sz="1800" b="0">
@@ -7141,7 +7161,7 @@
                 <a:latin typeface="맑은 고딕"/>
                 <a:ea typeface="맑은 고딕"/>
               </a:rPr>
-              <a:t> 원하는지를 한 문장으로 쓴다. "왜"가 스토리의 가치를 드러낸다.</a:t>
+              <a:t> 원하는지를 한 문장으로 쓴다. 그중 "왜"가 그 스토리로 얻는 가치를 드러낸다.</a:t>
             </a:r>
           </a:p>
         </p:txBody>
@@ -7233,7 +7253,27 @@
                 <a:latin typeface="맑은 고딕"/>
                 <a:ea typeface="맑은 고딕"/>
               </a:rPr>
-              <a:t>"Its strength is that it forces you to identify the value of delivering a story when you first define it.", [North 2006]</a:t>
+              <a:t>"Its strength is that it forces you to identify the value of delivering a story when you first define it."</a:t>
+            </a:r>
+            <a:r>
+              <a:rPr sz="1000" b="0">
+                <a:solidFill>
+                  <a:srgbClr val="000000"/>
+                </a:solidFill>
+                <a:latin typeface="맑은 고딕"/>
+                <a:ea typeface="맑은 고딕"/>
+              </a:rPr>
+              <a:t>, </a:t>
+            </a:r>
+            <a:r>
+              <a:rPr sz="1000" b="0">
+                <a:solidFill>
+                  <a:srgbClr val="000000"/>
+                </a:solidFill>
+                <a:latin typeface="맑은 고딕"/>
+                <a:ea typeface="맑은 고딕"/>
+              </a:rPr>
+              <a:t>[North 2006]</a:t>
             </a:r>
           </a:p>
           <a:p>
@@ -8821,7 +8861,7 @@
                 <a:latin typeface="맑은 고딕"/>
                 <a:ea typeface="맑은 고딕"/>
               </a:rPr>
-              <a:t>좋은 유저 스토리의 조건은 </a:t>
+              <a:t>좋은 유저 스토리의 조건을 모은 것이 </a:t>
             </a:r>
             <a:r>
               <a:rPr sz="1800" b="1">
@@ -8841,7 +8881,7 @@
                 <a:latin typeface="맑은 고딕"/>
                 <a:ea typeface="맑은 고딕"/>
               </a:rPr>
-              <a:t> 6가지다. AI에게 맡길 때는 특히 </a:t>
+              <a:t>다. AI에게 맡길 때는 그중에서도 </a:t>
             </a:r>
             <a:r>
               <a:rPr sz="1800" b="1">
@@ -8871,7 +8911,7 @@
                 <a:latin typeface="맑은 고딕"/>
                 <a:ea typeface="맑은 고딕"/>
               </a:rPr>
-              <a:t>, 확인할 수 있어야</a:t>
+              <a:t> 확인할 수 있어야</a:t>
             </a:r>
             <a:r>
               <a:rPr sz="1400" b="1">
@@ -8954,7 +8994,27 @@
                 <a:latin typeface="맑은 고딕"/>
                 <a:ea typeface="맑은 고딕"/>
               </a:rPr>
-              <a:t>"good stories are: I – Independent N – Negotiable V – Valuable E – Estimable S – Small T – Testable", [Wake 2003]</a:t>
+              <a:t>"good stories are: I – Independent N – Negotiable V – Valuable E – Estimable S – Small T – Testable"</a:t>
+            </a:r>
+            <a:r>
+              <a:rPr sz="1000" b="0">
+                <a:solidFill>
+                  <a:srgbClr val="000000"/>
+                </a:solidFill>
+                <a:latin typeface="맑은 고딕"/>
+                <a:ea typeface="맑은 고딕"/>
+              </a:rPr>
+              <a:t>, </a:t>
+            </a:r>
+            <a:r>
+              <a:rPr sz="1000" b="0">
+                <a:solidFill>
+                  <a:srgbClr val="000000"/>
+                </a:solidFill>
+                <a:latin typeface="맑은 고딕"/>
+                <a:ea typeface="맑은 고딕"/>
+              </a:rPr>
+              <a:t>[Wake 2003]</a:t>
             </a:r>
           </a:p>
         </p:txBody>
@@ -9855,7 +9915,7 @@
                 <a:latin typeface="맑은 고딕"/>
                 <a:ea typeface="맑은 고딕"/>
               </a:rPr>
-              <a:t>스토리는 </a:t>
+              <a:t>스토리는 화면·서버·DB 같은 </a:t>
             </a:r>
             <a:r>
               <a:rPr sz="1800" b="1">
@@ -9865,7 +9925,7 @@
                 <a:latin typeface="맑은 고딕"/>
                 <a:ea typeface="맑은 고딕"/>
               </a:rPr>
-              <a:t>층이 아니라 기능을 세로로</a:t>
+              <a:t>층으로 나누지 않고 기능을 세로로</a:t>
             </a:r>
             <a:r>
               <a:rPr sz="1800" b="0">
@@ -9875,7 +9935,7 @@
                 <a:latin typeface="맑은 고딕"/>
                 <a:ea typeface="맑은 고딕"/>
               </a:rPr>
-              <a:t> 나눈다. 한 조각만으로도 고객에게 가치가 있어야 한다.</a:t>
+              <a:t> 자른다. 한 조각만 만들어도 고객에게 가치가 있어야 한다.</a:t>
             </a:r>
           </a:p>
           <a:p>
@@ -9938,7 +9998,27 @@
                 <a:latin typeface="맑은 고딕"/>
                 <a:ea typeface="맑은 고딕"/>
               </a:rPr>
-              <a:t>"We want to give the customer the essence of the whole cake, and the best way is to slice vertically through the layers.", [Wake 2003]</a:t>
+              <a:t>"We want to give the customer the essence of the whole cake, and the best way is to slice vertically through the layers."</a:t>
+            </a:r>
+            <a:r>
+              <a:rPr sz="1000" b="0">
+                <a:solidFill>
+                  <a:srgbClr val="000000"/>
+                </a:solidFill>
+                <a:latin typeface="맑은 고딕"/>
+                <a:ea typeface="맑은 고딕"/>
+              </a:rPr>
+              <a:t>, </a:t>
+            </a:r>
+            <a:r>
+              <a:rPr sz="1000" b="0">
+                <a:solidFill>
+                  <a:srgbClr val="000000"/>
+                </a:solidFill>
+                <a:latin typeface="맑은 고딕"/>
+                <a:ea typeface="맑은 고딕"/>
+              </a:rPr>
+              <a:t>[Wake 2003]</a:t>
             </a:r>
           </a:p>
         </p:txBody>
@@ -11350,7 +11430,27 @@
                 <a:latin typeface="맑은 고딕"/>
                 <a:ea typeface="맑은 고딕"/>
               </a:rPr>
-              <a:t>"User story: As a developer, I want the transformation function to handle edge cases gracefully, so that the system remains robust when new category formats are introduced.", [Böckeler 2025]</a:t>
+              <a:t>"User story: As a developer, I want the transformation function to handle edge cases gracefully, so that the system remains robust when new category formats are introduced."</a:t>
+            </a:r>
+            <a:r>
+              <a:rPr sz="1000" b="0">
+                <a:solidFill>
+                  <a:srgbClr val="000000"/>
+                </a:solidFill>
+                <a:latin typeface="맑은 고딕"/>
+                <a:ea typeface="맑은 고딕"/>
+              </a:rPr>
+              <a:t>, </a:t>
+            </a:r>
+            <a:r>
+              <a:rPr sz="1000" b="0">
+                <a:solidFill>
+                  <a:srgbClr val="000000"/>
+                </a:solidFill>
+                <a:latin typeface="맑은 고딕"/>
+                <a:ea typeface="맑은 고딕"/>
+              </a:rPr>
+              <a:t>[Böckeler 2025]</a:t>
             </a:r>
           </a:p>
         </p:txBody>
@@ -11650,7 +11750,7 @@
           </p:nvPr>
         </p:nvGraphicFramePr>
         <p:xfrm>
-          <a:off x="447866" y="3335366"/>
+          <a:off x="447866" y="3609686"/>
           <a:ext cx="8234680" cy="3873500"/>
         </p:xfrm>
         <a:graphic>
@@ -12389,7 +12489,7 @@
         <p:spPr>
           <a:xfrm>
             <a:off x="365760" y="960120"/>
-            <a:ext cx="8412480" cy="1996365"/>
+            <a:ext cx="8412480" cy="2253403"/>
           </a:xfrm>
           <a:prstGeom prst="rect">
             <a:avLst/>
@@ -12439,7 +12539,7 @@
                 <a:latin typeface="맑은 고딕"/>
                 <a:ea typeface="맑은 고딕"/>
               </a:rPr>
-              <a:t>은 </a:t>
+              <a:t>은 기대하는 행위를 </a:t>
             </a:r>
             <a:r>
               <a:rPr sz="1800" b="1">
@@ -12449,7 +12549,7 @@
                 <a:latin typeface="맑은 고딕"/>
                 <a:ea typeface="맑은 고딕"/>
               </a:rPr>
-              <a:t>구체적인 예로 기대 행위를 합의</a:t>
+              <a:t>구체적인 예로 합의하고</a:t>
             </a:r>
             <a:r>
               <a:rPr sz="1800" b="0">
@@ -12459,7 +12559,7 @@
                 <a:latin typeface="맑은 고딕"/>
                 <a:ea typeface="맑은 고딕"/>
               </a:rPr>
-              <a:t>하고, 그 예를 검증과 잇는 협업 방식이다. TDD에서 출발해 요구 분석으로 넓어졌다.</a:t>
+              <a:t>, 그 예를 그대로 검증에 잇는 협업 방식이다. TDD에서 출발해 요구 분석까지 넓어졌다.</a:t>
             </a:r>
           </a:p>
           <a:p>
@@ -12626,7 +12726,7 @@
         </p:nvSpPr>
         <p:spPr>
           <a:xfrm>
-            <a:off x="365760" y="3036916"/>
+            <a:off x="365760" y="3311236"/>
             <a:ext cx="8412480" cy="222250"/>
           </a:xfrm>
           <a:prstGeom prst="rect">
@@ -13050,7 +13150,7 @@
                 <a:latin typeface="맑은 고딕"/>
                 <a:ea typeface="맑은 고딕"/>
               </a:rPr>
-              <a:t>스토리의 행위는 </a:t>
+              <a:t>스토리가 말하는 행위가 곧 </a:t>
             </a:r>
             <a:r>
               <a:rPr sz="1800" b="1">
@@ -13070,7 +13170,7 @@
                 <a:latin typeface="맑은 고딕"/>
                 <a:ea typeface="맑은 고딕"/>
               </a:rPr>
-              <a:t>이고, 수용 기준은 </a:t>
+              <a:t>이며, 수용 기준은 </a:t>
             </a:r>
             <a:r>
               <a:rPr sz="1800" b="1">
@@ -13090,7 +13190,7 @@
                 <a:latin typeface="맑은 고딕"/>
                 <a:ea typeface="맑은 고딕"/>
               </a:rPr>
-              <a:t>의 시나리오로 쓴다.</a:t>
+              <a:t> 형식의 시나리오로 적는다.</a:t>
             </a:r>
           </a:p>
         </p:txBody>
@@ -13182,7 +13282,27 @@
                 <a:latin typeface="맑은 고딕"/>
                 <a:ea typeface="맑은 고딕"/>
               </a:rPr>
-              <a:t>"A story’s behaviour is simply its acceptance criteria: if the system fulfils all the acceptance criteria, it’s behaving correctly; if it doesn’t, it isn’t.", [North 2006]</a:t>
+              <a:t>"A story’s behaviour is simply its acceptance criteria: if the system fulfils all the acceptance criteria, it’s behaving correctly; if it doesn’t, it isn’t."</a:t>
+            </a:r>
+            <a:r>
+              <a:rPr sz="1000" b="0">
+                <a:solidFill>
+                  <a:srgbClr val="000000"/>
+                </a:solidFill>
+                <a:latin typeface="맑은 고딕"/>
+                <a:ea typeface="맑은 고딕"/>
+              </a:rPr>
+              <a:t>, </a:t>
+            </a:r>
+            <a:r>
+              <a:rPr sz="1000" b="0">
+                <a:solidFill>
+                  <a:srgbClr val="000000"/>
+                </a:solidFill>
+                <a:latin typeface="맑은 고딕"/>
+                <a:ea typeface="맑은 고딕"/>
+              </a:rPr>
+              <a:t>[North 2006]</a:t>
             </a:r>
           </a:p>
           <a:p>
@@ -13573,7 +13693,7 @@
                 <a:latin typeface="맑은 고딕"/>
                 <a:ea typeface="맑은 고딕"/>
               </a:rPr>
-              <a:t>규칙·예·질문</a:t>
+              <a:t>규칙과 예와 질문</a:t>
             </a:r>
             <a:r>
               <a:rPr sz="1800" b="0">
@@ -13583,7 +13703,7 @@
                 <a:latin typeface="맑은 고딕"/>
                 <a:ea typeface="맑은 고딕"/>
               </a:rPr>
-              <a:t>을 카드로 나눠 대화하는 방법이다. 카드는 그대로 작업 명세서의 유저 스토리·업무 규칙·예·미정이 된다.</a:t>
+              <a:t>을 카드로 나누어 대화하는 방법이다. 그 카드가 그대로 작업 명세서의 유저 스토리·업무 규칙·예·미정이 된다.</a:t>
             </a:r>
           </a:p>
           <a:p>
@@ -13646,7 +13766,27 @@
                 <a:latin typeface="맑은 고딕"/>
                 <a:ea typeface="맑은 고딕"/>
               </a:rPr>
-              <a:t>"Example Mapping is a method designed to make this conversation short and very productive.", [Cucumber: Example Mapping]</a:t>
+              <a:t>"Example Mapping is a method designed to make this conversation short and very productive."</a:t>
+            </a:r>
+            <a:r>
+              <a:rPr sz="1000" b="0">
+                <a:solidFill>
+                  <a:srgbClr val="000000"/>
+                </a:solidFill>
+                <a:latin typeface="맑은 고딕"/>
+                <a:ea typeface="맑은 고딕"/>
+              </a:rPr>
+              <a:t>, </a:t>
+            </a:r>
+            <a:r>
+              <a:rPr sz="1000" b="0">
+                <a:solidFill>
+                  <a:srgbClr val="000000"/>
+                </a:solidFill>
+                <a:latin typeface="맑은 고딕"/>
+                <a:ea typeface="맑은 고딕"/>
+              </a:rPr>
+              <a:t>[Cucumber: Example Mapping]</a:t>
             </a:r>
           </a:p>
         </p:txBody>
@@ -15111,7 +15251,7 @@
                 <a:latin typeface="맑은 고딕"/>
                 <a:ea typeface="맑은 고딕"/>
               </a:rPr>
-              <a:t>유저 스토리 기반의 작업 명세서</a:t>
+              <a:t>유저 스토리와 수용 기준을 갖춘 작업 명세서</a:t>
             </a:r>
             <a:r>
               <a:rPr sz="1800" b="0">
@@ -15121,7 +15261,7 @@
                 <a:latin typeface="맑은 고딕"/>
                 <a:ea typeface="맑은 고딕"/>
               </a:rPr>
-              <a:t>로 만들어, LLM이 업무 규칙을 추측하지 않게 한다.</a:t>
+              <a:t>로 만들어, LLM이 업무 규칙을 스스로 정하지 않게 한다.</a:t>
             </a:r>
           </a:p>
           <a:p>
@@ -15668,7 +15808,7 @@
           </p:nvPr>
         </p:nvGraphicFramePr>
         <p:xfrm>
-          <a:off x="755206" y="2112010"/>
+          <a:off x="755206" y="2386330"/>
           <a:ext cx="7620000" cy="3873500"/>
         </p:xfrm>
         <a:graphic>
@@ -17079,7 +17219,7 @@
         <p:spPr>
           <a:xfrm>
             <a:off x="365760" y="960120"/>
-            <a:ext cx="8412480" cy="781278"/>
+            <a:ext cx="8412480" cy="1038316"/>
           </a:xfrm>
           <a:prstGeom prst="rect">
             <a:avLst/>
@@ -17109,7 +17249,7 @@
                 <a:latin typeface="맑은 고딕"/>
                 <a:ea typeface="맑은 고딕"/>
               </a:rPr>
-              <a:t>요구사항의 명세는 범위와 수명에 따라 </a:t>
+              <a:t>요구사항의 명세는 다루는 범위와 남기는 기간에 따라 </a:t>
             </a:r>
             <a:r>
               <a:rPr sz="1800" b="1">
@@ -17162,16 +17302,6 @@
               <a:t>도메인 모델</a:t>
             </a:r>
             <a:r>
-              <a:rPr sz="1400" b="0">
-                <a:solidFill>
-                  <a:srgbClr val="000000"/>
-                </a:solidFill>
-                <a:latin typeface="맑은 고딕"/>
-                <a:ea typeface="맑은 고딕"/>
-              </a:rPr>
-              <a:t>(분석)</a:t>
-            </a:r>
-            <a:r>
               <a:rPr sz="1800" b="0">
                 <a:solidFill>
                   <a:srgbClr val="000000"/>
@@ -17192,16 +17322,6 @@
               <a:t>아키텍처</a:t>
             </a:r>
             <a:r>
-              <a:rPr sz="1400" b="0">
-                <a:solidFill>
-                  <a:srgbClr val="000000"/>
-                </a:solidFill>
-                <a:latin typeface="맑은 고딕"/>
-                <a:ea typeface="맑은 고딕"/>
-              </a:rPr>
-              <a:t>(설계)</a:t>
-            </a:r>
-            <a:r>
               <a:rPr sz="1800" b="0">
                 <a:solidFill>
                   <a:srgbClr val="000000"/>
@@ -17209,7 +17329,7 @@
                 <a:latin typeface="맑은 고딕"/>
                 <a:ea typeface="맑은 고딕"/>
               </a:rPr>
-              <a:t>는 명세가 아니다.</a:t>
+              <a:t>는 명세가 아니라 명세가 가리키는 자료다.</a:t>
             </a:r>
           </a:p>
         </p:txBody>
@@ -17293,7 +17413,7 @@
         </p:nvSpPr>
         <p:spPr>
           <a:xfrm>
-            <a:off x="365760" y="1813560"/>
+            <a:off x="365760" y="2087880"/>
             <a:ext cx="8412480" cy="222250"/>
           </a:xfrm>
           <a:prstGeom prst="rect">
@@ -17542,7 +17662,7 @@
         <p:spPr>
           <a:xfrm>
             <a:off x="365760" y="960120"/>
-            <a:ext cx="8412480" cy="2225040"/>
+            <a:ext cx="8412480" cy="2499360"/>
           </a:xfrm>
         </p:spPr>
         <p:txBody>
@@ -17568,7 +17688,7 @@
                 <a:latin typeface="맑은 고딕"/>
                 <a:ea typeface="맑은 고딕"/>
               </a:rPr>
-              <a:t>작업 명세서는 요구사항 정의서와 도메인 모델에 있는 것을 </a:t>
+              <a:t>작업 명세서는 요구사항 정의서와 도메인 모델에 이미 있는 내용을 </a:t>
             </a:r>
             <a:r>
               <a:rPr sz="1800" b="1">
@@ -17578,7 +17698,7 @@
                 <a:latin typeface="맑은 고딕"/>
                 <a:ea typeface="맑은 고딕"/>
               </a:rPr>
-              <a:t>다시 쓰지 않고 가리킨다</a:t>
+              <a:t>옮겨 적지 않고 가리킨다</a:t>
             </a:r>
             <a:r>
               <a:rPr sz="1800" b="0">
@@ -17588,7 +17708,7 @@
                 <a:latin typeface="맑은 고딕"/>
                 <a:ea typeface="맑은 고딕"/>
               </a:rPr>
-              <a:t>. 아키텍처는 명세에 넣지 않고 </a:t>
+              <a:t>. 아키텍처는 명세에 넣지 않고 에이전트에게 </a:t>
             </a:r>
             <a:r>
               <a:rPr sz="1800" b="1">
@@ -17598,7 +17718,7 @@
                 <a:latin typeface="맑은 고딕"/>
                 <a:ea typeface="맑은 고딕"/>
               </a:rPr>
-              <a:t>맥락</a:t>
+              <a:t>맥락으로 준다</a:t>
             </a:r>
             <a:r>
               <a:rPr sz="1800" b="0">
@@ -17608,7 +17728,7 @@
                 <a:latin typeface="맑은 고딕"/>
                 <a:ea typeface="맑은 고딕"/>
               </a:rPr>
-              <a:t>으로 준다.</a:t>
+              <a:t>.</a:t>
             </a:r>
           </a:p>
           <a:p>
@@ -17756,7 +17876,7 @@
         </p:nvSpPr>
         <p:spPr>
           <a:xfrm>
-            <a:off x="365760" y="3486912"/>
+            <a:off x="365760" y="3761232"/>
             <a:ext cx="8412480" cy="201168"/>
           </a:xfrm>
           <a:prstGeom prst="rect">
@@ -17800,7 +17920,7 @@
         </p:blipFill>
         <p:spPr>
           <a:xfrm>
-            <a:off x="2804418" y="3724656"/>
+            <a:off x="2804418" y="3998976"/>
             <a:ext cx="3535164" cy="2330355"/>
           </a:xfrm>
           <a:prstGeom prst="rect">
@@ -18855,7 +18975,7 @@
                 <a:latin typeface="맑은 고딕"/>
                 <a:ea typeface="맑은 고딕"/>
               </a:rPr>
-              <a:t>작업 명세서는 스토리 하나의 작업용 요구사항 명세</a:t>
+              <a:t>작업 명세서는 스토리 하나를 맡기기 위한 요구사항 명세</a:t>
             </a:r>
             <a:r>
               <a:rPr sz="1800" b="0">
@@ -18865,7 +18985,7 @@
                 <a:latin typeface="맑은 고딕"/>
                 <a:ea typeface="맑은 고딕"/>
               </a:rPr>
-              <a:t>다. 유저 스토리에 업무 규칙과 예·범위·제외·미정을 붙인다. 프롬프트와 달리 저장소에 남겨 검토하지만, 오래 남길 업무 규칙은 정의서와 도메인 모델로 옮긴다.</a:t>
+              <a:t>다. 유저 스토리에 업무 규칙과 예·범위·제외·미정을 붙여 쓴다. 프롬프트와 달리 저장소에 남겨 함께 검토하되, 오래 쓸 업무 규칙은 요구사항 정의서와 도메인 모델로 옮긴다.</a:t>
             </a:r>
           </a:p>
         </p:txBody>
@@ -20822,7 +20942,27 @@
                 <a:latin typeface="맑은 고딕"/>
                 <a:ea typeface="맑은 고딕"/>
               </a:rPr>
-              <a:t>"These files are relevant across all AI coding sessions in the codebase, whereas specs only relevant to the tasks that actually create or change that particular functionality.", [Böckeler 2025]</a:t>
+              <a:t>"These files are relevant across all AI coding sessions in the codebase, whereas specs only relevant to the tasks that actually create or change that particular functionality."</a:t>
+            </a:r>
+            <a:r>
+              <a:rPr sz="1000" b="0">
+                <a:solidFill>
+                  <a:srgbClr val="000000"/>
+                </a:solidFill>
+                <a:latin typeface="맑은 고딕"/>
+                <a:ea typeface="맑은 고딕"/>
+              </a:rPr>
+              <a:t>, </a:t>
+            </a:r>
+            <a:r>
+              <a:rPr sz="1000" b="0">
+                <a:solidFill>
+                  <a:srgbClr val="000000"/>
+                </a:solidFill>
+                <a:latin typeface="맑은 고딕"/>
+                <a:ea typeface="맑은 고딕"/>
+              </a:rPr>
+              <a:t>[Böckeler 2025]</a:t>
             </a:r>
           </a:p>
         </p:txBody>
@@ -21341,7 +21481,27 @@
                 <a:latin typeface="맑은 고딕"/>
                 <a:ea typeface="맑은 고딕"/>
               </a:rPr>
-              <a:t>"Spec-first: A well thought-out spec is written first, and then used in the AI-assisted development workflow for the task at hand.", [Böckeler 2025]</a:t>
+              <a:t>"Spec-first: A well thought-out spec is written first, and then used in the AI-assisted development workflow for the task at hand."</a:t>
+            </a:r>
+            <a:r>
+              <a:rPr sz="1000" b="0">
+                <a:solidFill>
+                  <a:srgbClr val="000000"/>
+                </a:solidFill>
+                <a:latin typeface="맑은 고딕"/>
+                <a:ea typeface="맑은 고딕"/>
+              </a:rPr>
+              <a:t>, </a:t>
+            </a:r>
+            <a:r>
+              <a:rPr sz="1000" b="0">
+                <a:solidFill>
+                  <a:srgbClr val="000000"/>
+                </a:solidFill>
+                <a:latin typeface="맑은 고딕"/>
+                <a:ea typeface="맑은 고딕"/>
+              </a:rPr>
+              <a:t>[Böckeler 2025]</a:t>
             </a:r>
           </a:p>
           <a:p>
@@ -21394,7 +21554,27 @@
                 <a:latin typeface="맑은 고딕"/>
                 <a:ea typeface="맑은 고딕"/>
               </a:rPr>
-              <a:t>"Spec-anchored: The spec is kept even after the task is complete, to continue using it for evolution and maintenance of the respective feature.", [Böckeler 2025]</a:t>
+              <a:t>"Spec-anchored: The spec is kept even after the task is complete, to continue using it for evolution and maintenance of the respective feature."</a:t>
+            </a:r>
+            <a:r>
+              <a:rPr sz="1000" b="0">
+                <a:solidFill>
+                  <a:srgbClr val="000000"/>
+                </a:solidFill>
+                <a:latin typeface="맑은 고딕"/>
+                <a:ea typeface="맑은 고딕"/>
+              </a:rPr>
+              <a:t>, </a:t>
+            </a:r>
+            <a:r>
+              <a:rPr sz="1000" b="0">
+                <a:solidFill>
+                  <a:srgbClr val="000000"/>
+                </a:solidFill>
+                <a:latin typeface="맑은 고딕"/>
+                <a:ea typeface="맑은 고딕"/>
+              </a:rPr>
+              <a:t>[Böckeler 2025]</a:t>
             </a:r>
           </a:p>
           <a:p>
@@ -21447,7 +21627,27 @@
                 <a:latin typeface="맑은 고딕"/>
                 <a:ea typeface="맑은 고딕"/>
               </a:rPr>
-              <a:t>"Spec-as-source: The spec is the main source file over time, and only the spec is edited by the human, the human never touches the code.", [Böckeler 2025]</a:t>
+              <a:t>"Spec-as-source: The spec is the main source file over time, and only the spec is edited by the human, the human never touches the code."</a:t>
+            </a:r>
+            <a:r>
+              <a:rPr sz="1000" b="0">
+                <a:solidFill>
+                  <a:srgbClr val="000000"/>
+                </a:solidFill>
+                <a:latin typeface="맑은 고딕"/>
+                <a:ea typeface="맑은 고딕"/>
+              </a:rPr>
+              <a:t>, </a:t>
+            </a:r>
+            <a:r>
+              <a:rPr sz="1000" b="0">
+                <a:solidFill>
+                  <a:srgbClr val="000000"/>
+                </a:solidFill>
+                <a:latin typeface="맑은 고딕"/>
+                <a:ea typeface="맑은 고딕"/>
+              </a:rPr>
+              <a:t>[Böckeler 2025]</a:t>
             </a:r>
           </a:p>
         </p:txBody>
@@ -22628,7 +22828,27 @@
                 <a:latin typeface="맑은 고딕"/>
                 <a:ea typeface="맑은 고딕"/>
               </a:rPr>
-              <a:t>"All SDD approaches and definitions I’ve found are spec-first, but not all strive to be spec-anchored or spec-as-source.", [Böckeler 2025]</a:t>
+              <a:t>"All SDD approaches and definitions I’ve found are spec-first, but not all strive to be spec-anchored or spec-as-source."</a:t>
+            </a:r>
+            <a:r>
+              <a:rPr sz="1000" b="0">
+                <a:solidFill>
+                  <a:srgbClr val="000000"/>
+                </a:solidFill>
+                <a:latin typeface="맑은 고딕"/>
+                <a:ea typeface="맑은 고딕"/>
+              </a:rPr>
+              <a:t>, </a:t>
+            </a:r>
+            <a:r>
+              <a:rPr sz="1000" b="0">
+                <a:solidFill>
+                  <a:srgbClr val="000000"/>
+                </a:solidFill>
+                <a:latin typeface="맑은 고딕"/>
+                <a:ea typeface="맑은 고딕"/>
+              </a:rPr>
+              <a:t>[Böckeler 2025]</a:t>
             </a:r>
           </a:p>
         </p:txBody>
@@ -24414,7 +24634,27 @@
                 <a:latin typeface="맑은 고딕"/>
                 <a:ea typeface="맑은 고딕"/>
               </a:rPr>
-              <a:t>"The requirements document turned this small bug into 4 “user stories” with a total of 16 acceptance criteria", [Böckeler 2025]</a:t>
+              <a:t>"The requirements document turned this small bug into 4 “user stories” with a total of 16 acceptance criteria"</a:t>
+            </a:r>
+            <a:r>
+              <a:rPr sz="1000" b="0">
+                <a:solidFill>
+                  <a:srgbClr val="000000"/>
+                </a:solidFill>
+                <a:latin typeface="맑은 고딕"/>
+                <a:ea typeface="맑은 고딕"/>
+              </a:rPr>
+              <a:t>, </a:t>
+            </a:r>
+            <a:r>
+              <a:rPr sz="1000" b="0">
+                <a:solidFill>
+                  <a:srgbClr val="000000"/>
+                </a:solidFill>
+                <a:latin typeface="맑은 고딕"/>
+                <a:ea typeface="맑은 고딕"/>
+              </a:rPr>
+              <a:t>[Böckeler 2025]</a:t>
             </a:r>
           </a:p>
           <a:p>
@@ -24467,7 +24707,27 @@
                 <a:latin typeface="맑은 고딕"/>
                 <a:ea typeface="맑은 고딕"/>
               </a:rPr>
-              <a:t>"To be honest, I’d rather review code than all these markdown files.", [Böckeler 2025]</a:t>
+              <a:t>"To be honest, I’d rather review code than all these markdown files."</a:t>
+            </a:r>
+            <a:r>
+              <a:rPr sz="1000" b="0">
+                <a:solidFill>
+                  <a:srgbClr val="000000"/>
+                </a:solidFill>
+                <a:latin typeface="맑은 고딕"/>
+                <a:ea typeface="맑은 고딕"/>
+              </a:rPr>
+              <a:t>, </a:t>
+            </a:r>
+            <a:r>
+              <a:rPr sz="1000" b="0">
+                <a:solidFill>
+                  <a:srgbClr val="000000"/>
+                </a:solidFill>
+                <a:latin typeface="맑은 고딕"/>
+                <a:ea typeface="맑은 고딕"/>
+              </a:rPr>
+              <a:t>[Böckeler 2025]</a:t>
             </a:r>
           </a:p>
           <a:p>
@@ -24833,7 +25093,27 @@
                 <a:latin typeface="맑은 고딕"/>
                 <a:ea typeface="맑은 고딕"/>
               </a:rPr>
-              <a:t>"Even with all of these files and templates and prompts and workflows and checklists, I frequently saw the agent ultimately not follow all the instructions.", [Böckeler 2025]</a:t>
+              <a:t>"Even with all of these files and templates and prompts and workflows and checklists, I frequently saw the agent ultimately not follow all the instructions."</a:t>
+            </a:r>
+            <a:r>
+              <a:rPr sz="1000" b="0">
+                <a:solidFill>
+                  <a:srgbClr val="000000"/>
+                </a:solidFill>
+                <a:latin typeface="맑은 고딕"/>
+                <a:ea typeface="맑은 고딕"/>
+              </a:rPr>
+              <a:t>, </a:t>
+            </a:r>
+            <a:r>
+              <a:rPr sz="1000" b="0">
+                <a:solidFill>
+                  <a:srgbClr val="000000"/>
+                </a:solidFill>
+                <a:latin typeface="맑은 고딕"/>
+                <a:ea typeface="맑은 고딕"/>
+              </a:rPr>
+              <a:t>[Böckeler 2025]</a:t>
             </a:r>
           </a:p>
           <a:p>
@@ -24896,7 +25176,27 @@
                 <a:latin typeface="맑은 고딕"/>
                 <a:ea typeface="맑은 고딕"/>
               </a:rPr>
-              <a:t>"But ultimately the agent ignored the notes that these were descriptions of existing classes, it just took them as a new specification and generated them all over again, creating duplicates.", [Böckeler 2025]</a:t>
+              <a:t>"But ultimately the agent ignored the notes that these were descriptions of existing classes, it just took them as a new specification and generated them all over again, creating duplicates."</a:t>
+            </a:r>
+            <a:r>
+              <a:rPr sz="1000" b="0">
+                <a:solidFill>
+                  <a:srgbClr val="000000"/>
+                </a:solidFill>
+                <a:latin typeface="맑은 고딕"/>
+                <a:ea typeface="맑은 고딕"/>
+              </a:rPr>
+              <a:t>, </a:t>
+            </a:r>
+            <a:r>
+              <a:rPr sz="1000" b="0">
+                <a:solidFill>
+                  <a:srgbClr val="000000"/>
+                </a:solidFill>
+                <a:latin typeface="맑은 고딕"/>
+                <a:ea typeface="맑은 고딕"/>
+              </a:rPr>
+              <a:t>[Böckeler 2025]</a:t>
             </a:r>
           </a:p>
           <a:p>
@@ -24959,7 +25259,27 @@
                 <a:latin typeface="맑은 고딕"/>
                 <a:ea typeface="맑은 고딕"/>
               </a:rPr>
-              <a:t>"The past has shown that the best way for us to stay in control of what we’re building are small, iterative steps", [Böckeler 2025]</a:t>
+              <a:t>"The past has shown that the best way for us to stay in control of what we’re building are small, iterative steps"</a:t>
+            </a:r>
+            <a:r>
+              <a:rPr sz="1000" b="0">
+                <a:solidFill>
+                  <a:srgbClr val="000000"/>
+                </a:solidFill>
+                <a:latin typeface="맑은 고딕"/>
+                <a:ea typeface="맑은 고딕"/>
+              </a:rPr>
+              <a:t>, </a:t>
+            </a:r>
+            <a:r>
+              <a:rPr sz="1000" b="0">
+                <a:solidFill>
+                  <a:srgbClr val="000000"/>
+                </a:solidFill>
+                <a:latin typeface="맑은 고딕"/>
+                <a:ea typeface="맑은 고딕"/>
+              </a:rPr>
+              <a:t>[Böckeler 2025]</a:t>
             </a:r>
           </a:p>
         </p:txBody>
@@ -25219,7 +25539,7 @@
                 <a:latin typeface="맑은 고딕"/>
                 <a:ea typeface="맑은 고딕"/>
               </a:rPr>
-              <a:t>은 AI로 코드를 쓰기 전에 </a:t>
+              <a:t>은 AI에게 코드를 맡기기 전에 </a:t>
             </a:r>
             <a:r>
               <a:rPr sz="1800" b="1">
@@ -25229,7 +25549,7 @@
                 <a:latin typeface="맑은 고딕"/>
                 <a:ea typeface="맑은 고딕"/>
               </a:rPr>
-              <a:t>명세</a:t>
+              <a:t>명세를 먼저 쓰고</a:t>
             </a:r>
             <a:r>
               <a:rPr sz="1800" b="0">
@@ -25239,7 +25559,7 @@
                 <a:latin typeface="맑은 고딕"/>
                 <a:ea typeface="맑은 고딕"/>
               </a:rPr>
-              <a:t>를 먼저 쓰고, 그 명세를 사람과 AI가 함께 따르는 기준으로 삼는 방식이다.</a:t>
+              <a:t>, 그 명세를 사람과 AI가 함께 따르는 기준으로 삼는 방식이다.</a:t>
             </a:r>
           </a:p>
           <a:p>
@@ -25322,7 +25642,27 @@
                 <a:latin typeface="맑은 고딕"/>
                 <a:ea typeface="맑은 고딕"/>
               </a:rPr>
-              <a:t>"Spec-driven development means writing a “spec” before writing code with AI (“documentation first”). The spec becomes the source of truth for the human and the AI.", [Böckeler 2025]</a:t>
+              <a:t>"Spec-driven development means writing a “spec” before writing code with AI (“documentation first”). The spec becomes the source of truth for the human and the AI."</a:t>
+            </a:r>
+            <a:r>
+              <a:rPr sz="1000" b="0">
+                <a:solidFill>
+                  <a:srgbClr val="000000"/>
+                </a:solidFill>
+                <a:latin typeface="맑은 고딕"/>
+                <a:ea typeface="맑은 고딕"/>
+              </a:rPr>
+              <a:t>, </a:t>
+            </a:r>
+            <a:r>
+              <a:rPr sz="1000" b="0">
+                <a:solidFill>
+                  <a:srgbClr val="000000"/>
+                </a:solidFill>
+                <a:latin typeface="맑은 고딕"/>
+                <a:ea typeface="맑은 고딕"/>
+              </a:rPr>
+              <a:t>[Böckeler 2025]</a:t>
             </a:r>
           </a:p>
           <a:p>
@@ -25388,7 +25728,7 @@
                 <a:latin typeface="맑은 고딕"/>
                 <a:ea typeface="맑은 고딕"/>
               </a:rPr>
-              <a:t>SDD는 방식이다</a:t>
+              <a:t>SDD가 정하는 것</a:t>
             </a:r>
             <a:r>
               <a:rPr sz="1800" b="0">
@@ -25438,7 +25778,7 @@
                 <a:latin typeface="맑은 고딕"/>
                 <a:ea typeface="맑은 고딕"/>
               </a:rPr>
-              <a:t>얼마나</a:t>
+              <a:t>얼마나 오래</a:t>
             </a:r>
             <a:r>
               <a:rPr sz="1600" b="0">
@@ -25448,7 +25788,7 @@
                 <a:latin typeface="맑은 고딕"/>
                 <a:ea typeface="맑은 고딕"/>
               </a:rPr>
-              <a:t> 남기는가를 정한다. 명세에 </a:t>
+              <a:t> 남길지를 정한다. 명세에 </a:t>
             </a:r>
             <a:r>
               <a:rPr sz="1600" b="1">
@@ -25458,7 +25798,7 @@
                 <a:latin typeface="맑은 고딕"/>
                 <a:ea typeface="맑은 고딕"/>
               </a:rPr>
-              <a:t>무엇을</a:t>
+              <a:t>무엇을 쓸지</a:t>
             </a:r>
             <a:r>
               <a:rPr sz="1600" b="0">
@@ -25468,7 +25808,7 @@
                 <a:latin typeface="맑은 고딕"/>
                 <a:ea typeface="맑은 고딕"/>
               </a:rPr>
-              <a:t> 쓰는가는 요구공학이 답한다.</a:t>
+              <a:t>는 요구공학이 답해 온 질문이다.</a:t>
             </a:r>
           </a:p>
           <a:p>
@@ -27226,7 +27566,27 @@
                 <a:latin typeface="맑은 고딕"/>
                 <a:ea typeface="맑은 고딕"/>
               </a:rPr>
-              <a:t>"I wonder if spec-as-source, and even spec-anchoring, might end up with the downsides of both MDD and LLMs: Inflexibility and non-determinism.", [Böckeler 2025]</a:t>
+              <a:t>"I wonder if spec-as-source, and even spec-anchoring, might end up with the downsides of both MDD and LLMs: Inflexibility and non-determinism."</a:t>
+            </a:r>
+            <a:r>
+              <a:rPr sz="1000" b="0">
+                <a:solidFill>
+                  <a:srgbClr val="000000"/>
+                </a:solidFill>
+                <a:latin typeface="맑은 고딕"/>
+                <a:ea typeface="맑은 고딕"/>
+              </a:rPr>
+              <a:t>, </a:t>
+            </a:r>
+            <a:r>
+              <a:rPr sz="1000" b="0">
+                <a:solidFill>
+                  <a:srgbClr val="000000"/>
+                </a:solidFill>
+                <a:latin typeface="맑은 고딕"/>
+                <a:ea typeface="맑은 고딕"/>
+              </a:rPr>
+              <a:t>[Böckeler 2025]</a:t>
             </a:r>
           </a:p>
         </p:txBody>
@@ -29378,7 +29738,27 @@
                 <a:latin typeface="맑은 고딕"/>
                 <a:ea typeface="맑은 고딕"/>
               </a:rPr>
-              <a:t>"The optimal altitude strikes a balance: specific enough to guide behavior effectively, yet flexible enough to provide the model with strong heuristics to guide behavior.", [Anthropic 2025c]</a:t>
+              <a:t>"The optimal altitude strikes a balance: specific enough to guide behavior effectively, yet flexible enough to provide the model with strong heuristics to guide behavior."</a:t>
+            </a:r>
+            <a:r>
+              <a:rPr sz="1000" b="0">
+                <a:solidFill>
+                  <a:srgbClr val="000000"/>
+                </a:solidFill>
+                <a:latin typeface="맑은 고딕"/>
+                <a:ea typeface="맑은 고딕"/>
+              </a:rPr>
+              <a:t>, </a:t>
+            </a:r>
+            <a:r>
+              <a:rPr sz="1000" b="0">
+                <a:solidFill>
+                  <a:srgbClr val="000000"/>
+                </a:solidFill>
+                <a:latin typeface="맑은 고딕"/>
+                <a:ea typeface="맑은 고딕"/>
+              </a:rPr>
+              <a:t>[Anthropic 2025c]</a:t>
             </a:r>
           </a:p>
         </p:txBody>
@@ -40162,7 +40542,27 @@
                 <a:latin typeface="맑은 고딕"/>
                 <a:ea typeface="맑은 고딕"/>
               </a:rPr>
-              <a:t>"A spec is a structured, behavior-oriented artifact - or a set of related artifacts - written in natural language that expresses software functionality and serves as guidance to AI coding agents.", [Böckeler 2025]</a:t>
+              <a:t>"A spec is a structured, behavior-oriented artifact - or a set of related artifacts - written in natural language that expresses software functionality and serves as guidance to AI coding agents."</a:t>
+            </a:r>
+            <a:r>
+              <a:rPr sz="1000" b="0">
+                <a:solidFill>
+                  <a:srgbClr val="000000"/>
+                </a:solidFill>
+                <a:latin typeface="맑은 고딕"/>
+                <a:ea typeface="맑은 고딕"/>
+              </a:rPr>
+              <a:t>, </a:t>
+            </a:r>
+            <a:r>
+              <a:rPr sz="1000" b="0">
+                <a:solidFill>
+                  <a:srgbClr val="000000"/>
+                </a:solidFill>
+                <a:latin typeface="맑은 고딕"/>
+                <a:ea typeface="맑은 고딕"/>
+              </a:rPr>
+              <a:t>[Böckeler 2025]</a:t>
             </a:r>
           </a:p>
         </p:txBody>
@@ -43353,6 +43753,16 @@
               <a:buNone/>
             </a:pPr>
             <a:r>
+              <a:rPr sz="1800" b="0">
+                <a:solidFill>
+                  <a:srgbClr val="000000"/>
+                </a:solidFill>
+                <a:latin typeface="맑은 고딕"/>
+                <a:ea typeface="맑은 고딕"/>
+              </a:rPr>
+              <a:t>어느 경로를 택하든 </a:t>
+            </a:r>
+            <a:r>
               <a:rPr sz="1800" b="1">
                 <a:solidFill>
                   <a:srgbClr val="000000"/>
@@ -43360,7 +43770,7 @@
                 <a:latin typeface="맑은 고딕"/>
                 <a:ea typeface="맑은 고딕"/>
               </a:rPr>
-              <a:t>명세</a:t>
+              <a:t>명세는 빠지지 않는다</a:t>
             </a:r>
             <a:r>
               <a:rPr sz="1800" b="0">
@@ -43370,7 +43780,7 @@
                 <a:latin typeface="맑은 고딕"/>
                 <a:ea typeface="맑은 고딕"/>
               </a:rPr>
-              <a:t>는 모든 경로에 있고, 가장 작은 명세는 유저 스토리와 수용 기준이다. 그 사이에 </a:t>
+              <a:t>. 가장 작은 명세는 유저 스토리와 수용 기준이며, 그 사이에 </a:t>
             </a:r>
             <a:r>
               <a:rPr sz="1800" b="1">
@@ -43410,7 +43820,7 @@
                 <a:latin typeface="맑은 고딕"/>
                 <a:ea typeface="맑은 고딕"/>
               </a:rPr>
-              <a:t>를 넣을지는 복잡성이 정한다.</a:t>
+              <a:t>를 넣을지는 과제의 복잡성이 정한다.</a:t>
             </a:r>
           </a:p>
           <a:p>
@@ -43492,7 +43902,7 @@
         </p:nvSpPr>
         <p:spPr>
           <a:xfrm>
-            <a:off x="365760" y="2785872"/>
+            <a:off x="365760" y="3060192"/>
             <a:ext cx="8412480" cy="201168"/>
           </a:xfrm>
           <a:prstGeom prst="rect">
@@ -43536,7 +43946,7 @@
         </p:blipFill>
         <p:spPr>
           <a:xfrm>
-            <a:off x="1038200" y="3023616"/>
+            <a:off x="1038200" y="3297936"/>
             <a:ext cx="7067600" cy="2046359"/>
           </a:xfrm>
           <a:prstGeom prst="rect">
@@ -44133,7 +44543,27 @@
                 <a:latin typeface="맑은 고딕"/>
                 <a:ea typeface="맑은 고딕"/>
               </a:rPr>
-              <a:t>"each requirement represents a “User Story” (in “As a…” format) with acceptance criteria (in “GIVEN… WHEN… THEN…” format)", [Böckeler 2025]</a:t>
+              <a:t>"each requirement represents a “User Story” (in “As a…” format) with acceptance criteria (in “GIVEN… WHEN… THEN…” format)"</a:t>
+            </a:r>
+            <a:r>
+              <a:rPr sz="1000" b="0">
+                <a:solidFill>
+                  <a:srgbClr val="000000"/>
+                </a:solidFill>
+                <a:latin typeface="맑은 고딕"/>
+                <a:ea typeface="맑은 고딕"/>
+              </a:rPr>
+              <a:t>, </a:t>
+            </a:r>
+            <a:r>
+              <a:rPr sz="1000" b="0">
+                <a:solidFill>
+                  <a:srgbClr val="000000"/>
+                </a:solidFill>
+                <a:latin typeface="맑은 고딕"/>
+                <a:ea typeface="맑은 고딕"/>
+              </a:rPr>
+              <a:t>[Böckeler 2025]</a:t>
             </a:r>
           </a:p>
           <a:p>
@@ -46014,7 +46444,7 @@
                 <a:latin typeface="맑은 고딕"/>
                 <a:ea typeface="맑은 고딕"/>
               </a:rPr>
-              <a:t>명세는 새 산출물이 아니므로 </a:t>
+              <a:t>명세는 새로 생긴 산출물이 아니므로 </a:t>
             </a:r>
             <a:r>
               <a:rPr sz="1800" b="1">
@@ -46024,7 +46454,7 @@
                 <a:latin typeface="맑은 고딕"/>
                 <a:ea typeface="맑은 고딕"/>
               </a:rPr>
-              <a:t>요구공학의 순서</a:t>
+              <a:t>요구공학이 써 온 순서</a:t>
             </a:r>
             <a:r>
               <a:rPr sz="1800" b="0">
@@ -46034,7 +46464,7 @@
                 <a:latin typeface="맑은 고딕"/>
                 <a:ea typeface="맑은 고딕"/>
               </a:rPr>
-              <a:t>대로 쓴다. 이 세션의 목차가 그 순서다.</a:t>
+              <a:t>를 그대로 따른다. 이 세션의 목차가 그 순서다.</a:t>
             </a:r>
           </a:p>
         </p:txBody>
@@ -47281,7 +47711,7 @@
                 <a:latin typeface="맑은 고딕"/>
                 <a:ea typeface="맑은 고딕"/>
               </a:rPr>
-              <a:t>문제·요구·요구사항·해결책</a:t>
+              <a:t>문제와 요구와 요구사항과 해결책</a:t>
             </a:r>
             <a:r>
               <a:rPr sz="1800" b="0">
@@ -47291,7 +47721,7 @@
                 <a:latin typeface="맑은 고딕"/>
                 <a:ea typeface="맑은 고딕"/>
               </a:rPr>
-              <a:t>이 섞여 있다. 해결책은 작업 명세서에 넣지 않는다.</a:t>
+              <a:t>이 섞여 있다. 이 가운데 해결책은 작업 명세서에 넣지 않는다.</a:t>
             </a:r>
           </a:p>
           <a:p>
@@ -47354,7 +47784,27 @@
                 <a:latin typeface="맑은 고딕"/>
                 <a:ea typeface="맑은 고딕"/>
               </a:rPr>
-              <a:t>"Requirements are capabilities and conditions to which the system … must conform", [Larman 2004]</a:t>
+              <a:t>"Requirements are capabilities and conditions to which the system … must conform"</a:t>
+            </a:r>
+            <a:r>
+              <a:rPr sz="1000" b="0">
+                <a:solidFill>
+                  <a:srgbClr val="000000"/>
+                </a:solidFill>
+                <a:latin typeface="맑은 고딕"/>
+                <a:ea typeface="맑은 고딕"/>
+              </a:rPr>
+              <a:t>, </a:t>
+            </a:r>
+            <a:r>
+              <a:rPr sz="1000" b="0">
+                <a:solidFill>
+                  <a:srgbClr val="000000"/>
+                </a:solidFill>
+                <a:latin typeface="맑은 고딕"/>
+                <a:ea typeface="맑은 고딕"/>
+              </a:rPr>
+              <a:t>[Larman 2004]</a:t>
             </a:r>
           </a:p>
         </p:txBody>
@@ -48249,6 +48699,16 @@
               <a:buNone/>
             </a:pPr>
             <a:r>
+              <a:rPr sz="1800" b="1">
+                <a:solidFill>
+                  <a:srgbClr val="000000"/>
+                </a:solidFill>
+                <a:latin typeface="맑은 고딕"/>
+                <a:ea typeface="맑은 고딕"/>
+              </a:rPr>
+              <a:t>무엇이 올바른 결과인가</a:t>
+            </a:r>
+            <a:r>
               <a:rPr sz="1800" b="0">
                 <a:solidFill>
                   <a:srgbClr val="000000"/>
@@ -48256,27 +48716,7 @@
                 <a:latin typeface="맑은 고딕"/>
                 <a:ea typeface="맑은 고딕"/>
               </a:rPr>
-              <a:t>"</a:t>
-            </a:r>
-            <a:r>
-              <a:rPr sz="1800" b="1">
-                <a:solidFill>
-                  <a:srgbClr val="000000"/>
-                </a:solidFill>
-                <a:latin typeface="맑은 고딕"/>
-                <a:ea typeface="맑은 고딕"/>
-              </a:rPr>
-              <a:t>올바른 결과가 무엇인가?</a:t>
-            </a:r>
-            <a:r>
-              <a:rPr sz="1800" b="0">
-                <a:solidFill>
-                  <a:srgbClr val="000000"/>
-                </a:solidFill>
-                <a:latin typeface="맑은 고딕"/>
-                <a:ea typeface="맑은 고딕"/>
-              </a:rPr>
-              <a:t>"에 대한 답이 업무 규칙이다. 요청에는 이 답이 없으므로 업무 담당자에게 질문해서 확인한다.</a:t>
+              <a:t>에 대한 답이 업무 규칙이다. 요청 문장에는 그 답이 없으므로 업무 담당자에게 물어서 확인해야 한다.</a:t>
             </a:r>
           </a:p>
         </p:txBody>

--- a/courses/ai-native/sessions/s03.pptx
+++ b/courses/ai-native/sessions/s03.pptx
@@ -1297,7 +1297,7 @@
             <a:pPr lvl="0"/>
             <a:r>
               <a:rPr lang="ko-KR" sz="1200"/>
-              <a:t>"세션 02. 요구와 유저 스토리"에서 확인한 주문의 요구사항을 입력으로 쓴다. 도메인 모델은 그 요구사항이 쓰는 말의 구조를 밝힌다.</a:t>
+              <a:t>"세션 02. 요구와 사용자 이야기"에서 확인한 주문의 요구사항을 입력으로 쓴다. 도메인 모델은 그 요구사항이 쓰는 말의 구조를 밝힌다.</a:t>
             </a:r>
           </a:p>
           <a:p>

--- a/courses/ai-native/sessions/s03.pptx
+++ b/courses/ai-native/sessions/s03.pptx
@@ -1719,7 +1719,7 @@
             <a:pPr lvl="0"/>
             <a:r>
               <a:rPr lang="ko-KR" sz="1200"/>
-              <a:t>수용 기준이 정해졌어도 그 기준을 재는 테스트가 맞는지는 별도 검증이 필요하다. 구체적인 검사 구성은 "세션 09. 검사 파이프라인"이 맡는다.</a:t>
+              <a:t>수용 기준이 정해졌어도 그 기준을 확인하는 테스트가 맞는지는 별도 검증이 필요하다. 구체적인 검사 구성은 "세션 09. 검사 파이프라인"이 맡는다.</a:t>
             </a:r>
           </a:p>
         </p:txBody>
@@ -1869,6 +1869,13 @@
             <a:pPr lvl="0"/>
             <a:r>
               <a:rPr lang="ko-KR" sz="1200"/>
+              <a:t>모델에서 보완된 것 — 용어집의 첫 항목과 요구사항 정의서가 생기고, 미정 목록이 시작된다.</a:t>
+            </a:r>
+          </a:p>
+          <a:p>
+            <a:pPr lvl="0"/>
+            <a:r>
+              <a:rPr lang="ko-KR" sz="1200"/>
               <a:t>요구사항 정의서·용어집의 시작·수용 예·미정 질문이 뒤 세션의 입력이다. 다음 세션이 현재의 미정을 대신 정하지 않게 한다.</a:t>
             </a:r>
           </a:p>
@@ -1959,6 +1966,328 @@
             <a:r>
               <a:rPr lang="ko-KR" sz="1200"/>
               <a:t>강의의 배송 요청 실패 하나와 달리 실습의 H·B·F·E·G·I 등은 수강생이 앞서 남긴 미정이다. 강의의 답을 실습 정책으로 복사하지 않는다.</a:t>
+            </a:r>
+          </a:p>
+          <a:p>
+            <a:pPr lvl="0"/>
+            <a:r>
+              <a:rPr lang="ko-KR" sz="1200"/>
+              <a:t>실제로 실행한 프롬프트 — 아래가 이 별첨을 만든 입력 그대로다. 본문 실습의 ①~⑤는 수강생용 문구이고, 실제 실행은 앞 응답을 읽고 답한 내용이 붙어 길다. 원본은 code/s03/exercise-conversation/order/prompt-NN.txt다.</a:t>
+            </a:r>
+          </a:p>
+          <a:p>
+            <a:pPr lvl="1"/>
+            <a:r>
+              <a:rPr lang="ko-KR" sz="1200"/>
+              <a:t>1. 실제 프롬프트 1</a:t>
+            </a:r>
+          </a:p>
+          <a:p>
+            <a:pPr lvl="0">
+              <a:buNone/>
+            </a:pPr>
+            <a:r>
+              <a:rPr lang="ko-KR" sz="1200"/>
+              <a:t>    실습 1의 업무 조건을 읽고 "주문한다"의 요구사항 정의서 초안을 제안해라. 실습 2에서 이 일은 대화형 보조로 하고 사람이 초안마다 검토하기로 했다. 사용자 이야기 하나, 기능·업무 규칙·용어, 기본·대안·예외 흐름, 범위·제외·미정, 수용 기준을 포함해라. 요구사항을 쓰되 도메인 모델·아키텍처·기술 설계·코드는 만들지 마라. 실습 1에 없는 정책을 결정하지 말고 질문으로 남겨라. 조건이 부족하면 지금 필요한 질문을 하고 대화창에서 검토할 간결한 초안으로 답해라. 예시의 상품·수량·주소와 품질 목표는 아직 주어지지 않았다. 임의로 정하지 마라.</a:t>
+            </a:r>
+          </a:p>
+          <a:p>
+            <a:pPr lvl="0">
+              <a:buNone/>
+            </a:pPr>
+            <a:r>
+              <a:rPr lang="ko-KR" sz="1200"/>
+              <a:t>    [실습 1의 최종 업무 조건] # "주문한다" 업무 조건</a:t>
+            </a:r>
+          </a:p>
+          <a:p>
+            <a:pPr lvl="0">
+              <a:buNone/>
+            </a:pPr>
+            <a:r>
+              <a:rPr lang="ko-KR" sz="1200"/>
+              <a:t>    ## 범위</a:t>
+            </a:r>
+          </a:p>
+          <a:p>
+            <a:pPr lvl="2"/>
+            <a:r>
+              <a:rPr lang="ko-KR" sz="1200"/>
+              <a:t>대상: 고객이 장바구니에서 주문을 시작하고, 배송지를 확정한 뒤 카드 결제 승인을 받아 주문이 성립할 때까지다.</a:t>
+            </a:r>
+          </a:p>
+          <a:p>
+            <a:pPr lvl="2"/>
+            <a:r>
+              <a:rPr lang="ko-KR" sz="1200"/>
+              <a:t>연계 대상(이미 운영 중인 외부 시스템): 상품 시스템(판매가, 재고), 결제 시스템(카드 승인), 배송 시스템(배송 요청 수신).</a:t>
+            </a:r>
+          </a:p>
+          <a:p>
+            <a:pPr lvl="2"/>
+            <a:r>
+              <a:rPr lang="ko-KR" sz="1200"/>
+              <a:t>제외: 화면, 기술 설계, 결제 이후 운영(취소, 환불, 반품, 교환, 배송 진행), 카드 외 결제 수단, 배송비, 쿠폰과 할인.</a:t>
+            </a:r>
+          </a:p>
+          <a:p>
+            <a:pPr lvl="0">
+              <a:buNone/>
+            </a:pPr>
+            <a:r>
+              <a:rPr lang="ko-KR" sz="1200"/>
+              <a:t>    ## 주문 생성</a:t>
+            </a:r>
+          </a:p>
+          <a:p>
+            <a:pPr lvl="2"/>
+            <a:r>
+              <a:rPr lang="ko-KR" sz="1200"/>
+              <a:t>고객이 배송지를 확정하면 주문이 생기고, 주문 상태는 결제대기가 된다.</a:t>
+            </a:r>
+          </a:p>
+          <a:p>
+            <a:pPr lvl="2"/>
+            <a:r>
+              <a:rPr lang="ko-KR" sz="1200"/>
+              <a:t>주문자와 수령인은 같은 사람으로 본다.</a:t>
+            </a:r>
+          </a:p>
+          <a:p>
+            <a:pPr lvl="2"/>
+            <a:r>
+              <a:rPr lang="ko-KR" sz="1200"/>
+              <a:t>[미정 H] 비회원 주문을 허용하는지, 허용한다면 결제대기 주문을 다시 찾을 때 본인을 어떻게 확인하는지 정해지지 않았다.</a:t>
+            </a:r>
+          </a:p>
+          <a:p>
+            <a:pPr lvl="0">
+              <a:buNone/>
+            </a:pPr>
+            <a:r>
+              <a:rPr lang="ko-KR" sz="1200"/>
+              <a:t>    ## 주문 금액</a:t>
+            </a:r>
+          </a:p>
+          <a:p>
+            <a:pPr lvl="2"/>
+            <a:r>
+              <a:rPr lang="ko-KR" sz="1200"/>
+              <a:t>주문 금액은 항목마다 주문 생성 시점의 판매가(단가)에 수량을 곱해 모두 더한 값이다.</a:t>
+            </a:r>
+          </a:p>
+          <a:p>
+            <a:pPr lvl="2"/>
+            <a:r>
+              <a:rPr lang="ko-KR" sz="1200"/>
+              <a:t>주문이 생긴 뒤 판매가가 오르거나 내려도 주문 금액은 바뀌지 않으며, 그 금액을 청구한다.</a:t>
+            </a:r>
+          </a:p>
+          <a:p>
+            <a:pPr lvl="0">
+              <a:buNone/>
+            </a:pPr>
+            <a:r>
+              <a:rPr lang="ko-KR" sz="1200"/>
+              <a:t>    ## 결제대기</a:t>
+            </a:r>
+          </a:p>
+          <a:p>
+            <a:pPr lvl="2"/>
+            <a:r>
+              <a:rPr lang="ko-KR" sz="1200"/>
+              <a:t>결제대기 중에는 상품, 수량, 배송지를 바꿀 수 없다. 바꾸려면 새로 주문한다.</a:t>
+            </a:r>
+          </a:p>
+          <a:p>
+            <a:pPr lvl="2"/>
+            <a:r>
+              <a:rPr lang="ko-KR" sz="1200"/>
+              <a:t>카드 결제가 거절되면 주문을 취소하지 않고 결제대기로 남겨, 고객이 다른 카드로 다시 결제할 수 있게 한다.</a:t>
+            </a:r>
+          </a:p>
+          <a:p>
+            <a:pPr lvl="2"/>
+            <a:r>
+              <a:rPr lang="ko-KR" sz="1200"/>
+              <a:t>[미정 B] 결제대기의 기한과 기한이 지난 뒤의 처리가 정해지지 않았다. 구현에서 만료, 취소, 삭제, 결제 차단을 임의로 정하지 않는다.</a:t>
+            </a:r>
+          </a:p>
+          <a:p>
+            <a:pPr lvl="0">
+              <a:buNone/>
+            </a:pPr>
+            <a:r>
+              <a:rPr lang="ko-KR" sz="1200"/>
+              <a:t>    ## 결제와 주문 성립</a:t>
+            </a:r>
+          </a:p>
+          <a:p>
+            <a:pPr lvl="2"/>
+            <a:r>
+              <a:rPr lang="ko-KR" sz="1200"/>
+              <a:t>결제 수단은 카드뿐이다.</a:t>
+            </a:r>
+          </a:p>
+          <a:p>
+            <a:pPr lvl="2"/>
+            <a:r>
+              <a:rPr lang="ko-KR" sz="1200"/>
+              <a:t>카드 승인이 완료된 때 주문이 성립한다.</a:t>
+            </a:r>
+          </a:p>
+          <a:p>
+            <a:pPr lvl="2"/>
+            <a:r>
+              <a:rPr lang="ko-KR" sz="1200"/>
+              <a:t>결제 시스템의 응답을 확정할 수 없으면 그 응답을 실패로 바꾸지 않는다.</a:t>
+            </a:r>
+          </a:p>
+          <a:p>
+            <a:pPr lvl="2"/>
+            <a:r>
+              <a:rPr lang="ko-KR" sz="1200"/>
+              <a:t>[미정 F] 응답을 확정할 수 없을 때 이후 처리(재결제 허용 여부 포함)가 정해지지 않았다. 구현에서 성공이나 실패를 임의로 확정하지 않는다.</a:t>
+            </a:r>
+          </a:p>
+          <a:p>
+            <a:pPr lvl="0">
+              <a:buNone/>
+            </a:pPr>
+            <a:r>
+              <a:rPr lang="ko-KR" sz="1200"/>
+              <a:t>    ## 재고</a:t>
+            </a:r>
+          </a:p>
+          <a:p>
+            <a:pPr lvl="2"/>
+            <a:r>
+              <a:rPr lang="ko-KR" sz="1200"/>
+              <a:t>재고는 상품 시스템의 판단을 그대로 따르며, 주문 쪽에서 재고를 따로 확보하지 않는다.</a:t>
+            </a:r>
+          </a:p>
+          <a:p>
+            <a:pPr lvl="2"/>
+            <a:r>
+              <a:rPr lang="ko-KR" sz="1200"/>
+              <a:t>[미정 E] 승인 뒤 재고가 없을 때의 처리가 정해지지 않았다. 구현에서 승인 취소나 주문 상태 변경을 임의로 하지 않는다.</a:t>
+            </a:r>
+          </a:p>
+          <a:p>
+            <a:pPr lvl="0">
+              <a:buNone/>
+            </a:pPr>
+            <a:r>
+              <a:rPr lang="ko-KR" sz="1200"/>
+              <a:t>    ## 배송 요청</a:t>
+            </a:r>
+          </a:p>
+          <a:p>
+            <a:pPr lvl="2"/>
+            <a:r>
+              <a:rPr lang="ko-KR" sz="1200"/>
+              <a:t>배송 시스템에는 카드 승인 뒤에만 배송을 요청한다.</a:t>
+            </a:r>
+          </a:p>
+          <a:p>
+            <a:pPr lvl="2"/>
+            <a:r>
+              <a:rPr lang="ko-KR" sz="1200"/>
+              <a:t>[미정 G] 승인 뒤 배송 요청이 실패했을 때의 처리가 정해지지 않았다. 구현에서 승인 취소, 주문 상태 변경, 재요청 주체와 방식을 임의로 정하지 않는다.</a:t>
+            </a:r>
+          </a:p>
+          <a:p>
+            <a:pPr lvl="2"/>
+            <a:r>
+              <a:rPr lang="ko-KR" sz="1200"/>
+              <a:t>[미정 I] 주문 확인 통지를 이 시스템이 보내는지, 다른 시스템의 통지로 대신하는지 정해지지 않았다.</a:t>
+            </a:r>
+          </a:p>
+          <a:p>
+            <a:pPr lvl="1"/>
+            <a:r>
+              <a:rPr lang="ko-KR" sz="1200"/>
+              <a:t>2. 실제 프롬프트 2</a:t>
+            </a:r>
+          </a:p>
+          <a:p>
+            <a:pPr lvl="0">
+              <a:buNone/>
+            </a:pPr>
+            <a:r>
+              <a:rPr lang="ko-KR" sz="1200"/>
+              <a:t>    [앞선 질문에 대한 답] 실습 예는 펜 2개·주문 생성 시 판매가 1,000원·배송지 서울로 하자. 카드 승인 뒤의 상태명은 결제완료다. 실습 품질 기준은 정상 시험에서 동시 요청 100건, 각 외부 응답 1초 이내일 때 요청부터 결과 수신까지 95% 이상 3초 이내이며, 본인의 주문만 조회·변경한다. 실습용 조건이며 운영 보장 수치가 아니다. 비회원과 본인 확인(H), 결제대기 기한(B), 결제 응답 불명 처리(F), 승인 뒤 재고 부족(E), 승인 뒤 배송 요청 실패(G), 통지 담당(I)는 실습 1처럼 미정으로 남긴다. 재고 판단 시점도 지금 정하지 않는다. 승인 전 재고 부족이나 중복 요청 같은 새 정책을 여기서 더 만들지 않는다. [추가 질문·수정 요청] 기능 요구사항의 '주문을 생성할 때 ... 재고 판단을 사용'은 근거 없는 시점 확정이다. 판매가를 확정하는 시점과 재고 판단 시점을 분리해 고쳐라. 주문 생성과 승인 뒤 주문 성립의 뜻도 구분해라. 외부 시스템은 상품·결제·배송이며 그 내부를 재구현하지 않는다. 요구의 범위에서 '도메인 모델 제외'라고 쓰면 시스템 기능의 제외로 오해한다. 도메인 모델·설계·코드는 이번 작성 산출물에서 다루지 않는다는 뜻으로 분리해라. 주문한다의 사용자 이야기는 하나로 유지하고 수용 기준은 관찰할 금액·상태·배송 요청으로 써라. 모든 오류를 나열하기보다 확정된 기본·대안 흐름과 대표 미정 분기를 간결하게 정리해라.</a:t>
+            </a:r>
+          </a:p>
+          <a:p>
+            <a:pPr lvl="1"/>
+            <a:r>
+              <a:rPr lang="ko-KR" sz="1200"/>
+              <a:t>3. 실제 프롬프트 3</a:t>
+            </a:r>
+          </a:p>
+          <a:p>
+            <a:pPr lvl="0">
+              <a:buNone/>
+            </a:pPr>
+            <a:r>
+              <a:rPr lang="ko-KR" sz="1200"/>
+              <a:t>    [앞선 질문에 대한 답] 수용 예의 가격 변경은 주문 생성 후 펜 판매가가 1,200원으로 오른 경우로 한다. 카드 X는 거절되고 카드 Y는 승인된다. 네 대표 예는 승인, 가격 변경, 거절, 거절 뒤 같은 주문의 재결제다. 승인 예에서는 서울로 배송 요청 1회, 거절 직후에는 0회, X 거절 후 Y 승인까지 모두 합해 1회여야 한다. 청구 금액은 네 예에서 2,000원이다. 거절 직후는 결제대기, 승인 뒤는 결제완료다. 재고 확인 시점은 여전히 미정이다. [추가 질문·수정 요청] 네 대표 예를 각각 전제·사건·기대 결과로 간결하게 적고, 미정 분기를 거절 테스트의 기대값으로 확정하지 마라. 배송 요청 실패를 취소나 자동 재요청으로 처리하는 기준도 만들지 마라. 같은 주문인지와 요청 횟수가 관찰 가능하게 써라. 기본 흐름은 공통 흐름 번호 1 상품 조회, 2 장바구니, 3 배송지 지정, 4 결제, 5 주문 결과 확인을 따르되 1~2는 전제이고 이번 상세 범위는 3~5다. 주문 결과 확인은 응답 결과를 확인하는 뜻이며 I의 별도 통지 주체를 확정하는 말이 아니다. 재고 판단 시점을 기능 요구사항으로 고정한 문장은 제거됐는지 확인해라. 반복되는 같은 규칙과 긴 항목은 합치되 정의와 관찰 결과가 없어지지 않게 해라. 문형·흐름·수용 예가 서로 다른 이름과 값을 쓰지 않는지 확인해라.</a:t>
+            </a:r>
+          </a:p>
+          <a:p>
+            <a:pPr lvl="1"/>
+            <a:r>
+              <a:rPr lang="ko-KR" sz="1200"/>
+              <a:t>4. 실제 프롬프트 4</a:t>
+            </a:r>
+          </a:p>
+          <a:p>
+            <a:pPr lvl="0">
+              <a:buNone/>
+            </a:pPr>
+            <a:r>
+              <a:rPr lang="ko-KR" sz="1200"/>
+              <a:t>    [앞선 질문에 대한 답] 품질 시험의 관찰 구간은 공통 흐름 4의 카드 결제 요청부터 5의 결과 수신까지다. 외부 시스템은 실습에서는 테스트 대역으로 정상 응답을 주고, 동시에 결제 요청 100건을 실행한다. 각 외부 응답이 1초 이내라는 조건에서 100건 중 95건 이상이 3초 이내인지 확인한다. 실제 운영의 보장 값이 아니다. 본인 주문 접근 허용, 다른 고객의 주문 조회·변경 요청 거절을 확인한다. 접근 제한의 인증 방식·응답 코드·화면은 지금 설계하지 않는다. [추가 질문·수정 요청] 네 예의 2,000원은 결제 시스템에 승인을 요청하는 금액이다. 카드 X가 거절되면 실제 청구가 완료됐다고 적지 마라. 승인 예와 가격 변경 예는 승인 결과와 금액을, 거절 예는 결제대기·배송 0회·다른 카드 재결제 가능을, 재결제 예는 같은 주문·승인 요청 금액·배송 총 1회를 확인해라. 대표 수용 예를 Given/When/Then(전제/사건/기대 결과)로 표현하되 Markdown의 짧은 목록으로 충분하다. 재고 판단 시점 등 원래 조건에 없는 질문은 발견 근거를 한 줄 남기고 미정으로 보존한다. 미정 B·F·E·G·H·I와 재고 판단 시점의 답을 새로 만들지 마라. '미정이니 운영에서도 아무 행동을 하지 않는다'를 정책으로 확정하지 마라. 필요한 정책을 담당자에게 확인해야 하며 그 분기까지 완료했다고 주장하지 않는다는 뜻이다. 조건·정의·흐름을 반복해 길어진 부분을 간결하게 묶고, 용어집에는 주문·주문 항목·판매가·주문 금액처럼 뒤 실습에서 읽을 기본 용어도 짧게 남겨라. 요구 명세에 분석·설계 산출물을 섞지 마라.</a:t>
+            </a:r>
+          </a:p>
+          <a:p>
+            <a:pPr lvl="1"/>
+            <a:r>
+              <a:rPr lang="ko-KR" sz="1200"/>
+              <a:t>5. 실제 프롬프트 5</a:t>
+            </a:r>
+          </a:p>
+          <a:p>
+            <a:pPr lvl="0">
+              <a:buNone/>
+            </a:pPr>
+            <a:r>
+              <a:rPr lang="ko-KR" sz="1200"/>
+              <a:t>    최종 MD를 검토하니 앞서 합의한 구분이 누락됐다. 다음 두 곳을 고쳐 합의 결과의 Markdown 문서 본문 전체를 다시 생성해라. 다른 정책이나 모델·설계를 새로 만들지 마라.</a:t>
+            </a:r>
+          </a:p>
+          <a:p>
+            <a:pPr lvl="2"/>
+            <a:r>
+              <a:rPr lang="ko-KR" sz="1200"/>
+              <a:t>1. '제외 사항' 마지막의 '도메인 모델, 아키텍처, 기술 설계 및 구현 코드'는 시스템 기능의 제외가 아니다. 그 항목만 별도 '이번 문서에서 다루지 않는 산출물'로 구분하고, 시스템 기능을 제외한다는 뜻이 아님을 짧게 밝혀라. 취소·환불·배송 진행, 카드 외 수단, 배송비·쿠폰 등 기능 범위의 제외와 섞지 마라. 이 구분은 ②에서 이미 합의했다.</a:t>
+            </a:r>
+          </a:p>
+          <a:p>
+            <a:pPr lvl="2"/>
+            <a:r>
+              <a:rPr lang="ko-KR" sz="1200"/>
+              <a:t>2. 다음 실습의 용어집에 쓸 공통 영문 표기를 기본 용어에만 병기해라. 주문(Order), 주문 항목(OrderItem), 판매가(salePrice), 주문 금액(totalAmount), 결제대기(PENDING_PAYMENT), 결제완료(PAID)가 사람의 지정이다. 코드·클래스·속성 설계를 하라는 뜻이 아니라 같은 뜻을 같은 이름으로 부르기 위한 표기다. 주어진 표기 외의 새 영문 이름은 만들지 마라. 주문 생성과 주문 성립의 차이는 기존 흐름·설명에서 유지한다.</a:t>
+            </a:r>
+          </a:p>
+          <a:p>
+            <a:pPr lvl="0">
+              <a:buNone/>
+            </a:pPr>
+            <a:r>
+              <a:rPr lang="ko-KR" sz="1200"/>
+              <a:t>    그 외 합의한 범위, 규칙, 흐름 1~5, 네 대표 수용 예, 품질·접근 기준, 미정 질문을 보존해라. 접근 권한이 있어도 결제대기 중 변경할 수 없다는 구분을 유지하고 재고 시점이나 배송 요청 실패의 답을 만들지 마라. 같은 조건을 여러 절에서 되풀이하지 말고 간결하게 정리해라. 서두에는 목적을 요약한 한 문단을 먼저 두어라. 형식은 제목·짧은 항목 목록으로 하고 표·도식·코드는 추가하지 마라. 초안 표기·수정 설명·대화 안내는 빼고 최종 문서 전문만 출력해라.</a:t>
             </a:r>
           </a:p>
         </p:txBody>
@@ -3974,7 +4303,7 @@
                 <a:latin typeface="맑은 고딕"/>
                 <a:ea typeface="맑은 고딕"/>
               </a:rPr>
-              <a:t>13. 실습 —</a:t>
+              <a:t>13. 실습 3 —</a:t>
             </a:r>
             <a:r>
               <a:rPr sz="1400" b="0">
@@ -13959,7 +14288,7 @@
                 <a:latin typeface="맑은 고딕"/>
                 <a:ea typeface="맑은 고딕"/>
               </a:rPr>
-              <a:t>을 가른다.</a:t>
+              <a:t>을 구분한다.</a:t>
             </a:r>
           </a:p>
           <a:p>
@@ -15685,7 +16014,7 @@
                           <a:ea typeface="맑은 고딕" panose="020B0503020000020004" pitchFamily="34" charset="-127"/>
                           <a:cs typeface="맑은 고딕"/>
                         </a:rPr>
-                        <a:t>결정을 재는 조건</a:t>
+                        <a:t>결정을 확인하는 조건</a:t>
                       </a:r>
                     </a:p>
                   </a:txBody>
@@ -20695,8 +21024,8 @@
           </p:nvPr>
         </p:nvGraphicFramePr>
         <p:xfrm>
-          <a:off x="1705166" y="1837690"/>
-          <a:ext cx="5720080" cy="3873500"/>
+          <a:off x="1635316" y="1837690"/>
+          <a:ext cx="5859780" cy="3873500"/>
         </p:xfrm>
         <a:graphic>
           <a:graphicData uri="http://schemas.openxmlformats.org/drawingml/2006/table">
@@ -20705,7 +21034,7 @@
               <a:tblGrid>
                 <a:gridCol w="1729740"/>
                 <a:gridCol w="1813560"/>
-                <a:gridCol w="2176780"/>
+                <a:gridCol w="2316480"/>
               </a:tblGrid>
               <a:tr h="288000">
                 <a:tc>
@@ -21376,7 +21705,7 @@
                           <a:ea typeface="맑은 고딕" panose="020B0503020000020004" pitchFamily="34" charset="-127"/>
                           <a:cs typeface="맑은 고딕"/>
                         </a:rPr>
-                        <a:t>규칙을 가르는 대표 예 추가</a:t>
+                        <a:t>규칙을 구분하는 대표 예 추가</a:t>
                       </a:r>
                     </a:p>
                   </a:txBody>
@@ -22056,7 +22385,7 @@
                 <a:latin typeface="맑은 고딕"/>
                 <a:ea typeface="맑은 고딕"/>
               </a:rPr>
-              <a:t>13. 실습 — 요구사항 정의서와 수용 기준</a:t>
+              <a:t>13. 실습 3 — 요구사항 정의서와 수용 기준</a:t>
             </a:r>
           </a:p>
         </p:txBody>
@@ -22192,8 +22521,8 @@
         </p:nvSpPr>
         <p:spPr>
           <a:xfrm>
-            <a:off x="365760" y="960120"/>
-            <a:ext cx="8412480" cy="5257800"/>
+            <a:off x="365760" y="1441450"/>
+            <a:ext cx="4069080" cy="4776470"/>
           </a:xfrm>
         </p:spPr>
         <p:txBody>
@@ -22201,57 +22530,6 @@
             <a:normAutofit/>
           </a:bodyPr>
           <a:lstStyle/>
-          <a:p>
-            <a:pPr marL="0" indent="0">
-              <a:spcBef>
-                <a:spcPts val="300"/>
-              </a:spcBef>
-              <a:spcAft>
-                <a:spcPts val="300"/>
-              </a:spcAft>
-              <a:buNone/>
-            </a:pPr>
-            <a:r>
-              <a:rPr sz="1400" b="1">
-                <a:solidFill>
-                  <a:srgbClr val="000000"/>
-                </a:solidFill>
-                <a:latin typeface="맑은 고딕"/>
-                <a:ea typeface="맑은 고딕"/>
-              </a:rPr>
-              <a:t>실습 1의 업무 조건</a:t>
-            </a:r>
-            <a:r>
-              <a:rPr sz="1400" b="0">
-                <a:solidFill>
-                  <a:srgbClr val="000000"/>
-                </a:solidFill>
-                <a:latin typeface="맑은 고딕"/>
-                <a:ea typeface="맑은 고딕"/>
-              </a:rPr>
-              <a:t>으로 초안을 검토한다. ②~④에는 </a:t>
-            </a:r>
-            <a:r>
-              <a:rPr sz="1400" b="1">
-                <a:solidFill>
-                  <a:srgbClr val="000000"/>
-                </a:solidFill>
-                <a:latin typeface="맑은 고딕"/>
-                <a:ea typeface="맑은 고딕"/>
-              </a:rPr>
-              <a:t>질문의 답과 수정 요청</a:t>
-            </a:r>
-            <a:r>
-              <a:rPr sz="1400" b="0">
-                <a:solidFill>
-                  <a:srgbClr val="000000"/>
-                </a:solidFill>
-                <a:latin typeface="맑은 고딕"/>
-                <a:ea typeface="맑은 고딕"/>
-              </a:rPr>
-              <a:t>을 함께 적는다.</a:t>
-            </a:r>
-          </a:p>
           <a:p>
             <a:pPr lvl="2" marL="723900" indent="-368300">
               <a:spcBef>
@@ -22272,29 +22550,18 @@
                 <a:latin typeface="맑은 고딕"/>
                 <a:ea typeface="맑은 고딕"/>
               </a:rPr>
-              <a:t>프롬프트 —</a:t>
-            </a:r>
-            <a:r>
-              <a:rPr sz="1200" b="1">
-                <a:solidFill>
-                  <a:srgbClr val="000000"/>
-                </a:solidFill>
-                <a:latin typeface="맑은 고딕"/>
-                <a:ea typeface="맑은 고딕"/>
-              </a:rPr>
-              <a:t> 요청사항 포함</a:t>
-            </a:r>
-          </a:p>
-          <a:p>
-            <a:pPr lvl="3" marL="981075" indent="-268288">
+              <a:t>투입물</a:t>
+            </a:r>
+          </a:p>
+          <a:p>
+            <a:pPr lvl="3" marL="723900" indent="0">
               <a:spcBef>
                 <a:spcPts val="300"/>
               </a:spcBef>
               <a:spcAft>
                 <a:spcPts val="300"/>
               </a:spcAft>
-              <a:buFont typeface="+mj-ea"/>
-              <a:buAutoNum type="circleNumDbPlain" startAt="1"/>
+              <a:buNone/>
             </a:pPr>
             <a:r>
               <a:rPr sz="1200" b="0">
@@ -22304,7 +22571,7 @@
                 <a:latin typeface="맑은 고딕"/>
                 <a:ea typeface="맑은 고딕"/>
               </a:rPr>
-              <a:t>"실습 1의 업무 조건을 읽고 "주문한다"의 요구사항 정의서 초안을 제안해라. </a:t>
+              <a:t>실습 1의 </a:t>
             </a:r>
             <a:r>
               <a:rPr sz="1200" b="1">
@@ -22314,7 +22581,7 @@
                 <a:latin typeface="맑은 고딕"/>
                 <a:ea typeface="맑은 고딕"/>
               </a:rPr>
-              <a:t>사용자 이야기 하나·규칙·용어·흐름·수용 기준</a:t>
+              <a:t>업무 조건</a:t>
             </a:r>
             <a:r>
               <a:rPr sz="1200" b="0">
@@ -22324,20 +22591,8 @@
                 <a:latin typeface="맑은 고딕"/>
                 <a:ea typeface="맑은 고딕"/>
               </a:rPr>
-              <a:t>을 담고 없는 정책은 질문해라. 모델·설계·코드는 만들지 마라."</a:t>
-            </a:r>
-          </a:p>
-          <a:p>
-            <a:pPr lvl="3" marL="981075" indent="-268288">
-              <a:spcBef>
-                <a:spcPts val="300"/>
-              </a:spcBef>
-              <a:spcAft>
-                <a:spcPts val="300"/>
-              </a:spcAft>
-              <a:buFont typeface="+mj-ea"/>
-              <a:buAutoNum type="circleNumDbPlain" startAt="2"/>
-            </a:pPr>
+              <a:t>(</a:t>
+            </a:r>
             <a:r>
               <a:rPr sz="1200" b="0">
                 <a:solidFill>
@@ -22346,7 +22601,17 @@
                 <a:latin typeface="맑은 고딕"/>
                 <a:ea typeface="맑은 고딕"/>
               </a:rPr>
-              <a:t>"[앞선 질문에 대한 답]과 [추가 질문·수정 요청]을 적는다. </a:t>
+              <a:t>주문한다-업무조건.md</a:t>
+            </a:r>
+            <a:r>
+              <a:rPr sz="1200" b="0">
+                <a:solidFill>
+                  <a:srgbClr val="000000"/>
+                </a:solidFill>
+                <a:latin typeface="맑은 고딕"/>
+                <a:ea typeface="맑은 고딕"/>
+              </a:rPr>
+              <a:t>)과 실습 2의 </a:t>
             </a:r>
             <a:r>
               <a:rPr sz="1200" b="1">
@@ -22356,7 +22621,7 @@
                 <a:latin typeface="맑은 고딕"/>
                 <a:ea typeface="맑은 고딕"/>
               </a:rPr>
-              <a:t>범위·제외·미정</a:t>
+              <a:t>활용 방식 판단</a:t>
             </a:r>
             <a:r>
               <a:rPr sz="1200" b="0">
@@ -22366,20 +22631,8 @@
                 <a:latin typeface="맑은 고딕"/>
                 <a:ea typeface="맑은 고딕"/>
               </a:rPr>
-              <a:t>을 구분하고 업무 조건에 없는 시점·상태·후속 처리를 임의로 정하지 마라."</a:t>
-            </a:r>
-          </a:p>
-          <a:p>
-            <a:pPr lvl="3" marL="981075" indent="-268288">
-              <a:spcBef>
-                <a:spcPts val="300"/>
-              </a:spcBef>
-              <a:spcAft>
-                <a:spcPts val="300"/>
-              </a:spcAft>
-              <a:buFont typeface="+mj-ea"/>
-              <a:buAutoNum type="circleNumDbPlain" startAt="3"/>
-            </a:pPr>
+              <a:t>(</a:t>
+            </a:r>
             <a:r>
               <a:rPr sz="1200" b="0">
                 <a:solidFill>
@@ -22388,17 +22641,7 @@
                 <a:latin typeface="맑은 고딕"/>
                 <a:ea typeface="맑은 고딕"/>
               </a:rPr>
-              <a:t>"[앞선 질문에 대한 답]과 [추가 질문·수정 요청]을 적는다. </a:t>
-            </a:r>
-            <a:r>
-              <a:rPr sz="1200" b="1">
-                <a:solidFill>
-                  <a:srgbClr val="000000"/>
-                </a:solidFill>
-                <a:latin typeface="맑은 고딕"/>
-                <a:ea typeface="맑은 고딕"/>
-              </a:rPr>
-              <a:t>승인·가격 변경·거절·재결제</a:t>
+              <a:t>활용-방식-판단.md</a:t>
             </a:r>
             <a:r>
               <a:rPr sz="1200" b="0">
@@ -22408,91 +22651,7 @@
                 <a:latin typeface="맑은 고딕"/>
                 <a:ea typeface="맑은 고딕"/>
               </a:rPr>
-              <a:t>의 전제와 금액·상태·배송 요청 기대값을 구체화해라."</a:t>
-            </a:r>
-          </a:p>
-          <a:p>
-            <a:pPr lvl="3" marL="981075" indent="-268288">
-              <a:spcBef>
-                <a:spcPts val="300"/>
-              </a:spcBef>
-              <a:spcAft>
-                <a:spcPts val="300"/>
-              </a:spcAft>
-              <a:buFont typeface="+mj-ea"/>
-              <a:buAutoNum type="circleNumDbPlain" startAt="4"/>
-            </a:pPr>
-            <a:r>
-              <a:rPr sz="1200" b="0">
-                <a:solidFill>
-                  <a:srgbClr val="000000"/>
-                </a:solidFill>
-                <a:latin typeface="맑은 고딕"/>
-                <a:ea typeface="맑은 고딕"/>
-              </a:rPr>
-              <a:t>"[앞선 질문에 대한 답]과 [추가 질문·수정 요청]을 적는다. </a:t>
-            </a:r>
-            <a:r>
-              <a:rPr sz="1200" b="1">
-                <a:solidFill>
-                  <a:srgbClr val="000000"/>
-                </a:solidFill>
-                <a:latin typeface="맑은 고딕"/>
-                <a:ea typeface="맑은 고딕"/>
-              </a:rPr>
-              <a:t>품질 기준의 조건과 확인 방법</a:t>
-            </a:r>
-            <a:r>
-              <a:rPr sz="1200" b="0">
-                <a:solidFill>
-                  <a:srgbClr val="000000"/>
-                </a:solidFill>
-                <a:latin typeface="맑은 고딕"/>
-                <a:ea typeface="맑은 고딕"/>
-              </a:rPr>
-              <a:t>을 보완하고 불가피한 미정만 이유와 함께 남겨라."</a:t>
-            </a:r>
-          </a:p>
-          <a:p>
-            <a:pPr lvl="3" marL="981075" indent="-268288">
-              <a:spcBef>
-                <a:spcPts val="300"/>
-              </a:spcBef>
-              <a:spcAft>
-                <a:spcPts val="300"/>
-              </a:spcAft>
-              <a:buFont typeface="+mj-ea"/>
-              <a:buAutoNum type="circleNumDbPlain" startAt="5"/>
-            </a:pPr>
-            <a:r>
-              <a:rPr sz="1200" b="0">
-                <a:solidFill>
-                  <a:srgbClr val="000000"/>
-                </a:solidFill>
-                <a:latin typeface="맑은 고딕"/>
-                <a:ea typeface="맑은 고딕"/>
-              </a:rPr>
-              <a:t>"합의한 요구사항 정의서를 간결한 </a:t>
-            </a:r>
-            <a:r>
-              <a:rPr sz="1200" b="1">
-                <a:solidFill>
-                  <a:srgbClr val="000000"/>
-                </a:solidFill>
-                <a:latin typeface="맑은 고딕"/>
-                <a:ea typeface="맑은 고딕"/>
-              </a:rPr>
-              <a:t>Markdown 파일</a:t>
-            </a:r>
-            <a:r>
-              <a:rPr sz="1200" b="0">
-                <a:solidFill>
-                  <a:srgbClr val="000000"/>
-                </a:solidFill>
-                <a:latin typeface="맑은 고딕"/>
-                <a:ea typeface="맑은 고딕"/>
-              </a:rPr>
-              <a:t>로 생성해라. 스토리·기능과 흐름·업무 규칙·용어·품질·수용 기준·범위·제외·미정을 담고 새 정책이나 설계를 추가하지 마라."</a:t>
+              <a:t>)</a:t>
             </a:r>
           </a:p>
           <a:p>
@@ -22515,19 +22674,29 @@
                 <a:latin typeface="맑은 고딕"/>
                 <a:ea typeface="맑은 고딕"/>
               </a:rPr>
-              <a:t>점검 항목</a:t>
-            </a:r>
-          </a:p>
-          <a:p>
-            <a:pPr lvl="3" marL="1028700" indent="-304800">
+              <a:t>프롬프트 —</a:t>
+            </a:r>
+            <a:r>
+              <a:rPr sz="1200" b="1">
+                <a:solidFill>
+                  <a:srgbClr val="000000"/>
+                </a:solidFill>
+                <a:latin typeface="맑은 고딕"/>
+                <a:ea typeface="맑은 고딕"/>
+              </a:rPr>
+              <a:t> 요청사항 포함</a:t>
+            </a:r>
+          </a:p>
+          <a:p>
+            <a:pPr lvl="3" marL="981075" indent="-268288">
               <a:spcBef>
                 <a:spcPts val="300"/>
               </a:spcBef>
               <a:spcAft>
                 <a:spcPts val="300"/>
               </a:spcAft>
-              <a:buFont typeface="+mj-lt"/>
-              <a:buAutoNum type="arabicPeriod" startAt="1"/>
+              <a:buFont typeface="+mj-ea"/>
+              <a:buAutoNum type="circleNumDbPlain" startAt="1"/>
             </a:pPr>
             <a:r>
               <a:rPr sz="1200" b="0">
@@ -22537,7 +22706,7 @@
                 <a:latin typeface="맑은 고딕"/>
                 <a:ea typeface="맑은 고딕"/>
               </a:rPr>
-              <a:t/>
+              <a:t>"실습 1의 업무 조건을 읽고 "주문한다"의 요구사항 정의서 초안을 제안해라. </a:t>
             </a:r>
             <a:r>
               <a:rPr sz="1200" b="1">
@@ -22547,7 +22716,7 @@
                 <a:latin typeface="맑은 고딕"/>
                 <a:ea typeface="맑은 고딕"/>
               </a:rPr>
-              <a:t>근거</a:t>
+              <a:t>사용자 이야기 하나·규칙·용어·흐름·수용 기준</a:t>
             </a:r>
             <a:r>
               <a:rPr sz="1200" b="0">
@@ -22557,29 +22726,19 @@
                 <a:latin typeface="맑은 고딕"/>
                 <a:ea typeface="맑은 고딕"/>
               </a:rPr>
-              <a:t> —</a:t>
-            </a:r>
-            <a:r>
-              <a:rPr sz="1000" b="0">
-                <a:solidFill>
-                  <a:srgbClr val="000000"/>
-                </a:solidFill>
-                <a:latin typeface="맑은 고딕"/>
-                <a:ea typeface="맑은 고딕"/>
-              </a:rPr>
-              <a:t> 실습 1에 없는 정책을 확정했는가?</a:t>
-            </a:r>
-          </a:p>
-          <a:p>
-            <a:pPr lvl="3" marL="1028700" indent="-304800">
+              <a:t>을 담고 없는 정책은 질문해라. 모델·설계·코드는 만들지 마라."</a:t>
+            </a:r>
+          </a:p>
+          <a:p>
+            <a:pPr lvl="3" marL="981075" indent="-268288">
               <a:spcBef>
                 <a:spcPts val="300"/>
               </a:spcBef>
               <a:spcAft>
                 <a:spcPts val="300"/>
               </a:spcAft>
-              <a:buFont typeface="+mj-lt"/>
-              <a:buAutoNum type="arabicPeriod" startAt="2"/>
+              <a:buFont typeface="+mj-ea"/>
+              <a:buAutoNum type="circleNumDbPlain" startAt="2"/>
             </a:pPr>
             <a:r>
               <a:rPr sz="1200" b="0">
@@ -22589,7 +22748,7 @@
                 <a:latin typeface="맑은 고딕"/>
                 <a:ea typeface="맑은 고딕"/>
               </a:rPr>
-              <a:t/>
+              <a:t>"[앞선 질문에 대한 답]과 [추가 질문·수정 요청]을 적는다. </a:t>
             </a:r>
             <a:r>
               <a:rPr sz="1200" b="1">
@@ -22599,7 +22758,7 @@
                 <a:latin typeface="맑은 고딕"/>
                 <a:ea typeface="맑은 고딕"/>
               </a:rPr>
-              <a:t>경계</a:t>
+              <a:t>범위·제외·미정</a:t>
             </a:r>
             <a:r>
               <a:rPr sz="1200" b="0">
@@ -22609,29 +22768,19 @@
                 <a:latin typeface="맑은 고딕"/>
                 <a:ea typeface="맑은 고딕"/>
               </a:rPr>
-              <a:t> —</a:t>
-            </a:r>
-            <a:r>
-              <a:rPr sz="1000" b="0">
-                <a:solidFill>
-                  <a:srgbClr val="000000"/>
-                </a:solidFill>
-                <a:latin typeface="맑은 고딕"/>
-                <a:ea typeface="맑은 고딕"/>
-              </a:rPr>
-              <a:t> 범위·제외·미정이 구분되는가?</a:t>
-            </a:r>
-          </a:p>
-          <a:p>
-            <a:pPr lvl="3" marL="1028700" indent="-304800">
+              <a:t>을 구분하고 업무 조건에 없는 시점·상태·후속 처리를 임의로 정하지 마라."</a:t>
+            </a:r>
+          </a:p>
+          <a:p>
+            <a:pPr lvl="3" marL="981075" indent="-268288">
               <a:spcBef>
                 <a:spcPts val="300"/>
               </a:spcBef>
               <a:spcAft>
                 <a:spcPts val="300"/>
               </a:spcAft>
-              <a:buFont typeface="+mj-lt"/>
-              <a:buAutoNum type="arabicPeriod" startAt="3"/>
+              <a:buFont typeface="+mj-ea"/>
+              <a:buAutoNum type="circleNumDbPlain" startAt="3"/>
             </a:pPr>
             <a:r>
               <a:rPr sz="1200" b="0">
@@ -22641,7 +22790,7 @@
                 <a:latin typeface="맑은 고딕"/>
                 <a:ea typeface="맑은 고딕"/>
               </a:rPr>
-              <a:t/>
+              <a:t>"[앞선 질문에 대한 답]과 [추가 질문·수정 요청]을 적는다. </a:t>
             </a:r>
             <a:r>
               <a:rPr sz="1200" b="1">
@@ -22651,7 +22800,7 @@
                 <a:latin typeface="맑은 고딕"/>
                 <a:ea typeface="맑은 고딕"/>
               </a:rPr>
-              <a:t>기대값</a:t>
+              <a:t>승인·가격 변경·거절·재결제</a:t>
             </a:r>
             <a:r>
               <a:rPr sz="1200" b="0">
@@ -22661,29 +22810,19 @@
                 <a:latin typeface="맑은 고딕"/>
                 <a:ea typeface="맑은 고딕"/>
               </a:rPr>
-              <a:t> —</a:t>
-            </a:r>
-            <a:r>
-              <a:rPr sz="1000" b="0">
-                <a:solidFill>
-                  <a:srgbClr val="000000"/>
-                </a:solidFill>
-                <a:latin typeface="맑은 고딕"/>
-                <a:ea typeface="맑은 고딕"/>
-              </a:rPr>
-              <a:t> 금액·상태·배송 요청으로 확인할 수 있는가?</a:t>
-            </a:r>
-          </a:p>
-          <a:p>
-            <a:pPr lvl="3" marL="1028700" indent="-304800">
+              <a:t>의 전제와 금액·상태·배송 요청 기대값을 구체화해라."</a:t>
+            </a:r>
+          </a:p>
+          <a:p>
+            <a:pPr lvl="3" marL="981075" indent="-268288">
               <a:spcBef>
                 <a:spcPts val="300"/>
               </a:spcBef>
               <a:spcAft>
                 <a:spcPts val="300"/>
               </a:spcAft>
-              <a:buFont typeface="+mj-lt"/>
-              <a:buAutoNum type="arabicPeriod" startAt="4"/>
+              <a:buFont typeface="+mj-ea"/>
+              <a:buAutoNum type="circleNumDbPlain" startAt="4"/>
             </a:pPr>
             <a:r>
               <a:rPr sz="1200" b="0">
@@ -22693,7 +22832,7 @@
                 <a:latin typeface="맑은 고딕"/>
                 <a:ea typeface="맑은 고딕"/>
               </a:rPr>
-              <a:t/>
+              <a:t>"[앞선 질문에 대한 답]과 [추가 질문·수정 요청]을 적는다. </a:t>
             </a:r>
             <a:r>
               <a:rPr sz="1200" b="1">
@@ -22703,7 +22842,7 @@
                 <a:latin typeface="맑은 고딕"/>
                 <a:ea typeface="맑은 고딕"/>
               </a:rPr>
-              <a:t>품질</a:t>
+              <a:t>품질 기준의 조건과 확인 방법</a:t>
             </a:r>
             <a:r>
               <a:rPr sz="1200" b="0">
@@ -22713,31 +22852,120 @@
                 <a:latin typeface="맑은 고딕"/>
                 <a:ea typeface="맑은 고딕"/>
               </a:rPr>
-              <a:t> —</a:t>
-            </a:r>
-            <a:r>
-              <a:rPr sz="1000" b="0">
-                <a:solidFill>
-                  <a:srgbClr val="000000"/>
-                </a:solidFill>
-                <a:latin typeface="맑은 고딕"/>
-                <a:ea typeface="맑은 고딕"/>
-              </a:rPr>
-              <a:t> 시험 조건과 관찰할 결과가 명확한가?</a:t>
-            </a:r>
-          </a:p>
-          <a:p>
-            <a:pPr lvl="3" marL="1028700" indent="-304800">
+              <a:t>을 보완하고 불가피한 미정만 이유와 함께 남겨라."</a:t>
+            </a:r>
+          </a:p>
+        </p:txBody>
+      </p:sp>
+      <p:sp>
+        <p:nvSpPr>
+          <p:cNvPr id="9" name="내용 개체 틀 7">
+            <a:extLst>
+              <a:ext uri="{FF2B5EF4-FFF2-40B4-BE49-F238E27FC236}">
+                <a16:creationId xmlns:a16="http://schemas.microsoft.com/office/drawing/2014/main" id="{BEBA2C4A-B0BF-F2E4-EA6E-614C99CBA184}"/>
+              </a:ext>
+            </a:extLst>
+          </p:cNvPr>
+          <p:cNvSpPr>
+            <a:spLocks noGrp="1"/>
+          </p:cNvSpPr>
+          <p:nvPr>
+            <p:ph idx="1"/>
+          </p:nvPr>
+        </p:nvSpPr>
+        <p:spPr>
+          <a:xfrm>
+            <a:off x="365760" y="960120"/>
+            <a:ext cx="8412480" cy="481330"/>
+          </a:xfrm>
+        </p:spPr>
+        <p:txBody>
+          <a:bodyPr>
+            <a:normAutofit/>
+          </a:bodyPr>
+          <a:lstStyle/>
+          <a:p>
+            <a:pPr marL="0" indent="0">
               <a:spcBef>
                 <a:spcPts val="300"/>
               </a:spcBef>
               <a:spcAft>
                 <a:spcPts val="300"/>
               </a:spcAft>
-              <a:buFont typeface="+mj-lt"/>
-              <a:buAutoNum type="arabicPeriod" startAt="5"/>
+              <a:buNone/>
             </a:pPr>
             <a:r>
+              <a:rPr sz="1400" b="0">
+                <a:solidFill>
+                  <a:srgbClr val="000000"/>
+                </a:solidFill>
+                <a:latin typeface="맑은 고딕"/>
+                <a:ea typeface="맑은 고딕"/>
+              </a:rPr>
+              <a:t>②~④에는 </a:t>
+            </a:r>
+            <a:r>
+              <a:rPr sz="1400" b="1">
+                <a:solidFill>
+                  <a:srgbClr val="000000"/>
+                </a:solidFill>
+                <a:latin typeface="맑은 고딕"/>
+                <a:ea typeface="맑은 고딕"/>
+              </a:rPr>
+              <a:t>질문의 답과 수정 요청</a:t>
+            </a:r>
+            <a:r>
+              <a:rPr sz="1400" b="0">
+                <a:solidFill>
+                  <a:srgbClr val="000000"/>
+                </a:solidFill>
+                <a:latin typeface="맑은 고딕"/>
+                <a:ea typeface="맑은 고딕"/>
+              </a:rPr>
+              <a:t>을 함께 적어 초안을 완성한다.</a:t>
+            </a:r>
+          </a:p>
+        </p:txBody>
+      </p:sp>
+      <p:sp>
+        <p:nvSpPr>
+          <p:cNvPr id="10" name="내용 개체 틀 7">
+            <a:extLst>
+              <a:ext uri="{FF2B5EF4-FFF2-40B4-BE49-F238E27FC236}">
+                <a16:creationId xmlns:a16="http://schemas.microsoft.com/office/drawing/2014/main" id="{BEBA2C4A-B0BF-F2E4-EA6E-614C99CBA184}"/>
+              </a:ext>
+            </a:extLst>
+          </p:cNvPr>
+          <p:cNvSpPr>
+            <a:spLocks noGrp="1"/>
+          </p:cNvSpPr>
+          <p:nvPr>
+            <p:ph idx="1"/>
+          </p:nvPr>
+        </p:nvSpPr>
+        <p:spPr>
+          <a:xfrm>
+            <a:off x="4709160" y="1441450"/>
+            <a:ext cx="4069080" cy="4776470"/>
+          </a:xfrm>
+        </p:spPr>
+        <p:txBody>
+          <a:bodyPr>
+            <a:normAutofit/>
+          </a:bodyPr>
+          <a:lstStyle/>
+          <a:p>
+            <a:pPr lvl="3" marL="981075" indent="-268288">
+              <a:spcBef>
+                <a:spcPts val="300"/>
+              </a:spcBef>
+              <a:spcAft>
+                <a:spcPts val="300"/>
+              </a:spcAft>
+              <a:buFont typeface="+mj-ea"/>
+              <a:buAutoNum type="circleNumDbPlain" startAt="5"/>
+            </a:pPr>
+            <a:r>
               <a:rPr sz="1200" b="0">
                 <a:solidFill>
                   <a:srgbClr val="000000"/>
@@ -22745,7 +22973,7 @@
                 <a:latin typeface="맑은 고딕"/>
                 <a:ea typeface="맑은 고딕"/>
               </a:rPr>
-              <a:t/>
+              <a:t>"합의한 요구사항 정의서를 간결한 </a:t>
             </a:r>
             <a:r>
               <a:rPr sz="1200" b="1">
@@ -22755,7 +22983,7 @@
                 <a:latin typeface="맑은 고딕"/>
                 <a:ea typeface="맑은 고딕"/>
               </a:rPr>
-              <a:t>원천</a:t>
+              <a:t>Markdown 파일</a:t>
             </a:r>
             <a:r>
               <a:rPr sz="1200" b="0">
@@ -22765,17 +22993,7 @@
                 <a:latin typeface="맑은 고딕"/>
                 <a:ea typeface="맑은 고딕"/>
               </a:rPr>
-              <a:t> —</a:t>
-            </a:r>
-            <a:r>
-              <a:rPr sz="1000" b="0">
-                <a:solidFill>
-                  <a:srgbClr val="000000"/>
-                </a:solidFill>
-                <a:latin typeface="맑은 고딕"/>
-                <a:ea typeface="맑은 고딕"/>
-              </a:rPr>
-              <a:t> 용어·규칙·예가 일치하고 모델·설계가 섞이지 않았는가?</a:t>
+              <a:t>로 생성해라. 스토리·기능과 흐름·업무 규칙·용어·품질·수용 기준·범위·제외·미정을 담고 새 정책이나 설계를 추가하지 마라."</a:t>
             </a:r>
           </a:p>
           <a:p>
@@ -22798,6 +23016,289 @@
                 <a:latin typeface="맑은 고딕"/>
                 <a:ea typeface="맑은 고딕"/>
               </a:rPr>
+              <a:t>점검 항목</a:t>
+            </a:r>
+          </a:p>
+          <a:p>
+            <a:pPr lvl="3" marL="1028700" indent="-304800">
+              <a:spcBef>
+                <a:spcPts val="300"/>
+              </a:spcBef>
+              <a:spcAft>
+                <a:spcPts val="300"/>
+              </a:spcAft>
+              <a:buFont typeface="+mj-lt"/>
+              <a:buAutoNum type="arabicPeriod" startAt="1"/>
+            </a:pPr>
+            <a:r>
+              <a:rPr sz="1200" b="0">
+                <a:solidFill>
+                  <a:srgbClr val="000000"/>
+                </a:solidFill>
+                <a:latin typeface="맑은 고딕"/>
+                <a:ea typeface="맑은 고딕"/>
+              </a:rPr>
+              <a:t/>
+            </a:r>
+            <a:r>
+              <a:rPr sz="1200" b="1">
+                <a:solidFill>
+                  <a:srgbClr val="000000"/>
+                </a:solidFill>
+                <a:latin typeface="맑은 고딕"/>
+                <a:ea typeface="맑은 고딕"/>
+              </a:rPr>
+              <a:t>근거</a:t>
+            </a:r>
+            <a:r>
+              <a:rPr sz="1200" b="0">
+                <a:solidFill>
+                  <a:srgbClr val="000000"/>
+                </a:solidFill>
+                <a:latin typeface="맑은 고딕"/>
+                <a:ea typeface="맑은 고딕"/>
+              </a:rPr>
+              <a:t> —</a:t>
+            </a:r>
+            <a:r>
+              <a:rPr sz="1000" b="0">
+                <a:solidFill>
+                  <a:srgbClr val="000000"/>
+                </a:solidFill>
+                <a:latin typeface="맑은 고딕"/>
+                <a:ea typeface="맑은 고딕"/>
+              </a:rPr>
+              <a:t> 실습 1에 없는 정책을 확정했는가?</a:t>
+            </a:r>
+          </a:p>
+          <a:p>
+            <a:pPr lvl="3" marL="1028700" indent="-304800">
+              <a:spcBef>
+                <a:spcPts val="300"/>
+              </a:spcBef>
+              <a:spcAft>
+                <a:spcPts val="300"/>
+              </a:spcAft>
+              <a:buFont typeface="+mj-lt"/>
+              <a:buAutoNum type="arabicPeriod" startAt="2"/>
+            </a:pPr>
+            <a:r>
+              <a:rPr sz="1200" b="0">
+                <a:solidFill>
+                  <a:srgbClr val="000000"/>
+                </a:solidFill>
+                <a:latin typeface="맑은 고딕"/>
+                <a:ea typeface="맑은 고딕"/>
+              </a:rPr>
+              <a:t/>
+            </a:r>
+            <a:r>
+              <a:rPr sz="1200" b="1">
+                <a:solidFill>
+                  <a:srgbClr val="000000"/>
+                </a:solidFill>
+                <a:latin typeface="맑은 고딕"/>
+                <a:ea typeface="맑은 고딕"/>
+              </a:rPr>
+              <a:t>경계</a:t>
+            </a:r>
+            <a:r>
+              <a:rPr sz="1200" b="0">
+                <a:solidFill>
+                  <a:srgbClr val="000000"/>
+                </a:solidFill>
+                <a:latin typeface="맑은 고딕"/>
+                <a:ea typeface="맑은 고딕"/>
+              </a:rPr>
+              <a:t> —</a:t>
+            </a:r>
+            <a:r>
+              <a:rPr sz="1000" b="0">
+                <a:solidFill>
+                  <a:srgbClr val="000000"/>
+                </a:solidFill>
+                <a:latin typeface="맑은 고딕"/>
+                <a:ea typeface="맑은 고딕"/>
+              </a:rPr>
+              <a:t> 범위·제외·미정이 구분되는가?</a:t>
+            </a:r>
+          </a:p>
+          <a:p>
+            <a:pPr lvl="3" marL="1028700" indent="-304800">
+              <a:spcBef>
+                <a:spcPts val="300"/>
+              </a:spcBef>
+              <a:spcAft>
+                <a:spcPts val="300"/>
+              </a:spcAft>
+              <a:buFont typeface="+mj-lt"/>
+              <a:buAutoNum type="arabicPeriod" startAt="3"/>
+            </a:pPr>
+            <a:r>
+              <a:rPr sz="1200" b="0">
+                <a:solidFill>
+                  <a:srgbClr val="000000"/>
+                </a:solidFill>
+                <a:latin typeface="맑은 고딕"/>
+                <a:ea typeface="맑은 고딕"/>
+              </a:rPr>
+              <a:t/>
+            </a:r>
+            <a:r>
+              <a:rPr sz="1200" b="1">
+                <a:solidFill>
+                  <a:srgbClr val="000000"/>
+                </a:solidFill>
+                <a:latin typeface="맑은 고딕"/>
+                <a:ea typeface="맑은 고딕"/>
+              </a:rPr>
+              <a:t>기대값</a:t>
+            </a:r>
+            <a:r>
+              <a:rPr sz="1200" b="0">
+                <a:solidFill>
+                  <a:srgbClr val="000000"/>
+                </a:solidFill>
+                <a:latin typeface="맑은 고딕"/>
+                <a:ea typeface="맑은 고딕"/>
+              </a:rPr>
+              <a:t> —</a:t>
+            </a:r>
+            <a:r>
+              <a:rPr sz="1000" b="0">
+                <a:solidFill>
+                  <a:srgbClr val="000000"/>
+                </a:solidFill>
+                <a:latin typeface="맑은 고딕"/>
+                <a:ea typeface="맑은 고딕"/>
+              </a:rPr>
+              <a:t> 금액·상태·배송 요청으로 확인할 수 있는가?</a:t>
+            </a:r>
+          </a:p>
+          <a:p>
+            <a:pPr lvl="3" marL="1028700" indent="-304800">
+              <a:spcBef>
+                <a:spcPts val="300"/>
+              </a:spcBef>
+              <a:spcAft>
+                <a:spcPts val="300"/>
+              </a:spcAft>
+              <a:buFont typeface="+mj-lt"/>
+              <a:buAutoNum type="arabicPeriod" startAt="4"/>
+            </a:pPr>
+            <a:r>
+              <a:rPr sz="1200" b="0">
+                <a:solidFill>
+                  <a:srgbClr val="000000"/>
+                </a:solidFill>
+                <a:latin typeface="맑은 고딕"/>
+                <a:ea typeface="맑은 고딕"/>
+              </a:rPr>
+              <a:t/>
+            </a:r>
+            <a:r>
+              <a:rPr sz="1200" b="1">
+                <a:solidFill>
+                  <a:srgbClr val="000000"/>
+                </a:solidFill>
+                <a:latin typeface="맑은 고딕"/>
+                <a:ea typeface="맑은 고딕"/>
+              </a:rPr>
+              <a:t>품질</a:t>
+            </a:r>
+            <a:r>
+              <a:rPr sz="1200" b="0">
+                <a:solidFill>
+                  <a:srgbClr val="000000"/>
+                </a:solidFill>
+                <a:latin typeface="맑은 고딕"/>
+                <a:ea typeface="맑은 고딕"/>
+              </a:rPr>
+              <a:t> —</a:t>
+            </a:r>
+            <a:r>
+              <a:rPr sz="1000" b="0">
+                <a:solidFill>
+                  <a:srgbClr val="000000"/>
+                </a:solidFill>
+                <a:latin typeface="맑은 고딕"/>
+                <a:ea typeface="맑은 고딕"/>
+              </a:rPr>
+              <a:t> 시험 조건과 관찰할 결과가 명확한가?</a:t>
+            </a:r>
+          </a:p>
+          <a:p>
+            <a:pPr lvl="3" marL="1028700" indent="-304800">
+              <a:spcBef>
+                <a:spcPts val="300"/>
+              </a:spcBef>
+              <a:spcAft>
+                <a:spcPts val="300"/>
+              </a:spcAft>
+              <a:buFont typeface="+mj-lt"/>
+              <a:buAutoNum type="arabicPeriod" startAt="5"/>
+            </a:pPr>
+            <a:r>
+              <a:rPr sz="1200" b="0">
+                <a:solidFill>
+                  <a:srgbClr val="000000"/>
+                </a:solidFill>
+                <a:latin typeface="맑은 고딕"/>
+                <a:ea typeface="맑은 고딕"/>
+              </a:rPr>
+              <a:t/>
+            </a:r>
+            <a:r>
+              <a:rPr sz="1200" b="1">
+                <a:solidFill>
+                  <a:srgbClr val="000000"/>
+                </a:solidFill>
+                <a:latin typeface="맑은 고딕"/>
+                <a:ea typeface="맑은 고딕"/>
+              </a:rPr>
+              <a:t>원천</a:t>
+            </a:r>
+            <a:r>
+              <a:rPr sz="1200" b="0">
+                <a:solidFill>
+                  <a:srgbClr val="000000"/>
+                </a:solidFill>
+                <a:latin typeface="맑은 고딕"/>
+                <a:ea typeface="맑은 고딕"/>
+              </a:rPr>
+              <a:t> —</a:t>
+            </a:r>
+            <a:r>
+              <a:rPr sz="1000" b="0">
+                <a:solidFill>
+                  <a:srgbClr val="000000"/>
+                </a:solidFill>
+                <a:latin typeface="맑은 고딕"/>
+                <a:ea typeface="맑은 고딕"/>
+              </a:rPr>
+              <a:t> 용어·규칙·예가 일치하고 모델·설계가 섞이지 않았는가?</a:t>
+            </a:r>
+          </a:p>
+          <a:p>
+            <a:pPr lvl="2" marL="723900" indent="-368300">
+              <a:spcBef>
+                <a:spcPts val="300"/>
+              </a:spcBef>
+              <a:spcAft>
+                <a:spcPts val="300"/>
+              </a:spcAft>
+              <a:buSzPct val="90000"/>
+              <a:buFont typeface="Wingdings" pitchFamily="2" charset="2"/>
+              <a:buChar char=""/>
+            </a:pPr>
+            <a:r>
+              <a:rPr sz="1400" b="1">
+                <a:solidFill>
+                  <a:srgbClr val="000000"/>
+                </a:solidFill>
+                <a:latin typeface="맑은 고딕"/>
+                <a:ea typeface="맑은 고딕"/>
+              </a:rPr>
               <a:t>결과물</a:t>
             </a:r>
           </a:p>
@@ -22812,16 +23313,6 @@
               <a:buNone/>
             </a:pPr>
             <a:r>
-              <a:rPr sz="1200" b="1">
-                <a:solidFill>
-                  <a:srgbClr val="000000"/>
-                </a:solidFill>
-                <a:latin typeface="맑은 고딕"/>
-                <a:ea typeface="맑은 고딕"/>
-              </a:rPr>
-              <a:t>요구사항 정의서와 수용 기준의 최종 MD</a:t>
-            </a:r>
-            <a:r>
               <a:rPr sz="1200" b="0">
                 <a:solidFill>
                   <a:srgbClr val="000000"/>
@@ -22829,7 +23320,7 @@
                 <a:latin typeface="맑은 고딕"/>
                 <a:ea typeface="맑은 고딕"/>
               </a:rPr>
-              <a:t>를 저장소의 </a:t>
+              <a:t>주문한다-요구사항-정의서.md</a:t>
             </a:r>
             <a:r>
               <a:rPr sz="1200" b="0">
@@ -22839,17 +23330,57 @@
                 <a:latin typeface="맑은 고딕"/>
                 <a:ea typeface="맑은 고딕"/>
               </a:rPr>
+              <a:t> —</a:t>
+            </a:r>
+            <a:r>
+              <a:rPr sz="1000" b="0">
+                <a:solidFill>
+                  <a:srgbClr val="000000"/>
+                </a:solidFill>
+                <a:latin typeface="맑은 고딕"/>
+                <a:ea typeface="맑은 고딕"/>
+              </a:rPr>
+              <a:t> 수용 기준을 담아 저장소의 </a:t>
+            </a:r>
+            <a:r>
+              <a:rPr sz="1000" b="0">
+                <a:solidFill>
+                  <a:srgbClr val="000000"/>
+                </a:solidFill>
+                <a:latin typeface="맑은 고딕"/>
+                <a:ea typeface="맑은 고딕"/>
+              </a:rPr>
               <a:t>docs</a:t>
             </a:r>
             <a:r>
-              <a:rPr sz="1200" b="0">
-                <a:solidFill>
-                  <a:srgbClr val="000000"/>
-                </a:solidFill>
-                <a:latin typeface="맑은 고딕"/>
-                <a:ea typeface="맑은 고딕"/>
-              </a:rPr>
-              <a:t>에 두고 커밋한다. 실습 4부터 업무 의미를 분석하는 입력으로 읽는다.</a:t>
+              <a:rPr sz="1000" b="0">
+                <a:solidFill>
+                  <a:srgbClr val="000000"/>
+                </a:solidFill>
+                <a:latin typeface="맑은 고딕"/>
+                <a:ea typeface="맑은 고딕"/>
+              </a:rPr>
+              <a:t>에 두고 커밋한다. </a:t>
+            </a:r>
+            <a:r>
+              <a:rPr sz="1000" b="1">
+                <a:solidFill>
+                  <a:srgbClr val="000000"/>
+                </a:solidFill>
+                <a:latin typeface="맑은 고딕"/>
+                <a:ea typeface="맑은 고딕"/>
+              </a:rPr>
+              <a:t>실습 4의 투입물</a:t>
+            </a:r>
+            <a:r>
+              <a:rPr sz="1000" b="0">
+                <a:solidFill>
+                  <a:srgbClr val="000000"/>
+                </a:solidFill>
+                <a:latin typeface="맑은 고딕"/>
+                <a:ea typeface="맑은 고딕"/>
+              </a:rPr>
+              <a:t>이며 그 뒤로도 업무 의미를 분석하는 입력이다</a:t>
             </a:r>
           </a:p>
         </p:txBody>
@@ -23204,7 +23735,7 @@
                 <a:latin typeface="맑은 고딕"/>
                 <a:ea typeface="맑은 고딕"/>
               </a:rPr>
-              <a:t>을 가른다.</a:t>
+              <a:t>을 구분한다.</a:t>
             </a:r>
           </a:p>
           <a:p>
@@ -31750,7 +32281,7 @@
                 <a:latin typeface="맑은 고딕"/>
                 <a:ea typeface="맑은 고딕"/>
               </a:rPr>
-              <a:t>에서 주문 생성 시점과 거절 뒤 처리처럼 결과를 가르는 규칙을 합의한다.</a:t>
+              <a:t>에서 주문 생성 시점과 거절 뒤 처리처럼 결과를 좌우하는 규칙을 합의한다.</a:t>
             </a:r>
           </a:p>
           <a:p>

--- a/courses/ai-native/sessions/s03.pptx
+++ b/courses/ai-native/sessions/s03.pptx
@@ -711,7 +711,7 @@
             <a:pPr lvl="0"/>
             <a:r>
               <a:rPr lang="ko-KR" sz="1200"/>
-              <a:t>네 예는 공통 전제의 업무 규칙 세 가지를 관찰하는 대표 예다. 모든 입력·장애 조합을 검증했다는 뜻이 아니다.</a:t>
+              <a:t>네 예는 공통 전제의 업무 규칙 3가지를 관찰하는 대표 예다. 모든 입력·장애 조합을 검증했다는 뜻이 아니다.</a:t>
             </a:r>
           </a:p>
           <a:p>
@@ -1161,7 +1161,7 @@
             <a:pPr lvl="0"/>
             <a:r>
               <a:rPr lang="ko-KR" sz="1200"/>
-              <a:t>수용 기준 전체의 대표 네 예는 「06. 수용 기준」의 「네 가지 대표 예」에서 확인한다. 문서 예는 거절과 재결제를 한 항목에 이어 적었다.</a:t>
+              <a:t>수용 기준 전체의 대표 네 예는 「06. 수용 기준」의 「4가지 대표 예」에서 확인한다. 문서 예는 거절과 재결제를 한 항목에 이어 적었다.</a:t>
             </a:r>
           </a:p>
         </p:txBody>
@@ -1576,7 +1576,7 @@
             <a:pPr lvl="0"/>
             <a:r>
               <a:rPr lang="ko-KR" sz="1200"/>
-              <a:t>본문 시연은 2026-10 기준이다. 실제 초안은 규칙 세 가지와 질문 15가지를 담았다. 실행일 2026-10-18, Claude Code 2.1.302(claude -p, 도구 없음), claude-opus-5-5. 46.0초·출력 4,668토큰은 그 실행 한 번의 기록이며 이번 작성일의 재실행이 아니다.</a:t>
+              <a:t>본문 시연은 2026-10 기준이다. 실제 초안은 규칙 3가지와 질문 15가지를 담았다. 실행일 2026-10-18, Claude Code 2.1.302(claude -p, 도구 없음), claude-opus-5-5. 46.0초·출력 4,668토큰은 그 실행 한 번의 기록이며 이번 작성일의 재실행이 아니다.</a:t>
             </a:r>
           </a:p>
           <a:p>
@@ -2264,7 +2264,7 @@
             </a:pPr>
             <a:r>
               <a:rPr lang="ko-KR" sz="1200"/>
-              <a:t>    최종 MD를 검토하니 앞서 합의한 구분이 누락됐다. 다음 두 곳을 고쳐 합의 결과의 Markdown 문서 본문 전체를 다시 생성해라. 다른 정책이나 모델·설계를 새로 만들지 마라.</a:t>
+              <a:t>    최종 MD를 검토하니 앞서 합의한 구분이 누락됐다. 다음 2곳을 고쳐 합의 결과의 Markdown 문서 본문 전체를 다시 생성해라. 다른 정책이나 모델·설계를 새로 만들지 마라.</a:t>
             </a:r>
           </a:p>
           <a:p>
@@ -4660,7 +4660,7 @@
                       </a:r>
                     </a:p>
                   </a:txBody>
-                  <a:tcPr marL="6750" marR="6750" marT="6750" marB="0" anchor="ctr">
+                  <a:tcPr marL="6750" marR="6750" marT="6750" marB="6750" anchor="ctr">
                     <a:lnL>
                       <a:noFill/>
                     </a:lnL>
@@ -4722,7 +4722,7 @@
                       </a:r>
                     </a:p>
                   </a:txBody>
-                  <a:tcPr marL="6750" marR="6750" marT="6750" marB="0" anchor="ctr">
+                  <a:tcPr marL="6750" marR="6750" marT="6750" marB="6750" anchor="ctr">
                     <a:lnL w="9525" cap="flat" cmpd="sng" algn="ctr">
                       <a:solidFill>
                         <a:schemeClr val="bg1">
@@ -4792,7 +4792,7 @@
                       </a:r>
                     </a:p>
                   </a:txBody>
-                  <a:tcPr marL="6750" marR="6750" marT="6750" marB="0" anchor="ctr">
+                  <a:tcPr marL="6750" marR="6750" marT="6750" marB="6750" anchor="ctr">
                     <a:lnL w="9525" cap="flat" cmpd="sng" algn="ctr">
                       <a:solidFill>
                         <a:schemeClr val="bg1">
@@ -4864,7 +4864,7 @@
                       </a:r>
                     </a:p>
                   </a:txBody>
-                  <a:tcPr marL="81005" marR="6750" marT="6750" marB="0" anchor="ctr">
+                  <a:tcPr marL="81005" marR="6750" marT="6750" marB="6750" anchor="ctr">
                     <a:lnL>
                       <a:noFill/>
                     </a:lnL>
@@ -4918,7 +4918,7 @@
                       </a:r>
                     </a:p>
                   </a:txBody>
-                  <a:tcPr marL="81005" marR="6750" marT="6750" marB="0" anchor="ctr">
+                  <a:tcPr marL="81005" marR="6750" marT="6750" marB="6750" anchor="ctr">
                     <a:lnL>
                       <a:noFill/>
                     </a:lnL>
@@ -4974,7 +4974,7 @@
                       </a:r>
                     </a:p>
                   </a:txBody>
-                  <a:tcPr marL="81005" marR="6750" marT="6750" marB="0" anchor="ctr">
+                  <a:tcPr marL="81005" marR="6750" marT="6750" marB="6750" anchor="ctr">
                     <a:lnL>
                       <a:noFill/>
                     </a:lnL>
@@ -5032,7 +5032,7 @@
                       </a:r>
                     </a:p>
                   </a:txBody>
-                  <a:tcPr marL="81005" marR="6750" marT="6750" marB="0" anchor="ctr">
+                  <a:tcPr marL="81005" marR="6750" marT="6750" marB="6750" anchor="ctr">
                     <a:lnL>
                       <a:noFill/>
                     </a:lnL>
@@ -5086,7 +5086,7 @@
                       </a:r>
                     </a:p>
                   </a:txBody>
-                  <a:tcPr marL="81005" marR="6750" marT="6750" marB="0" anchor="ctr">
+                  <a:tcPr marL="81005" marR="6750" marT="6750" marB="6750" anchor="ctr">
                     <a:lnL>
                       <a:noFill/>
                     </a:lnL>
@@ -5142,7 +5142,7 @@
                       </a:r>
                     </a:p>
                   </a:txBody>
-                  <a:tcPr marL="81005" marR="6750" marT="6750" marB="0" anchor="ctr">
+                  <a:tcPr marL="81005" marR="6750" marT="6750" marB="6750" anchor="ctr">
                     <a:lnL>
                       <a:noFill/>
                     </a:lnL>
@@ -5200,7 +5200,7 @@
                       </a:r>
                     </a:p>
                   </a:txBody>
-                  <a:tcPr marL="81005" marR="6750" marT="6750" marB="0" anchor="ctr">
+                  <a:tcPr marL="81005" marR="6750" marT="6750" marB="6750" anchor="ctr">
                     <a:lnL>
                       <a:noFill/>
                     </a:lnL>
@@ -5254,7 +5254,7 @@
                       </a:r>
                     </a:p>
                   </a:txBody>
-                  <a:tcPr marL="81005" marR="6750" marT="6750" marB="0" anchor="ctr">
+                  <a:tcPr marL="81005" marR="6750" marT="6750" marB="6750" anchor="ctr">
                     <a:lnL>
                       <a:noFill/>
                     </a:lnL>
@@ -5310,7 +5310,7 @@
                       </a:r>
                     </a:p>
                   </a:txBody>
-                  <a:tcPr marL="81005" marR="6750" marT="6750" marB="0" anchor="ctr">
+                  <a:tcPr marL="81005" marR="6750" marT="6750" marB="6750" anchor="ctr">
                     <a:lnL>
                       <a:noFill/>
                     </a:lnL>
@@ -5916,7 +5916,7 @@
                       </a:r>
                     </a:p>
                   </a:txBody>
-                  <a:tcPr marL="6750" marR="6750" marT="6750" marB="0" anchor="ctr">
+                  <a:tcPr marL="6750" marR="6750" marT="6750" marB="6750" anchor="ctr">
                     <a:lnL>
                       <a:noFill/>
                     </a:lnL>
@@ -5978,7 +5978,7 @@
                       </a:r>
                     </a:p>
                   </a:txBody>
-                  <a:tcPr marL="6750" marR="6750" marT="6750" marB="0" anchor="ctr">
+                  <a:tcPr marL="6750" marR="6750" marT="6750" marB="6750" anchor="ctr">
                     <a:lnL w="9525" cap="flat" cmpd="sng" algn="ctr">
                       <a:solidFill>
                         <a:schemeClr val="bg1">
@@ -6050,7 +6050,7 @@
                       </a:r>
                     </a:p>
                   </a:txBody>
-                  <a:tcPr marL="81005" marR="6750" marT="6750" marB="0" anchor="ctr">
+                  <a:tcPr marL="81005" marR="6750" marT="6750" marB="6750" anchor="ctr">
                     <a:lnL>
                       <a:noFill/>
                     </a:lnL>
@@ -6104,7 +6104,7 @@
                       </a:r>
                     </a:p>
                   </a:txBody>
-                  <a:tcPr marL="81005" marR="6750" marT="6750" marB="0" anchor="ctr">
+                  <a:tcPr marL="81005" marR="6750" marT="6750" marB="6750" anchor="ctr">
                     <a:lnL>
                       <a:noFill/>
                     </a:lnL>
@@ -6162,7 +6162,7 @@
                       </a:r>
                     </a:p>
                   </a:txBody>
-                  <a:tcPr marL="81005" marR="6750" marT="6750" marB="0" anchor="ctr">
+                  <a:tcPr marL="81005" marR="6750" marT="6750" marB="6750" anchor="ctr">
                     <a:lnL>
                       <a:noFill/>
                     </a:lnL>
@@ -6216,7 +6216,7 @@
                       </a:r>
                     </a:p>
                   </a:txBody>
-                  <a:tcPr marL="81005" marR="6750" marT="6750" marB="0" anchor="ctr">
+                  <a:tcPr marL="81005" marR="6750" marT="6750" marB="6750" anchor="ctr">
                     <a:lnL>
                       <a:noFill/>
                     </a:lnL>
@@ -6274,7 +6274,7 @@
                       </a:r>
                     </a:p>
                   </a:txBody>
-                  <a:tcPr marL="81005" marR="6750" marT="6750" marB="0" anchor="ctr">
+                  <a:tcPr marL="81005" marR="6750" marT="6750" marB="6750" anchor="ctr">
                     <a:lnL>
                       <a:noFill/>
                     </a:lnL>
@@ -6328,7 +6328,7 @@
                       </a:r>
                     </a:p>
                   </a:txBody>
-                  <a:tcPr marL="81005" marR="6750" marT="6750" marB="0" anchor="ctr">
+                  <a:tcPr marL="81005" marR="6750" marT="6750" marB="6750" anchor="ctr">
                     <a:lnL>
                       <a:noFill/>
                     </a:lnL>
@@ -7030,7 +7030,7 @@
                 <a:latin typeface="맑은 고딕"/>
                 <a:ea typeface="맑은 고딕"/>
               </a:rPr>
-              <a:t> 충족 여부를 증명·측정할 수 있게 썼는가?</a:t>
+              <a:t> 충족 여부를 증명·측정할 수 있게 작성했는가?</a:t>
             </a:r>
           </a:p>
           <a:p>
@@ -7073,7 +7073,7 @@
                 <a:latin typeface="맑은 고딕"/>
                 <a:ea typeface="맑은 고딕"/>
               </a:rPr>
-              <a:t> 하나로만 해석되게 썼는가?</a:t>
+              <a:t> 하나로만 해석되게 작성했는가?</a:t>
             </a:r>
           </a:p>
           <a:p>
@@ -7186,7 +7186,7 @@
                 <a:latin typeface="맑은 고딕"/>
                 <a:ea typeface="맑은 고딕"/>
               </a:rPr>
-              <a:t>네 가지 대표 예</a:t>
+              <a:t>4가지 대표 예</a:t>
             </a:r>
           </a:p>
           <a:p>
@@ -7337,7 +7337,7 @@
                       </a:r>
                     </a:p>
                   </a:txBody>
-                  <a:tcPr marL="6750" marR="6750" marT="6750" marB="0" anchor="ctr">
+                  <a:tcPr marL="6750" marR="6750" marT="6750" marB="6750" anchor="ctr">
                     <a:lnL>
                       <a:noFill/>
                     </a:lnL>
@@ -7399,7 +7399,7 @@
                       </a:r>
                     </a:p>
                   </a:txBody>
-                  <a:tcPr marL="6750" marR="6750" marT="6750" marB="0" anchor="ctr">
+                  <a:tcPr marL="6750" marR="6750" marT="6750" marB="6750" anchor="ctr">
                     <a:lnL w="9525" cap="flat" cmpd="sng" algn="ctr">
                       <a:solidFill>
                         <a:schemeClr val="bg1">
@@ -7469,7 +7469,7 @@
                       </a:r>
                     </a:p>
                   </a:txBody>
-                  <a:tcPr marL="6750" marR="6750" marT="6750" marB="0" anchor="ctr">
+                  <a:tcPr marL="6750" marR="6750" marT="6750" marB="6750" anchor="ctr">
                     <a:lnL w="9525" cap="flat" cmpd="sng" algn="ctr">
                       <a:solidFill>
                         <a:schemeClr val="bg1">
@@ -7541,7 +7541,7 @@
                       </a:r>
                     </a:p>
                   </a:txBody>
-                  <a:tcPr marL="81005" marR="6750" marT="6750" marB="0" anchor="ctr">
+                  <a:tcPr marL="81005" marR="6750" marT="6750" marB="6750" anchor="ctr">
                     <a:lnL>
                       <a:noFill/>
                     </a:lnL>
@@ -7595,7 +7595,7 @@
                       </a:r>
                     </a:p>
                   </a:txBody>
-                  <a:tcPr marL="81005" marR="6750" marT="6750" marB="0" anchor="ctr">
+                  <a:tcPr marL="81005" marR="6750" marT="6750" marB="6750" anchor="ctr">
                     <a:lnL>
                       <a:noFill/>
                     </a:lnL>
@@ -7651,7 +7651,7 @@
                       </a:r>
                     </a:p>
                   </a:txBody>
-                  <a:tcPr marL="81005" marR="6750" marT="6750" marB="0" anchor="ctr">
+                  <a:tcPr marL="81005" marR="6750" marT="6750" marB="6750" anchor="ctr">
                     <a:lnL>
                       <a:noFill/>
                     </a:lnL>
@@ -7709,7 +7709,7 @@
                       </a:r>
                     </a:p>
                   </a:txBody>
-                  <a:tcPr marL="81005" marR="6750" marT="6750" marB="0" anchor="ctr">
+                  <a:tcPr marL="81005" marR="6750" marT="6750" marB="6750" anchor="ctr">
                     <a:lnL>
                       <a:noFill/>
                     </a:lnL>
@@ -7763,7 +7763,7 @@
                       </a:r>
                     </a:p>
                   </a:txBody>
-                  <a:tcPr marL="81005" marR="6750" marT="6750" marB="0" anchor="ctr">
+                  <a:tcPr marL="81005" marR="6750" marT="6750" marB="6750" anchor="ctr">
                     <a:lnL>
                       <a:noFill/>
                     </a:lnL>
@@ -7819,7 +7819,7 @@
                       </a:r>
                     </a:p>
                   </a:txBody>
-                  <a:tcPr marL="81005" marR="6750" marT="6750" marB="0" anchor="ctr">
+                  <a:tcPr marL="81005" marR="6750" marT="6750" marB="6750" anchor="ctr">
                     <a:lnL>
                       <a:noFill/>
                     </a:lnL>
@@ -7877,7 +7877,7 @@
                       </a:r>
                     </a:p>
                   </a:txBody>
-                  <a:tcPr marL="81005" marR="6750" marT="6750" marB="0" anchor="ctr">
+                  <a:tcPr marL="81005" marR="6750" marT="6750" marB="6750" anchor="ctr">
                     <a:lnL>
                       <a:noFill/>
                     </a:lnL>
@@ -7931,7 +7931,7 @@
                       </a:r>
                     </a:p>
                   </a:txBody>
-                  <a:tcPr marL="81005" marR="6750" marT="6750" marB="0" anchor="ctr">
+                  <a:tcPr marL="81005" marR="6750" marT="6750" marB="6750" anchor="ctr">
                     <a:lnL>
                       <a:noFill/>
                     </a:lnL>
@@ -7987,7 +7987,7 @@
                       </a:r>
                     </a:p>
                   </a:txBody>
-                  <a:tcPr marL="81005" marR="6750" marT="6750" marB="0" anchor="ctr">
+                  <a:tcPr marL="81005" marR="6750" marT="6750" marB="6750" anchor="ctr">
                     <a:lnL>
                       <a:noFill/>
                     </a:lnL>
@@ -8045,7 +8045,7 @@
                       </a:r>
                     </a:p>
                   </a:txBody>
-                  <a:tcPr marL="81005" marR="6750" marT="6750" marB="0" anchor="ctr">
+                  <a:tcPr marL="81005" marR="6750" marT="6750" marB="6750" anchor="ctr">
                     <a:lnL>
                       <a:noFill/>
                     </a:lnL>
@@ -8099,7 +8099,7 @@
                       </a:r>
                     </a:p>
                   </a:txBody>
-                  <a:tcPr marL="81005" marR="6750" marT="6750" marB="0" anchor="ctr">
+                  <a:tcPr marL="81005" marR="6750" marT="6750" marB="6750" anchor="ctr">
                     <a:lnL>
                       <a:noFill/>
                     </a:lnL>
@@ -8155,7 +8155,7 @@
                       </a:r>
                     </a:p>
                   </a:txBody>
-                  <a:tcPr marL="81005" marR="6750" marT="6750" marB="0" anchor="ctr">
+                  <a:tcPr marL="81005" marR="6750" marT="6750" marB="6750" anchor="ctr">
                     <a:lnL>
                       <a:noFill/>
                     </a:lnL>
@@ -8373,7 +8373,7 @@
                 <a:latin typeface="맑은 고딕"/>
                 <a:ea typeface="맑은 고딕"/>
               </a:rPr>
-              <a:t>주문의 수용 예 네 가지</a:t>
+              <a:t>주문의 수용 예 4가지</a:t>
             </a:r>
           </a:p>
         </p:txBody>
@@ -8435,7 +8435,7 @@
                 <a:latin typeface="맑은 고딕"/>
                 <a:ea typeface="맑은 고딕"/>
               </a:rPr>
-              <a:t>를 고정한다. 배송지 서울을 확정할 때 주문이 생기고 금액 2,000원이 정해진다.</a:t>
+              <a:t>를 고정한다. 배송지 서울을 확정할 때 주문이 생기고 금액 2,000원이 결정된다.</a:t>
             </a:r>
           </a:p>
           <a:p>
@@ -8998,7 +8998,7 @@
                 <a:latin typeface="맑은 고딕"/>
                 <a:ea typeface="맑은 고딕"/>
               </a:rPr>
-              <a:t>은 협업 방식이다. Gherkin 문법이나 특정 테스트 도구를 쓴다는 사실만으로 완성되지 않는다.</a:t>
+              <a:t>은 협업 방식이다. Gherkin 문법이나 특정 테스트 도구를 사용한다는 사실만으로 완성되지 않는다.</a:t>
             </a:r>
           </a:p>
         </p:txBody>
@@ -10514,7 +10514,7 @@
                       </a:r>
                     </a:p>
                   </a:txBody>
-                  <a:tcPr marL="6750" marR="6750" marT="6750" marB="0" anchor="ctr">
+                  <a:tcPr marL="6750" marR="6750" marT="6750" marB="6750" anchor="ctr">
                     <a:lnL>
                       <a:noFill/>
                     </a:lnL>
@@ -10576,7 +10576,7 @@
                       </a:r>
                     </a:p>
                   </a:txBody>
-                  <a:tcPr marL="6750" marR="6750" marT="6750" marB="0" anchor="ctr">
+                  <a:tcPr marL="6750" marR="6750" marT="6750" marB="6750" anchor="ctr">
                     <a:lnL w="9525" cap="flat" cmpd="sng" algn="ctr">
                       <a:solidFill>
                         <a:schemeClr val="bg1">
@@ -10646,7 +10646,7 @@
                       </a:r>
                     </a:p>
                   </a:txBody>
-                  <a:tcPr marL="6750" marR="6750" marT="6750" marB="0" anchor="ctr">
+                  <a:tcPr marL="6750" marR="6750" marT="6750" marB="6750" anchor="ctr">
                     <a:lnL w="9525" cap="flat" cmpd="sng" algn="ctr">
                       <a:solidFill>
                         <a:schemeClr val="bg1">
@@ -10718,7 +10718,7 @@
                       </a:r>
                     </a:p>
                   </a:txBody>
-                  <a:tcPr marL="81005" marR="6750" marT="6750" marB="0" anchor="ctr">
+                  <a:tcPr marL="81005" marR="6750" marT="6750" marB="6750" anchor="ctr">
                     <a:lnL>
                       <a:noFill/>
                     </a:lnL>
@@ -10772,7 +10772,7 @@
                       </a:r>
                     </a:p>
                   </a:txBody>
-                  <a:tcPr marL="81005" marR="6750" marT="6750" marB="0" anchor="ctr">
+                  <a:tcPr marL="81005" marR="6750" marT="6750" marB="6750" anchor="ctr">
                     <a:lnL>
                       <a:noFill/>
                     </a:lnL>
@@ -10828,7 +10828,7 @@
                       </a:r>
                     </a:p>
                   </a:txBody>
-                  <a:tcPr marL="81005" marR="6750" marT="6750" marB="0" anchor="ctr">
+                  <a:tcPr marL="81005" marR="6750" marT="6750" marB="6750" anchor="ctr">
                     <a:lnL>
                       <a:noFill/>
                     </a:lnL>
@@ -10886,7 +10886,7 @@
                       </a:r>
                     </a:p>
                   </a:txBody>
-                  <a:tcPr marL="81005" marR="6750" marT="6750" marB="0" anchor="ctr">
+                  <a:tcPr marL="81005" marR="6750" marT="6750" marB="6750" anchor="ctr">
                     <a:lnL>
                       <a:noFill/>
                     </a:lnL>
@@ -10940,7 +10940,7 @@
                       </a:r>
                     </a:p>
                   </a:txBody>
-                  <a:tcPr marL="81005" marR="6750" marT="6750" marB="0" anchor="ctr">
+                  <a:tcPr marL="81005" marR="6750" marT="6750" marB="6750" anchor="ctr">
                     <a:lnL>
                       <a:noFill/>
                     </a:lnL>
@@ -10996,7 +10996,7 @@
                       </a:r>
                     </a:p>
                   </a:txBody>
-                  <a:tcPr marL="81005" marR="6750" marT="6750" marB="0" anchor="ctr">
+                  <a:tcPr marL="81005" marR="6750" marT="6750" marB="6750" anchor="ctr">
                     <a:lnL>
                       <a:noFill/>
                     </a:lnL>
@@ -11054,7 +11054,7 @@
                       </a:r>
                     </a:p>
                   </a:txBody>
-                  <a:tcPr marL="81005" marR="6750" marT="6750" marB="0" anchor="ctr">
+                  <a:tcPr marL="81005" marR="6750" marT="6750" marB="6750" anchor="ctr">
                     <a:lnL>
                       <a:noFill/>
                     </a:lnL>
@@ -11108,7 +11108,7 @@
                       </a:r>
                     </a:p>
                   </a:txBody>
-                  <a:tcPr marL="81005" marR="6750" marT="6750" marB="0" anchor="ctr">
+                  <a:tcPr marL="81005" marR="6750" marT="6750" marB="6750" anchor="ctr">
                     <a:lnL>
                       <a:noFill/>
                     </a:lnL>
@@ -11164,7 +11164,7 @@
                       </a:r>
                     </a:p>
                   </a:txBody>
-                  <a:tcPr marL="81005" marR="6750" marT="6750" marB="0" anchor="ctr">
+                  <a:tcPr marL="81005" marR="6750" marT="6750" marB="6750" anchor="ctr">
                     <a:lnL>
                       <a:noFill/>
                     </a:lnL>
@@ -11775,7 +11775,7 @@
                       </a:r>
                     </a:p>
                   </a:txBody>
-                  <a:tcPr marL="6750" marR="6750" marT="6750" marB="0" anchor="ctr">
+                  <a:tcPr marL="6750" marR="6750" marT="6750" marB="6750" anchor="ctr">
                     <a:lnL>
                       <a:noFill/>
                     </a:lnL>
@@ -11837,7 +11837,7 @@
                       </a:r>
                     </a:p>
                   </a:txBody>
-                  <a:tcPr marL="6750" marR="6750" marT="6750" marB="0" anchor="ctr">
+                  <a:tcPr marL="6750" marR="6750" marT="6750" marB="6750" anchor="ctr">
                     <a:lnL w="9525" cap="flat" cmpd="sng" algn="ctr">
                       <a:solidFill>
                         <a:schemeClr val="bg1">
@@ -11907,7 +11907,7 @@
                       </a:r>
                     </a:p>
                   </a:txBody>
-                  <a:tcPr marL="6750" marR="6750" marT="6750" marB="0" anchor="ctr">
+                  <a:tcPr marL="6750" marR="6750" marT="6750" marB="6750" anchor="ctr">
                     <a:lnL w="9525" cap="flat" cmpd="sng" algn="ctr">
                       <a:solidFill>
                         <a:schemeClr val="bg1">
@@ -11977,7 +11977,7 @@
                       </a:r>
                     </a:p>
                   </a:txBody>
-                  <a:tcPr marL="6750" marR="6750" marT="6750" marB="0" anchor="ctr">
+                  <a:tcPr marL="6750" marR="6750" marT="6750" marB="6750" anchor="ctr">
                     <a:lnL w="9525" cap="flat" cmpd="sng" algn="ctr">
                       <a:solidFill>
                         <a:schemeClr val="bg1">
@@ -12049,7 +12049,7 @@
                       </a:r>
                     </a:p>
                   </a:txBody>
-                  <a:tcPr marL="81005" marR="6750" marT="6750" marB="0" anchor="ctr">
+                  <a:tcPr marL="81005" marR="6750" marT="6750" marB="6750" anchor="ctr">
                     <a:lnL>
                       <a:noFill/>
                     </a:lnL>
@@ -12103,7 +12103,7 @@
                       </a:r>
                     </a:p>
                   </a:txBody>
-                  <a:tcPr marL="81005" marR="6750" marT="6750" marB="0" anchor="ctr">
+                  <a:tcPr marL="81005" marR="6750" marT="6750" marB="6750" anchor="ctr">
                     <a:lnL>
                       <a:noFill/>
                     </a:lnL>
@@ -12159,7 +12159,7 @@
                       </a:r>
                     </a:p>
                   </a:txBody>
-                  <a:tcPr marL="81005" marR="6750" marT="6750" marB="0" anchor="ctr">
+                  <a:tcPr marL="81005" marR="6750" marT="6750" marB="6750" anchor="ctr">
                     <a:lnL>
                       <a:noFill/>
                     </a:lnL>
@@ -12215,7 +12215,7 @@
                       </a:r>
                     </a:p>
                   </a:txBody>
-                  <a:tcPr marL="81005" marR="6750" marT="6750" marB="0" anchor="ctr">
+                  <a:tcPr marL="81005" marR="6750" marT="6750" marB="6750" anchor="ctr">
                     <a:lnL>
                       <a:noFill/>
                     </a:lnL>
@@ -12273,7 +12273,7 @@
                       </a:r>
                     </a:p>
                   </a:txBody>
-                  <a:tcPr marL="81005" marR="6750" marT="6750" marB="0" anchor="ctr">
+                  <a:tcPr marL="81005" marR="6750" marT="6750" marB="6750" anchor="ctr">
                     <a:lnL>
                       <a:noFill/>
                     </a:lnL>
@@ -12327,7 +12327,7 @@
                       </a:r>
                     </a:p>
                   </a:txBody>
-                  <a:tcPr marL="81005" marR="6750" marT="6750" marB="0" anchor="ctr">
+                  <a:tcPr marL="81005" marR="6750" marT="6750" marB="6750" anchor="ctr">
                     <a:lnL>
                       <a:noFill/>
                     </a:lnL>
@@ -12383,7 +12383,7 @@
                       </a:r>
                     </a:p>
                   </a:txBody>
-                  <a:tcPr marL="81005" marR="6750" marT="6750" marB="0" anchor="ctr">
+                  <a:tcPr marL="81005" marR="6750" marT="6750" marB="6750" anchor="ctr">
                     <a:lnL>
                       <a:noFill/>
                     </a:lnL>
@@ -12439,7 +12439,7 @@
                       </a:r>
                     </a:p>
                   </a:txBody>
-                  <a:tcPr marL="81005" marR="6750" marT="6750" marB="0" anchor="ctr">
+                  <a:tcPr marL="81005" marR="6750" marT="6750" marB="6750" anchor="ctr">
                     <a:lnL>
                       <a:noFill/>
                     </a:lnL>
@@ -14159,7 +14159,7 @@
                 <a:latin typeface="맑은 고딕"/>
                 <a:ea typeface="맑은 고딕"/>
               </a:rPr>
-              <a:t>으로 쓴다.</a:t>
+              <a:t>으로 작성한다.</a:t>
             </a:r>
           </a:p>
           <a:p>
@@ -14331,7 +14331,7 @@
                 <a:latin typeface="맑은 고딕"/>
                 <a:ea typeface="맑은 고딕"/>
               </a:rPr>
-              <a:t>로 쓴다.</a:t>
+              <a:t>로 작성한다.</a:t>
             </a:r>
           </a:p>
           <a:p>
@@ -15088,7 +15088,7 @@
                       </a:r>
                     </a:p>
                   </a:txBody>
-                  <a:tcPr marL="6750" marR="6750" marT="6750" marB="0" anchor="ctr">
+                  <a:tcPr marL="6750" marR="6750" marT="6750" marB="6750" anchor="ctr">
                     <a:lnL>
                       <a:noFill/>
                     </a:lnL>
@@ -15150,7 +15150,7 @@
                       </a:r>
                     </a:p>
                   </a:txBody>
-                  <a:tcPr marL="6750" marR="6750" marT="6750" marB="0" anchor="ctr">
+                  <a:tcPr marL="6750" marR="6750" marT="6750" marB="6750" anchor="ctr">
                     <a:lnL w="9525" cap="flat" cmpd="sng" algn="ctr">
                       <a:solidFill>
                         <a:schemeClr val="bg1">
@@ -15220,7 +15220,7 @@
                       </a:r>
                     </a:p>
                   </a:txBody>
-                  <a:tcPr marL="6750" marR="6750" marT="6750" marB="0" anchor="ctr">
+                  <a:tcPr marL="6750" marR="6750" marT="6750" marB="6750" anchor="ctr">
                     <a:lnL w="9525" cap="flat" cmpd="sng" algn="ctr">
                       <a:solidFill>
                         <a:schemeClr val="bg1">
@@ -15292,7 +15292,7 @@
                       </a:r>
                     </a:p>
                   </a:txBody>
-                  <a:tcPr marL="81005" marR="6750" marT="6750" marB="0" anchor="ctr">
+                  <a:tcPr marL="81005" marR="6750" marT="6750" marB="6750" anchor="ctr">
                     <a:lnL>
                       <a:noFill/>
                     </a:lnL>
@@ -15346,7 +15346,7 @@
                       </a:r>
                     </a:p>
                   </a:txBody>
-                  <a:tcPr marL="81005" marR="6750" marT="6750" marB="0" anchor="ctr">
+                  <a:tcPr marL="81005" marR="6750" marT="6750" marB="6750" anchor="ctr">
                     <a:lnL>
                       <a:noFill/>
                     </a:lnL>
@@ -15402,7 +15402,7 @@
                       </a:r>
                     </a:p>
                   </a:txBody>
-                  <a:tcPr marL="81005" marR="6750" marT="6750" marB="0" anchor="ctr">
+                  <a:tcPr marL="81005" marR="6750" marT="6750" marB="6750" anchor="ctr">
                     <a:lnL>
                       <a:noFill/>
                     </a:lnL>
@@ -15460,7 +15460,7 @@
                       </a:r>
                     </a:p>
                   </a:txBody>
-                  <a:tcPr marL="81005" marR="6750" marT="6750" marB="0" anchor="ctr">
+                  <a:tcPr marL="81005" marR="6750" marT="6750" marB="6750" anchor="ctr">
                     <a:lnL>
                       <a:noFill/>
                     </a:lnL>
@@ -15514,7 +15514,7 @@
                       </a:r>
                     </a:p>
                   </a:txBody>
-                  <a:tcPr marL="81005" marR="6750" marT="6750" marB="0" anchor="ctr">
+                  <a:tcPr marL="81005" marR="6750" marT="6750" marB="6750" anchor="ctr">
                     <a:lnL>
                       <a:noFill/>
                     </a:lnL>
@@ -15570,7 +15570,7 @@
                       </a:r>
                     </a:p>
                   </a:txBody>
-                  <a:tcPr marL="81005" marR="6750" marT="6750" marB="0" anchor="ctr">
+                  <a:tcPr marL="81005" marR="6750" marT="6750" marB="6750" anchor="ctr">
                     <a:lnL>
                       <a:noFill/>
                     </a:lnL>
@@ -15628,7 +15628,7 @@
                       </a:r>
                     </a:p>
                   </a:txBody>
-                  <a:tcPr marL="81005" marR="6750" marT="6750" marB="0" anchor="ctr">
+                  <a:tcPr marL="81005" marR="6750" marT="6750" marB="6750" anchor="ctr">
                     <a:lnL>
                       <a:noFill/>
                     </a:lnL>
@@ -15682,7 +15682,7 @@
                       </a:r>
                     </a:p>
                   </a:txBody>
-                  <a:tcPr marL="81005" marR="6750" marT="6750" marB="0" anchor="ctr">
+                  <a:tcPr marL="81005" marR="6750" marT="6750" marB="6750" anchor="ctr">
                     <a:lnL>
                       <a:noFill/>
                     </a:lnL>
@@ -15738,7 +15738,7 @@
                       </a:r>
                     </a:p>
                   </a:txBody>
-                  <a:tcPr marL="81005" marR="6750" marT="6750" marB="0" anchor="ctr">
+                  <a:tcPr marL="81005" marR="6750" marT="6750" marB="6750" anchor="ctr">
                     <a:lnL>
                       <a:noFill/>
                     </a:lnL>
@@ -15796,7 +15796,7 @@
                       </a:r>
                     </a:p>
                   </a:txBody>
-                  <a:tcPr marL="81005" marR="6750" marT="6750" marB="0" anchor="ctr">
+                  <a:tcPr marL="81005" marR="6750" marT="6750" marB="6750" anchor="ctr">
                     <a:lnL>
                       <a:noFill/>
                     </a:lnL>
@@ -15850,7 +15850,7 @@
                       </a:r>
                     </a:p>
                   </a:txBody>
-                  <a:tcPr marL="81005" marR="6750" marT="6750" marB="0" anchor="ctr">
+                  <a:tcPr marL="81005" marR="6750" marT="6750" marB="6750" anchor="ctr">
                     <a:lnL>
                       <a:noFill/>
                     </a:lnL>
@@ -15906,7 +15906,7 @@
                       </a:r>
                     </a:p>
                   </a:txBody>
-                  <a:tcPr marL="81005" marR="6750" marT="6750" marB="0" anchor="ctr">
+                  <a:tcPr marL="81005" marR="6750" marT="6750" marB="6750" anchor="ctr">
                     <a:lnL>
                       <a:noFill/>
                     </a:lnL>
@@ -15964,7 +15964,7 @@
                       </a:r>
                     </a:p>
                   </a:txBody>
-                  <a:tcPr marL="81005" marR="6750" marT="6750" marB="0" anchor="ctr">
+                  <a:tcPr marL="81005" marR="6750" marT="6750" marB="6750" anchor="ctr">
                     <a:lnL>
                       <a:noFill/>
                     </a:lnL>
@@ -16018,7 +16018,7 @@
                       </a:r>
                     </a:p>
                   </a:txBody>
-                  <a:tcPr marL="81005" marR="6750" marT="6750" marB="0" anchor="ctr">
+                  <a:tcPr marL="81005" marR="6750" marT="6750" marB="6750" anchor="ctr">
                     <a:lnL>
                       <a:noFill/>
                     </a:lnL>
@@ -16074,7 +16074,7 @@
                       </a:r>
                     </a:p>
                   </a:txBody>
-                  <a:tcPr marL="81005" marR="6750" marT="6750" marB="0" anchor="ctr">
+                  <a:tcPr marL="81005" marR="6750" marT="6750" marB="6750" anchor="ctr">
                     <a:lnL>
                       <a:noFill/>
                     </a:lnL>
@@ -16616,7 +16616,7 @@
                       </a:r>
                     </a:p>
                   </a:txBody>
-                  <a:tcPr marL="6750" marR="6750" marT="6750" marB="0" anchor="ctr">
+                  <a:tcPr marL="6750" marR="6750" marT="6750" marB="6750" anchor="ctr">
                     <a:lnL>
                       <a:noFill/>
                     </a:lnL>
@@ -16678,7 +16678,7 @@
                       </a:r>
                     </a:p>
                   </a:txBody>
-                  <a:tcPr marL="6750" marR="6750" marT="6750" marB="0" anchor="ctr">
+                  <a:tcPr marL="6750" marR="6750" marT="6750" marB="6750" anchor="ctr">
                     <a:lnL w="9525" cap="flat" cmpd="sng" algn="ctr">
                       <a:solidFill>
                         <a:schemeClr val="bg1">
@@ -16748,7 +16748,7 @@
                       </a:r>
                     </a:p>
                   </a:txBody>
-                  <a:tcPr marL="6750" marR="6750" marT="6750" marB="0" anchor="ctr">
+                  <a:tcPr marL="6750" marR="6750" marT="6750" marB="6750" anchor="ctr">
                     <a:lnL w="9525" cap="flat" cmpd="sng" algn="ctr">
                       <a:solidFill>
                         <a:schemeClr val="bg1">
@@ -16820,7 +16820,7 @@
                       </a:r>
                     </a:p>
                   </a:txBody>
-                  <a:tcPr marL="81005" marR="6750" marT="6750" marB="0" anchor="ctr">
+                  <a:tcPr marL="81005" marR="6750" marT="6750" marB="6750" anchor="ctr">
                     <a:lnL>
                       <a:noFill/>
                     </a:lnL>
@@ -16874,7 +16874,7 @@
                       </a:r>
                     </a:p>
                   </a:txBody>
-                  <a:tcPr marL="81005" marR="6750" marT="6750" marB="0" anchor="ctr">
+                  <a:tcPr marL="81005" marR="6750" marT="6750" marB="6750" anchor="ctr">
                     <a:lnL>
                       <a:noFill/>
                     </a:lnL>
@@ -16930,7 +16930,7 @@
                       </a:r>
                     </a:p>
                   </a:txBody>
-                  <a:tcPr marL="81005" marR="6750" marT="6750" marB="0" anchor="ctr">
+                  <a:tcPr marL="81005" marR="6750" marT="6750" marB="6750" anchor="ctr">
                     <a:lnL>
                       <a:noFill/>
                     </a:lnL>
@@ -16988,7 +16988,7 @@
                       </a:r>
                     </a:p>
                   </a:txBody>
-                  <a:tcPr marL="81005" marR="6750" marT="6750" marB="0" anchor="ctr">
+                  <a:tcPr marL="81005" marR="6750" marT="6750" marB="6750" anchor="ctr">
                     <a:lnL>
                       <a:noFill/>
                     </a:lnL>
@@ -17042,7 +17042,7 @@
                       </a:r>
                     </a:p>
                   </a:txBody>
-                  <a:tcPr marL="81005" marR="6750" marT="6750" marB="0" anchor="ctr">
+                  <a:tcPr marL="81005" marR="6750" marT="6750" marB="6750" anchor="ctr">
                     <a:lnL>
                       <a:noFill/>
                     </a:lnL>
@@ -17098,7 +17098,7 @@
                       </a:r>
                     </a:p>
                   </a:txBody>
-                  <a:tcPr marL="81005" marR="6750" marT="6750" marB="0" anchor="ctr">
+                  <a:tcPr marL="81005" marR="6750" marT="6750" marB="6750" anchor="ctr">
                     <a:lnL>
                       <a:noFill/>
                     </a:lnL>
@@ -17156,7 +17156,7 @@
                       </a:r>
                     </a:p>
                   </a:txBody>
-                  <a:tcPr marL="81005" marR="6750" marT="6750" marB="0" anchor="ctr">
+                  <a:tcPr marL="81005" marR="6750" marT="6750" marB="6750" anchor="ctr">
                     <a:lnL>
                       <a:noFill/>
                     </a:lnL>
@@ -17210,7 +17210,7 @@
                       </a:r>
                     </a:p>
                   </a:txBody>
-                  <a:tcPr marL="81005" marR="6750" marT="6750" marB="0" anchor="ctr">
+                  <a:tcPr marL="81005" marR="6750" marT="6750" marB="6750" anchor="ctr">
                     <a:lnL>
                       <a:noFill/>
                     </a:lnL>
@@ -17266,7 +17266,7 @@
                       </a:r>
                     </a:p>
                   </a:txBody>
-                  <a:tcPr marL="81005" marR="6750" marT="6750" marB="0" anchor="ctr">
+                  <a:tcPr marL="81005" marR="6750" marT="6750" marB="6750" anchor="ctr">
                     <a:lnL>
                       <a:noFill/>
                     </a:lnL>
@@ -17324,7 +17324,7 @@
                       </a:r>
                     </a:p>
                   </a:txBody>
-                  <a:tcPr marL="81005" marR="6750" marT="6750" marB="0" anchor="ctr">
+                  <a:tcPr marL="81005" marR="6750" marT="6750" marB="6750" anchor="ctr">
                     <a:lnL>
                       <a:noFill/>
                     </a:lnL>
@@ -17378,7 +17378,7 @@
                       </a:r>
                     </a:p>
                   </a:txBody>
-                  <a:tcPr marL="81005" marR="6750" marT="6750" marB="0" anchor="ctr">
+                  <a:tcPr marL="81005" marR="6750" marT="6750" marB="6750" anchor="ctr">
                     <a:lnL>
                       <a:noFill/>
                     </a:lnL>
@@ -17434,7 +17434,7 @@
                       </a:r>
                     </a:p>
                   </a:txBody>
-                  <a:tcPr marL="81005" marR="6750" marT="6750" marB="0" anchor="ctr">
+                  <a:tcPr marL="81005" marR="6750" marT="6750" marB="6750" anchor="ctr">
                     <a:lnL>
                       <a:noFill/>
                     </a:lnL>
@@ -18345,7 +18345,7 @@
                 <a:latin typeface="맑은 고딕"/>
                 <a:ea typeface="맑은 고딕"/>
               </a:rPr>
-              <a:t>은 자세히 쓰는 것으로 해결되지 않는다. 승인 뒤 배송 요청 실패의 처리는 업무 담당자에게 물어야 한다.</a:t>
+              <a:t>은 자세히 작성하는 것으로 해결되지 않는다. 승인 뒤 배송 요청 실패의 처리는 업무 담당자에게 물어야 한다.</a:t>
             </a:r>
           </a:p>
           <a:p>
@@ -18378,7 +18378,7 @@
                 <a:latin typeface="맑은 고딕"/>
                 <a:ea typeface="맑은 고딕"/>
               </a:rPr>
-              <a:t>은 원인이 된 결정으로 되돌린다. 먼저 썼다는 이유로 명세를 영원히 고정하지 않는다.</a:t>
+              <a:t>은 원인이 된 결정으로 되돌린다. 먼저 작성했다는 이유로 명세를 영원히 고정하지 않는다.</a:t>
             </a:r>
           </a:p>
         </p:txBody>
@@ -18598,7 +18598,7 @@
                       </a:r>
                     </a:p>
                   </a:txBody>
-                  <a:tcPr marL="6750" marR="6750" marT="6750" marB="0" anchor="ctr">
+                  <a:tcPr marL="6750" marR="6750" marT="6750" marB="6750" anchor="ctr">
                     <a:lnL>
                       <a:noFill/>
                     </a:lnL>
@@ -18660,7 +18660,7 @@
                       </a:r>
                     </a:p>
                   </a:txBody>
-                  <a:tcPr marL="6750" marR="6750" marT="6750" marB="0" anchor="ctr">
+                  <a:tcPr marL="6750" marR="6750" marT="6750" marB="6750" anchor="ctr">
                     <a:lnL w="9525" cap="flat" cmpd="sng" algn="ctr">
                       <a:solidFill>
                         <a:schemeClr val="bg1">
@@ -18732,7 +18732,7 @@
                       </a:r>
                     </a:p>
                   </a:txBody>
-                  <a:tcPr marL="81005" marR="6750" marT="6750" marB="0" anchor="ctr">
+                  <a:tcPr marL="81005" marR="6750" marT="6750" marB="6750" anchor="ctr">
                     <a:lnL>
                       <a:noFill/>
                     </a:lnL>
@@ -18786,7 +18786,7 @@
                       </a:r>
                     </a:p>
                   </a:txBody>
-                  <a:tcPr marL="81005" marR="6750" marT="6750" marB="0" anchor="ctr">
+                  <a:tcPr marL="81005" marR="6750" marT="6750" marB="6750" anchor="ctr">
                     <a:lnL>
                       <a:noFill/>
                     </a:lnL>
@@ -18844,7 +18844,7 @@
                       </a:r>
                     </a:p>
                   </a:txBody>
-                  <a:tcPr marL="81005" marR="6750" marT="6750" marB="0" anchor="ctr">
+                  <a:tcPr marL="81005" marR="6750" marT="6750" marB="6750" anchor="ctr">
                     <a:lnL>
                       <a:noFill/>
                     </a:lnL>
@@ -18898,7 +18898,7 @@
                       </a:r>
                     </a:p>
                   </a:txBody>
-                  <a:tcPr marL="81005" marR="6750" marT="6750" marB="0" anchor="ctr">
+                  <a:tcPr marL="81005" marR="6750" marT="6750" marB="6750" anchor="ctr">
                     <a:lnL>
                       <a:noFill/>
                     </a:lnL>
@@ -18956,7 +18956,7 @@
                       </a:r>
                     </a:p>
                   </a:txBody>
-                  <a:tcPr marL="81005" marR="6750" marT="6750" marB="0" anchor="ctr">
+                  <a:tcPr marL="81005" marR="6750" marT="6750" marB="6750" anchor="ctr">
                     <a:lnL>
                       <a:noFill/>
                     </a:lnL>
@@ -19010,7 +19010,7 @@
                       </a:r>
                     </a:p>
                   </a:txBody>
-                  <a:tcPr marL="81005" marR="6750" marT="6750" marB="0" anchor="ctr">
+                  <a:tcPr marL="81005" marR="6750" marT="6750" marB="6750" anchor="ctr">
                     <a:lnL>
                       <a:noFill/>
                     </a:lnL>
@@ -19068,7 +19068,7 @@
                       </a:r>
                     </a:p>
                   </a:txBody>
-                  <a:tcPr marL="81005" marR="6750" marT="6750" marB="0" anchor="ctr">
+                  <a:tcPr marL="81005" marR="6750" marT="6750" marB="6750" anchor="ctr">
                     <a:lnL>
                       <a:noFill/>
                     </a:lnL>
@@ -19122,7 +19122,7 @@
                       </a:r>
                     </a:p>
                   </a:txBody>
-                  <a:tcPr marL="81005" marR="6750" marT="6750" marB="0" anchor="ctr">
+                  <a:tcPr marL="81005" marR="6750" marT="6750" marB="6750" anchor="ctr">
                     <a:lnL>
                       <a:noFill/>
                     </a:lnL>
@@ -19676,7 +19676,7 @@
                       </a:r>
                     </a:p>
                   </a:txBody>
-                  <a:tcPr marL="6750" marR="6750" marT="6750" marB="0" anchor="ctr">
+                  <a:tcPr marL="6750" marR="6750" marT="6750" marB="6750" anchor="ctr">
                     <a:lnL>
                       <a:noFill/>
                     </a:lnL>
@@ -19738,7 +19738,7 @@
                       </a:r>
                     </a:p>
                   </a:txBody>
-                  <a:tcPr marL="6750" marR="6750" marT="6750" marB="0" anchor="ctr">
+                  <a:tcPr marL="6750" marR="6750" marT="6750" marB="6750" anchor="ctr">
                     <a:lnL w="9525" cap="flat" cmpd="sng" algn="ctr">
                       <a:solidFill>
                         <a:schemeClr val="bg1">
@@ -19808,7 +19808,7 @@
                       </a:r>
                     </a:p>
                   </a:txBody>
-                  <a:tcPr marL="6750" marR="6750" marT="6750" marB="0" anchor="ctr">
+                  <a:tcPr marL="6750" marR="6750" marT="6750" marB="6750" anchor="ctr">
                     <a:lnL w="9525" cap="flat" cmpd="sng" algn="ctr">
                       <a:solidFill>
                         <a:schemeClr val="bg1">
@@ -19880,7 +19880,7 @@
                       </a:r>
                     </a:p>
                   </a:txBody>
-                  <a:tcPr marL="81005" marR="6750" marT="6750" marB="0" anchor="ctr">
+                  <a:tcPr marL="81005" marR="6750" marT="6750" marB="6750" anchor="ctr">
                     <a:lnL>
                       <a:noFill/>
                     </a:lnL>
@@ -19934,7 +19934,7 @@
                       </a:r>
                     </a:p>
                   </a:txBody>
-                  <a:tcPr marL="81005" marR="6750" marT="6750" marB="0" anchor="ctr">
+                  <a:tcPr marL="81005" marR="6750" marT="6750" marB="6750" anchor="ctr">
                     <a:lnL>
                       <a:noFill/>
                     </a:lnL>
@@ -19990,7 +19990,7 @@
                       </a:r>
                     </a:p>
                   </a:txBody>
-                  <a:tcPr marL="81005" marR="6750" marT="6750" marB="0" anchor="ctr">
+                  <a:tcPr marL="81005" marR="6750" marT="6750" marB="6750" anchor="ctr">
                     <a:lnL>
                       <a:noFill/>
                     </a:lnL>
@@ -20048,7 +20048,7 @@
                       </a:r>
                     </a:p>
                   </a:txBody>
-                  <a:tcPr marL="81005" marR="6750" marT="6750" marB="0" anchor="ctr">
+                  <a:tcPr marL="81005" marR="6750" marT="6750" marB="6750" anchor="ctr">
                     <a:lnL>
                       <a:noFill/>
                     </a:lnL>
@@ -20102,7 +20102,7 @@
                       </a:r>
                     </a:p>
                   </a:txBody>
-                  <a:tcPr marL="81005" marR="6750" marT="6750" marB="0" anchor="ctr">
+                  <a:tcPr marL="81005" marR="6750" marT="6750" marB="6750" anchor="ctr">
                     <a:lnL>
                       <a:noFill/>
                     </a:lnL>
@@ -20158,7 +20158,7 @@
                       </a:r>
                     </a:p>
                   </a:txBody>
-                  <a:tcPr marL="81005" marR="6750" marT="6750" marB="0" anchor="ctr">
+                  <a:tcPr marL="81005" marR="6750" marT="6750" marB="6750" anchor="ctr">
                     <a:lnL>
                       <a:noFill/>
                     </a:lnL>
@@ -20216,7 +20216,7 @@
                       </a:r>
                     </a:p>
                   </a:txBody>
-                  <a:tcPr marL="81005" marR="6750" marT="6750" marB="0" anchor="ctr">
+                  <a:tcPr marL="81005" marR="6750" marT="6750" marB="6750" anchor="ctr">
                     <a:lnL>
                       <a:noFill/>
                     </a:lnL>
@@ -20270,7 +20270,7 @@
                       </a:r>
                     </a:p>
                   </a:txBody>
-                  <a:tcPr marL="81005" marR="6750" marT="6750" marB="0" anchor="ctr">
+                  <a:tcPr marL="81005" marR="6750" marT="6750" marB="6750" anchor="ctr">
                     <a:lnL>
                       <a:noFill/>
                     </a:lnL>
@@ -20326,7 +20326,7 @@
                       </a:r>
                     </a:p>
                   </a:txBody>
-                  <a:tcPr marL="81005" marR="6750" marT="6750" marB="0" anchor="ctr">
+                  <a:tcPr marL="81005" marR="6750" marT="6750" marB="6750" anchor="ctr">
                     <a:lnL>
                       <a:noFill/>
                     </a:lnL>
@@ -20384,7 +20384,7 @@
                       </a:r>
                     </a:p>
                   </a:txBody>
-                  <a:tcPr marL="81005" marR="6750" marT="6750" marB="0" anchor="ctr">
+                  <a:tcPr marL="81005" marR="6750" marT="6750" marB="6750" anchor="ctr">
                     <a:lnL>
                       <a:noFill/>
                     </a:lnL>
@@ -20438,7 +20438,7 @@
                       </a:r>
                     </a:p>
                   </a:txBody>
-                  <a:tcPr marL="81005" marR="6750" marT="6750" marB="0" anchor="ctr">
+                  <a:tcPr marL="81005" marR="6750" marT="6750" marB="6750" anchor="ctr">
                     <a:lnL>
                       <a:noFill/>
                     </a:lnL>
@@ -20494,7 +20494,7 @@
                       </a:r>
                     </a:p>
                   </a:txBody>
-                  <a:tcPr marL="81005" marR="6750" marT="6750" marB="0" anchor="ctr">
+                  <a:tcPr marL="81005" marR="6750" marT="6750" marB="6750" anchor="ctr">
                     <a:lnL>
                       <a:noFill/>
                     </a:lnL>
@@ -21059,7 +21059,7 @@
                       </a:r>
                     </a:p>
                   </a:txBody>
-                  <a:tcPr marL="6750" marR="6750" marT="6750" marB="0" anchor="ctr">
+                  <a:tcPr marL="6750" marR="6750" marT="6750" marB="6750" anchor="ctr">
                     <a:lnL>
                       <a:noFill/>
                     </a:lnL>
@@ -21121,7 +21121,7 @@
                       </a:r>
                     </a:p>
                   </a:txBody>
-                  <a:tcPr marL="6750" marR="6750" marT="6750" marB="0" anchor="ctr">
+                  <a:tcPr marL="6750" marR="6750" marT="6750" marB="6750" anchor="ctr">
                     <a:lnL w="9525" cap="flat" cmpd="sng" algn="ctr">
                       <a:solidFill>
                         <a:schemeClr val="bg1">
@@ -21191,7 +21191,7 @@
                       </a:r>
                     </a:p>
                   </a:txBody>
-                  <a:tcPr marL="6750" marR="6750" marT="6750" marB="0" anchor="ctr">
+                  <a:tcPr marL="6750" marR="6750" marT="6750" marB="6750" anchor="ctr">
                     <a:lnL w="9525" cap="flat" cmpd="sng" algn="ctr">
                       <a:solidFill>
                         <a:schemeClr val="bg1">
@@ -21263,7 +21263,7 @@
                       </a:r>
                     </a:p>
                   </a:txBody>
-                  <a:tcPr marL="81005" marR="6750" marT="6750" marB="0" anchor="ctr">
+                  <a:tcPr marL="81005" marR="6750" marT="6750" marB="6750" anchor="ctr">
                     <a:lnL>
                       <a:noFill/>
                     </a:lnL>
@@ -21317,7 +21317,7 @@
                       </a:r>
                     </a:p>
                   </a:txBody>
-                  <a:tcPr marL="81005" marR="6750" marT="6750" marB="0" anchor="ctr">
+                  <a:tcPr marL="81005" marR="6750" marT="6750" marB="6750" anchor="ctr">
                     <a:lnL>
                       <a:noFill/>
                     </a:lnL>
@@ -21373,7 +21373,7 @@
                       </a:r>
                     </a:p>
                   </a:txBody>
-                  <a:tcPr marL="81005" marR="6750" marT="6750" marB="0" anchor="ctr">
+                  <a:tcPr marL="81005" marR="6750" marT="6750" marB="6750" anchor="ctr">
                     <a:lnL>
                       <a:noFill/>
                     </a:lnL>
@@ -21431,7 +21431,7 @@
                       </a:r>
                     </a:p>
                   </a:txBody>
-                  <a:tcPr marL="81005" marR="6750" marT="6750" marB="0" anchor="ctr">
+                  <a:tcPr marL="81005" marR="6750" marT="6750" marB="6750" anchor="ctr">
                     <a:lnL>
                       <a:noFill/>
                     </a:lnL>
@@ -21485,7 +21485,7 @@
                       </a:r>
                     </a:p>
                   </a:txBody>
-                  <a:tcPr marL="81005" marR="6750" marT="6750" marB="0" anchor="ctr">
+                  <a:tcPr marL="81005" marR="6750" marT="6750" marB="6750" anchor="ctr">
                     <a:lnL>
                       <a:noFill/>
                     </a:lnL>
@@ -21541,7 +21541,7 @@
                       </a:r>
                     </a:p>
                   </a:txBody>
-                  <a:tcPr marL="81005" marR="6750" marT="6750" marB="0" anchor="ctr">
+                  <a:tcPr marL="81005" marR="6750" marT="6750" marB="6750" anchor="ctr">
                     <a:lnL>
                       <a:noFill/>
                     </a:lnL>
@@ -21599,7 +21599,7 @@
                       </a:r>
                     </a:p>
                   </a:txBody>
-                  <a:tcPr marL="81005" marR="6750" marT="6750" marB="0" anchor="ctr">
+                  <a:tcPr marL="81005" marR="6750" marT="6750" marB="6750" anchor="ctr">
                     <a:lnL>
                       <a:noFill/>
                     </a:lnL>
@@ -21653,7 +21653,7 @@
                       </a:r>
                     </a:p>
                   </a:txBody>
-                  <a:tcPr marL="81005" marR="6750" marT="6750" marB="0" anchor="ctr">
+                  <a:tcPr marL="81005" marR="6750" marT="6750" marB="6750" anchor="ctr">
                     <a:lnL>
                       <a:noFill/>
                     </a:lnL>
@@ -21709,7 +21709,7 @@
                       </a:r>
                     </a:p>
                   </a:txBody>
-                  <a:tcPr marL="81005" marR="6750" marT="6750" marB="0" anchor="ctr">
+                  <a:tcPr marL="81005" marR="6750" marT="6750" marB="6750" anchor="ctr">
                     <a:lnL>
                       <a:noFill/>
                     </a:lnL>
@@ -21767,7 +21767,7 @@
                       </a:r>
                     </a:p>
                   </a:txBody>
-                  <a:tcPr marL="81005" marR="6750" marT="6750" marB="0" anchor="ctr">
+                  <a:tcPr marL="81005" marR="6750" marT="6750" marB="6750" anchor="ctr">
                     <a:lnL>
                       <a:noFill/>
                     </a:lnL>
@@ -21821,7 +21821,7 @@
                       </a:r>
                     </a:p>
                   </a:txBody>
-                  <a:tcPr marL="81005" marR="6750" marT="6750" marB="0" anchor="ctr">
+                  <a:tcPr marL="81005" marR="6750" marT="6750" marB="6750" anchor="ctr">
                     <a:lnL>
                       <a:noFill/>
                     </a:lnL>
@@ -21877,7 +21877,7 @@
                       </a:r>
                     </a:p>
                   </a:txBody>
-                  <a:tcPr marL="81005" marR="6750" marT="6750" marB="0" anchor="ctr">
+                  <a:tcPr marL="81005" marR="6750" marT="6750" marB="6750" anchor="ctr">
                     <a:lnL>
                       <a:noFill/>
                     </a:lnL>
@@ -21935,7 +21935,7 @@
                       </a:r>
                     </a:p>
                   </a:txBody>
-                  <a:tcPr marL="81005" marR="6750" marT="6750" marB="0" anchor="ctr">
+                  <a:tcPr marL="81005" marR="6750" marT="6750" marB="6750" anchor="ctr">
                     <a:lnL>
                       <a:noFill/>
                     </a:lnL>
@@ -21989,7 +21989,7 @@
                       </a:r>
                     </a:p>
                   </a:txBody>
-                  <a:tcPr marL="81005" marR="6750" marT="6750" marB="0" anchor="ctr">
+                  <a:tcPr marL="81005" marR="6750" marT="6750" marB="6750" anchor="ctr">
                     <a:lnL>
                       <a:noFill/>
                     </a:lnL>
@@ -22045,7 +22045,7 @@
                       </a:r>
                     </a:p>
                   </a:txBody>
-                  <a:tcPr marL="81005" marR="6750" marT="6750" marB="0" anchor="ctr">
+                  <a:tcPr marL="81005" marR="6750" marT="6750" marB="6750" anchor="ctr">
                     <a:lnL>
                       <a:noFill/>
                     </a:lnL>
@@ -23801,7 +23801,7 @@
                 <a:latin typeface="맑은 고딕"/>
                 <a:ea typeface="맑은 고딕"/>
               </a:rPr>
-              <a:t>는 기존 명세·분석·설계를 AI 구현에 쓰고, </a:t>
+              <a:t>는 기존 명세·분석·설계를 AI 구현에 사용하고, </a:t>
             </a:r>
             <a:r>
               <a:rPr sz="1800" b="1">
@@ -25345,7 +25345,7 @@
                       </a:r>
                     </a:p>
                   </a:txBody>
-                  <a:tcPr marL="6750" marR="6750" marT="6750" marB="0" anchor="ctr">
+                  <a:tcPr marL="6750" marR="6750" marT="6750" marB="6750" anchor="ctr">
                     <a:lnL>
                       <a:noFill/>
                     </a:lnL>
@@ -25407,7 +25407,7 @@
                       </a:r>
                     </a:p>
                   </a:txBody>
-                  <a:tcPr marL="6750" marR="6750" marT="6750" marB="0" anchor="ctr">
+                  <a:tcPr marL="6750" marR="6750" marT="6750" marB="6750" anchor="ctr">
                     <a:lnL w="9525" cap="flat" cmpd="sng" algn="ctr">
                       <a:solidFill>
                         <a:schemeClr val="bg1">
@@ -25477,7 +25477,7 @@
                       </a:r>
                     </a:p>
                   </a:txBody>
-                  <a:tcPr marL="6750" marR="6750" marT="6750" marB="0" anchor="ctr">
+                  <a:tcPr marL="6750" marR="6750" marT="6750" marB="6750" anchor="ctr">
                     <a:lnL w="9525" cap="flat" cmpd="sng" algn="ctr">
                       <a:solidFill>
                         <a:schemeClr val="bg1">
@@ -25549,7 +25549,7 @@
                       </a:r>
                     </a:p>
                   </a:txBody>
-                  <a:tcPr marL="81005" marR="6750" marT="6750" marB="0" anchor="ctr">
+                  <a:tcPr marL="81005" marR="6750" marT="6750" marB="6750" anchor="ctr">
                     <a:lnL>
                       <a:noFill/>
                     </a:lnL>
@@ -25603,7 +25603,7 @@
                       </a:r>
                     </a:p>
                   </a:txBody>
-                  <a:tcPr marL="81005" marR="6750" marT="6750" marB="0" anchor="ctr">
+                  <a:tcPr marL="81005" marR="6750" marT="6750" marB="6750" anchor="ctr">
                     <a:lnL>
                       <a:noFill/>
                     </a:lnL>
@@ -25659,7 +25659,7 @@
                       </a:r>
                     </a:p>
                   </a:txBody>
-                  <a:tcPr marL="81005" marR="6750" marT="6750" marB="0" anchor="ctr">
+                  <a:tcPr marL="81005" marR="6750" marT="6750" marB="6750" anchor="ctr">
                     <a:lnL>
                       <a:noFill/>
                     </a:lnL>
@@ -25717,7 +25717,7 @@
                       </a:r>
                     </a:p>
                   </a:txBody>
-                  <a:tcPr marL="81005" marR="6750" marT="6750" marB="0" anchor="ctr">
+                  <a:tcPr marL="81005" marR="6750" marT="6750" marB="6750" anchor="ctr">
                     <a:lnL>
                       <a:noFill/>
                     </a:lnL>
@@ -25771,7 +25771,7 @@
                       </a:r>
                     </a:p>
                   </a:txBody>
-                  <a:tcPr marL="81005" marR="6750" marT="6750" marB="0" anchor="ctr">
+                  <a:tcPr marL="81005" marR="6750" marT="6750" marB="6750" anchor="ctr">
                     <a:lnL>
                       <a:noFill/>
                     </a:lnL>
@@ -25827,7 +25827,7 @@
                       </a:r>
                     </a:p>
                   </a:txBody>
-                  <a:tcPr marL="81005" marR="6750" marT="6750" marB="0" anchor="ctr">
+                  <a:tcPr marL="81005" marR="6750" marT="6750" marB="6750" anchor="ctr">
                     <a:lnL>
                       <a:noFill/>
                     </a:lnL>
@@ -25885,7 +25885,7 @@
                       </a:r>
                     </a:p>
                   </a:txBody>
-                  <a:tcPr marL="81005" marR="6750" marT="6750" marB="0" anchor="ctr">
+                  <a:tcPr marL="81005" marR="6750" marT="6750" marB="6750" anchor="ctr">
                     <a:lnL>
                       <a:noFill/>
                     </a:lnL>
@@ -25939,7 +25939,7 @@
                       </a:r>
                     </a:p>
                   </a:txBody>
-                  <a:tcPr marL="81005" marR="6750" marT="6750" marB="0" anchor="ctr">
+                  <a:tcPr marL="81005" marR="6750" marT="6750" marB="6750" anchor="ctr">
                     <a:lnL>
                       <a:noFill/>
                     </a:lnL>
@@ -25995,7 +25995,7 @@
                       </a:r>
                     </a:p>
                   </a:txBody>
-                  <a:tcPr marL="81005" marR="6750" marT="6750" marB="0" anchor="ctr">
+                  <a:tcPr marL="81005" marR="6750" marT="6750" marB="6750" anchor="ctr">
                     <a:lnL>
                       <a:noFill/>
                     </a:lnL>
@@ -26053,7 +26053,7 @@
                       </a:r>
                     </a:p>
                   </a:txBody>
-                  <a:tcPr marL="81005" marR="6750" marT="6750" marB="0" anchor="ctr">
+                  <a:tcPr marL="81005" marR="6750" marT="6750" marB="6750" anchor="ctr">
                     <a:lnL>
                       <a:noFill/>
                     </a:lnL>
@@ -26107,7 +26107,7 @@
                       </a:r>
                     </a:p>
                   </a:txBody>
-                  <a:tcPr marL="81005" marR="6750" marT="6750" marB="0" anchor="ctr">
+                  <a:tcPr marL="81005" marR="6750" marT="6750" marB="6750" anchor="ctr">
                     <a:lnL>
                       <a:noFill/>
                     </a:lnL>
@@ -26163,7 +26163,7 @@
                       </a:r>
                     </a:p>
                   </a:txBody>
-                  <a:tcPr marL="81005" marR="6750" marT="6750" marB="0" anchor="ctr">
+                  <a:tcPr marL="81005" marR="6750" marT="6750" marB="6750" anchor="ctr">
                     <a:lnL>
                       <a:noFill/>
                     </a:lnL>
@@ -29398,7 +29398,7 @@
                       </a:r>
                     </a:p>
                   </a:txBody>
-                  <a:tcPr marL="6750" marR="6750" marT="6750" marB="0" anchor="ctr">
+                  <a:tcPr marL="6750" marR="6750" marT="6750" marB="6750" anchor="ctr">
                     <a:lnL>
                       <a:noFill/>
                     </a:lnL>
@@ -29460,7 +29460,7 @@
                       </a:r>
                     </a:p>
                   </a:txBody>
-                  <a:tcPr marL="6750" marR="6750" marT="6750" marB="0" anchor="ctr">
+                  <a:tcPr marL="6750" marR="6750" marT="6750" marB="6750" anchor="ctr">
                     <a:lnL w="9525" cap="flat" cmpd="sng" algn="ctr">
                       <a:solidFill>
                         <a:schemeClr val="bg1">
@@ -29530,7 +29530,7 @@
                       </a:r>
                     </a:p>
                   </a:txBody>
-                  <a:tcPr marL="6750" marR="6750" marT="6750" marB="0" anchor="ctr">
+                  <a:tcPr marL="6750" marR="6750" marT="6750" marB="6750" anchor="ctr">
                     <a:lnL w="9525" cap="flat" cmpd="sng" algn="ctr">
                       <a:solidFill>
                         <a:schemeClr val="bg1">
@@ -29602,7 +29602,7 @@
                       </a:r>
                     </a:p>
                   </a:txBody>
-                  <a:tcPr marL="81005" marR="6750" marT="6750" marB="0" anchor="ctr">
+                  <a:tcPr marL="81005" marR="6750" marT="6750" marB="6750" anchor="ctr">
                     <a:lnL>
                       <a:noFill/>
                     </a:lnL>
@@ -29656,7 +29656,7 @@
                       </a:r>
                     </a:p>
                   </a:txBody>
-                  <a:tcPr marL="81005" marR="6750" marT="6750" marB="0" anchor="ctr">
+                  <a:tcPr marL="81005" marR="6750" marT="6750" marB="6750" anchor="ctr">
                     <a:lnL>
                       <a:noFill/>
                     </a:lnL>
@@ -29712,7 +29712,7 @@
                       </a:r>
                     </a:p>
                   </a:txBody>
-                  <a:tcPr marL="81005" marR="6750" marT="6750" marB="0" anchor="ctr">
+                  <a:tcPr marL="81005" marR="6750" marT="6750" marB="6750" anchor="ctr">
                     <a:lnL>
                       <a:noFill/>
                     </a:lnL>
@@ -29770,7 +29770,7 @@
                       </a:r>
                     </a:p>
                   </a:txBody>
-                  <a:tcPr marL="81005" marR="6750" marT="6750" marB="0" anchor="ctr">
+                  <a:tcPr marL="81005" marR="6750" marT="6750" marB="6750" anchor="ctr">
                     <a:lnL>
                       <a:noFill/>
                     </a:lnL>
@@ -29824,7 +29824,7 @@
                       </a:r>
                     </a:p>
                   </a:txBody>
-                  <a:tcPr marL="81005" marR="6750" marT="6750" marB="0" anchor="ctr">
+                  <a:tcPr marL="81005" marR="6750" marT="6750" marB="6750" anchor="ctr">
                     <a:lnL>
                       <a:noFill/>
                     </a:lnL>
@@ -29880,7 +29880,7 @@
                       </a:r>
                     </a:p>
                   </a:txBody>
-                  <a:tcPr marL="81005" marR="6750" marT="6750" marB="0" anchor="ctr">
+                  <a:tcPr marL="81005" marR="6750" marT="6750" marB="6750" anchor="ctr">
                     <a:lnL>
                       <a:noFill/>
                     </a:lnL>
@@ -29938,7 +29938,7 @@
                       </a:r>
                     </a:p>
                   </a:txBody>
-                  <a:tcPr marL="81005" marR="6750" marT="6750" marB="0" anchor="ctr">
+                  <a:tcPr marL="81005" marR="6750" marT="6750" marB="6750" anchor="ctr">
                     <a:lnL>
                       <a:noFill/>
                     </a:lnL>
@@ -29992,7 +29992,7 @@
                       </a:r>
                     </a:p>
                   </a:txBody>
-                  <a:tcPr marL="81005" marR="6750" marT="6750" marB="0" anchor="ctr">
+                  <a:tcPr marL="81005" marR="6750" marT="6750" marB="6750" anchor="ctr">
                     <a:lnL>
                       <a:noFill/>
                     </a:lnL>
@@ -30048,7 +30048,7 @@
                       </a:r>
                     </a:p>
                   </a:txBody>
-                  <a:tcPr marL="81005" marR="6750" marT="6750" marB="0" anchor="ctr">
+                  <a:tcPr marL="81005" marR="6750" marT="6750" marB="6750" anchor="ctr">
                     <a:lnL>
                       <a:noFill/>
                     </a:lnL>
@@ -30633,7 +30633,7 @@
                       </a:r>
                     </a:p>
                   </a:txBody>
-                  <a:tcPr marL="6750" marR="6750" marT="6750" marB="0" anchor="ctr">
+                  <a:tcPr marL="6750" marR="6750" marT="6750" marB="6750" anchor="ctr">
                     <a:lnL>
                       <a:noFill/>
                     </a:lnL>
@@ -30695,7 +30695,7 @@
                       </a:r>
                     </a:p>
                   </a:txBody>
-                  <a:tcPr marL="6750" marR="6750" marT="6750" marB="0" anchor="ctr">
+                  <a:tcPr marL="6750" marR="6750" marT="6750" marB="6750" anchor="ctr">
                     <a:lnL w="9525" cap="flat" cmpd="sng" algn="ctr">
                       <a:solidFill>
                         <a:schemeClr val="bg1">
@@ -30765,7 +30765,7 @@
                       </a:r>
                     </a:p>
                   </a:txBody>
-                  <a:tcPr marL="6750" marR="6750" marT="6750" marB="0" anchor="ctr">
+                  <a:tcPr marL="6750" marR="6750" marT="6750" marB="6750" anchor="ctr">
                     <a:lnL w="9525" cap="flat" cmpd="sng" algn="ctr">
                       <a:solidFill>
                         <a:schemeClr val="bg1">
@@ -30837,7 +30837,7 @@
                       </a:r>
                     </a:p>
                   </a:txBody>
-                  <a:tcPr marL="81005" marR="6750" marT="6750" marB="0" anchor="ctr">
+                  <a:tcPr marL="81005" marR="6750" marT="6750" marB="6750" anchor="ctr">
                     <a:lnL>
                       <a:noFill/>
                     </a:lnL>
@@ -30891,7 +30891,7 @@
                       </a:r>
                     </a:p>
                   </a:txBody>
-                  <a:tcPr marL="81005" marR="6750" marT="6750" marB="0" anchor="ctr">
+                  <a:tcPr marL="81005" marR="6750" marT="6750" marB="6750" anchor="ctr">
                     <a:lnL>
                       <a:noFill/>
                     </a:lnL>
@@ -30947,7 +30947,7 @@
                       </a:r>
                     </a:p>
                   </a:txBody>
-                  <a:tcPr marL="81005" marR="6750" marT="6750" marB="0" anchor="ctr">
+                  <a:tcPr marL="81005" marR="6750" marT="6750" marB="6750" anchor="ctr">
                     <a:lnL>
                       <a:noFill/>
                     </a:lnL>
@@ -31005,7 +31005,7 @@
                       </a:r>
                     </a:p>
                   </a:txBody>
-                  <a:tcPr marL="81005" marR="6750" marT="6750" marB="0" anchor="ctr">
+                  <a:tcPr marL="81005" marR="6750" marT="6750" marB="6750" anchor="ctr">
                     <a:lnL>
                       <a:noFill/>
                     </a:lnL>
@@ -31059,7 +31059,7 @@
                       </a:r>
                     </a:p>
                   </a:txBody>
-                  <a:tcPr marL="81005" marR="6750" marT="6750" marB="0" anchor="ctr">
+                  <a:tcPr marL="81005" marR="6750" marT="6750" marB="6750" anchor="ctr">
                     <a:lnL>
                       <a:noFill/>
                     </a:lnL>
@@ -31115,7 +31115,7 @@
                       </a:r>
                     </a:p>
                   </a:txBody>
-                  <a:tcPr marL="81005" marR="6750" marT="6750" marB="0" anchor="ctr">
+                  <a:tcPr marL="81005" marR="6750" marT="6750" marB="6750" anchor="ctr">
                     <a:lnL>
                       <a:noFill/>
                     </a:lnL>
@@ -31173,7 +31173,7 @@
                       </a:r>
                     </a:p>
                   </a:txBody>
-                  <a:tcPr marL="81005" marR="6750" marT="6750" marB="0" anchor="ctr">
+                  <a:tcPr marL="81005" marR="6750" marT="6750" marB="6750" anchor="ctr">
                     <a:lnL>
                       <a:noFill/>
                     </a:lnL>
@@ -31227,7 +31227,7 @@
                       </a:r>
                     </a:p>
                   </a:txBody>
-                  <a:tcPr marL="81005" marR="6750" marT="6750" marB="0" anchor="ctr">
+                  <a:tcPr marL="81005" marR="6750" marT="6750" marB="6750" anchor="ctr">
                     <a:lnL>
                       <a:noFill/>
                     </a:lnL>
@@ -31283,7 +31283,7 @@
                       </a:r>
                     </a:p>
                   </a:txBody>
-                  <a:tcPr marL="81005" marR="6750" marT="6750" marB="0" anchor="ctr">
+                  <a:tcPr marL="81005" marR="6750" marT="6750" marB="6750" anchor="ctr">
                     <a:lnL>
                       <a:noFill/>
                     </a:lnL>
@@ -31341,7 +31341,7 @@
                       </a:r>
                     </a:p>
                   </a:txBody>
-                  <a:tcPr marL="81005" marR="6750" marT="6750" marB="0" anchor="ctr">
+                  <a:tcPr marL="81005" marR="6750" marT="6750" marB="6750" anchor="ctr">
                     <a:lnL>
                       <a:noFill/>
                     </a:lnL>
@@ -31395,7 +31395,7 @@
                       </a:r>
                     </a:p>
                   </a:txBody>
-                  <a:tcPr marL="81005" marR="6750" marT="6750" marB="0" anchor="ctr">
+                  <a:tcPr marL="81005" marR="6750" marT="6750" marB="6750" anchor="ctr">
                     <a:lnL>
                       <a:noFill/>
                     </a:lnL>
@@ -31451,7 +31451,7 @@
                       </a:r>
                     </a:p>
                   </a:txBody>
-                  <a:tcPr marL="81005" marR="6750" marT="6750" marB="0" anchor="ctr">
+                  <a:tcPr marL="81005" marR="6750" marT="6750" marB="6750" anchor="ctr">
                     <a:lnL>
                       <a:noFill/>
                     </a:lnL>
@@ -32175,7 +32175,7 @@
                 <a:latin typeface="맑은 고딕"/>
                 <a:ea typeface="맑은 고딕"/>
               </a:rPr>
-              <a:t>이라는 세 가지 핵심 측면이 있다</a:t>
+              <a:t>이라는 3가지 핵심 측면이 있다</a:t>
             </a:r>
             <a:r>
               <a:rPr sz="1000" b="0">
@@ -32828,7 +32828,7 @@
                 <a:latin typeface="맑은 고딕"/>
                 <a:ea typeface="맑은 고딕"/>
               </a:rPr>
-              <a:t>는 상품을 주문하고 배송받는 것이다. 화면의 버튼이나 구현 클래스를 스토리의 중심으로 쓰지 않는다.</a:t>
+              <a:t>는 상품을 주문하고 배송받는 것이다. 화면의 버튼이나 구현 클래스를 스토리의 중심으로 삼지 않는다.</a:t>
             </a:r>
           </a:p>
           <a:p>
@@ -33115,7 +33115,7 @@
                       </a:r>
                     </a:p>
                   </a:txBody>
-                  <a:tcPr marL="6750" marR="6750" marT="6750" marB="0" anchor="ctr">
+                  <a:tcPr marL="6750" marR="6750" marT="6750" marB="6750" anchor="ctr">
                     <a:lnL>
                       <a:noFill/>
                     </a:lnL>
@@ -33177,7 +33177,7 @@
                       </a:r>
                     </a:p>
                   </a:txBody>
-                  <a:tcPr marL="6750" marR="6750" marT="6750" marB="0" anchor="ctr">
+                  <a:tcPr marL="6750" marR="6750" marT="6750" marB="6750" anchor="ctr">
                     <a:lnL w="9525" cap="flat" cmpd="sng" algn="ctr">
                       <a:solidFill>
                         <a:schemeClr val="bg1">
@@ -33247,7 +33247,7 @@
                       </a:r>
                     </a:p>
                   </a:txBody>
-                  <a:tcPr marL="6750" marR="6750" marT="6750" marB="0" anchor="ctr">
+                  <a:tcPr marL="6750" marR="6750" marT="6750" marB="6750" anchor="ctr">
                     <a:lnL w="9525" cap="flat" cmpd="sng" algn="ctr">
                       <a:solidFill>
                         <a:schemeClr val="bg1">
@@ -33319,7 +33319,7 @@
                       </a:r>
                     </a:p>
                   </a:txBody>
-                  <a:tcPr marL="81005" marR="6750" marT="6750" marB="0" anchor="ctr">
+                  <a:tcPr marL="81005" marR="6750" marT="6750" marB="6750" anchor="ctr">
                     <a:lnL>
                       <a:noFill/>
                     </a:lnL>
@@ -33373,7 +33373,7 @@
                       </a:r>
                     </a:p>
                   </a:txBody>
-                  <a:tcPr marL="81005" marR="6750" marT="6750" marB="0" anchor="ctr">
+                  <a:tcPr marL="81005" marR="6750" marT="6750" marB="6750" anchor="ctr">
                     <a:lnL>
                       <a:noFill/>
                     </a:lnL>
@@ -33429,7 +33429,7 @@
                       </a:r>
                     </a:p>
                   </a:txBody>
-                  <a:tcPr marL="81005" marR="6750" marT="6750" marB="0" anchor="ctr">
+                  <a:tcPr marL="81005" marR="6750" marT="6750" marB="6750" anchor="ctr">
                     <a:lnL>
                       <a:noFill/>
                     </a:lnL>
@@ -33487,7 +33487,7 @@
                       </a:r>
                     </a:p>
                   </a:txBody>
-                  <a:tcPr marL="81005" marR="6750" marT="6750" marB="0" anchor="ctr">
+                  <a:tcPr marL="81005" marR="6750" marT="6750" marB="6750" anchor="ctr">
                     <a:lnL>
                       <a:noFill/>
                     </a:lnL>
@@ -33541,7 +33541,7 @@
                       </a:r>
                     </a:p>
                   </a:txBody>
-                  <a:tcPr marL="81005" marR="6750" marT="6750" marB="0" anchor="ctr">
+                  <a:tcPr marL="81005" marR="6750" marT="6750" marB="6750" anchor="ctr">
                     <a:lnL>
                       <a:noFill/>
                     </a:lnL>
@@ -33597,7 +33597,7 @@
                       </a:r>
                     </a:p>
                   </a:txBody>
-                  <a:tcPr marL="81005" marR="6750" marT="6750" marB="0" anchor="ctr">
+                  <a:tcPr marL="81005" marR="6750" marT="6750" marB="6750" anchor="ctr">
                     <a:lnL>
                       <a:noFill/>
                     </a:lnL>
@@ -33655,7 +33655,7 @@
                       </a:r>
                     </a:p>
                   </a:txBody>
-                  <a:tcPr marL="81005" marR="6750" marT="6750" marB="0" anchor="ctr">
+                  <a:tcPr marL="81005" marR="6750" marT="6750" marB="6750" anchor="ctr">
                     <a:lnL>
                       <a:noFill/>
                     </a:lnL>
@@ -33709,7 +33709,7 @@
                       </a:r>
                     </a:p>
                   </a:txBody>
-                  <a:tcPr marL="81005" marR="6750" marT="6750" marB="0" anchor="ctr">
+                  <a:tcPr marL="81005" marR="6750" marT="6750" marB="6750" anchor="ctr">
                     <a:lnL>
                       <a:noFill/>
                     </a:lnL>
@@ -33765,7 +33765,7 @@
                       </a:r>
                     </a:p>
                   </a:txBody>
-                  <a:tcPr marL="81005" marR="6750" marT="6750" marB="0" anchor="ctr">
+                  <a:tcPr marL="81005" marR="6750" marT="6750" marB="6750" anchor="ctr">
                     <a:lnL>
                       <a:noFill/>
                     </a:lnL>
@@ -33823,7 +33823,7 @@
                       </a:r>
                     </a:p>
                   </a:txBody>
-                  <a:tcPr marL="81005" marR="6750" marT="6750" marB="0" anchor="ctr">
+                  <a:tcPr marL="81005" marR="6750" marT="6750" marB="6750" anchor="ctr">
                     <a:lnL>
                       <a:noFill/>
                     </a:lnL>
@@ -33877,7 +33877,7 @@
                       </a:r>
                     </a:p>
                   </a:txBody>
-                  <a:tcPr marL="81005" marR="6750" marT="6750" marB="0" anchor="ctr">
+                  <a:tcPr marL="81005" marR="6750" marT="6750" marB="6750" anchor="ctr">
                     <a:lnL>
                       <a:noFill/>
                     </a:lnL>
@@ -33933,7 +33933,7 @@
                       </a:r>
                     </a:p>
                   </a:txBody>
-                  <a:tcPr marL="81005" marR="6750" marT="6750" marB="0" anchor="ctr">
+                  <a:tcPr marL="81005" marR="6750" marT="6750" marB="6750" anchor="ctr">
                     <a:lnL>
                       <a:noFill/>
                     </a:lnL>
@@ -33991,7 +33991,7 @@
                       </a:r>
                     </a:p>
                   </a:txBody>
-                  <a:tcPr marL="81005" marR="6750" marT="6750" marB="0" anchor="ctr">
+                  <a:tcPr marL="81005" marR="6750" marT="6750" marB="6750" anchor="ctr">
                     <a:lnL>
                       <a:noFill/>
                     </a:lnL>
@@ -34045,7 +34045,7 @@
                       </a:r>
                     </a:p>
                   </a:txBody>
-                  <a:tcPr marL="81005" marR="6750" marT="6750" marB="0" anchor="ctr">
+                  <a:tcPr marL="81005" marR="6750" marT="6750" marB="6750" anchor="ctr">
                     <a:lnL>
                       <a:noFill/>
                     </a:lnL>
@@ -34101,7 +34101,7 @@
                       </a:r>
                     </a:p>
                   </a:txBody>
-                  <a:tcPr marL="81005" marR="6750" marT="6750" marB="0" anchor="ctr">
+                  <a:tcPr marL="81005" marR="6750" marT="6750" marB="6750" anchor="ctr">
                     <a:lnL>
                       <a:noFill/>
                     </a:lnL>
@@ -34159,7 +34159,7 @@
                       </a:r>
                     </a:p>
                   </a:txBody>
-                  <a:tcPr marL="81005" marR="6750" marT="6750" marB="0" anchor="ctr">
+                  <a:tcPr marL="81005" marR="6750" marT="6750" marB="6750" anchor="ctr">
                     <a:lnL>
                       <a:noFill/>
                     </a:lnL>
@@ -34213,7 +34213,7 @@
                       </a:r>
                     </a:p>
                   </a:txBody>
-                  <a:tcPr marL="81005" marR="6750" marT="6750" marB="0" anchor="ctr">
+                  <a:tcPr marL="81005" marR="6750" marT="6750" marB="6750" anchor="ctr">
                     <a:lnL>
                       <a:noFill/>
                     </a:lnL>
@@ -34269,7 +34269,7 @@
                       </a:r>
                     </a:p>
                   </a:txBody>
-                  <a:tcPr marL="81005" marR="6750" marT="6750" marB="0" anchor="ctr">
+                  <a:tcPr marL="81005" marR="6750" marT="6750" marB="6750" anchor="ctr">
                     <a:lnL>
                       <a:noFill/>
                     </a:lnL>

--- a/courses/ai-native/sessions/s03.pptx
+++ b/courses/ai-native/sessions/s03.pptx
@@ -1222,7 +1222,7 @@
             <a:pPr lvl="0"/>
             <a:r>
               <a:rPr lang="ko-KR" sz="1200"/>
-              <a:t>1시간 30분 세션이다. "세션 02. LLM이라는 재료"가 맡기는 형태를 골랐다면, 이제 무엇을 맡기고 무엇으로 받아들일지 정한다.</a:t>
+              <a:t>1시간 30분 세션이다. "세션 02. LLM이라는 도구"가 맡기는 형태를 골랐다면, 이제 무엇을 맡기고 무엇으로 받아들일지 정한다.</a:t>
             </a:r>
           </a:p>
           <a:p>
